--- a/docs/presentation.pptx
+++ b/docs/presentation.pptx
@@ -5,26 +5,26 @@
     <p:sldMasterId id="2147483648" r:id="rId1"/>
   </p:sldMasterIdLst>
   <p:sldIdLst>
-    <p:sldId id="256" r:id="rId7"/>
-    <p:sldId id="257" r:id="rId8"/>
-    <p:sldId id="258" r:id="rId9"/>
-    <p:sldId id="259" r:id="rId10"/>
-    <p:sldId id="260" r:id="rId11"/>
-    <p:sldId id="261" r:id="rId12"/>
-    <p:sldId id="262" r:id="rId13"/>
-    <p:sldId id="263" r:id="rId14"/>
-    <p:sldId id="264" r:id="rId15"/>
-    <p:sldId id="265" r:id="rId16"/>
-    <p:sldId id="266" r:id="rId17"/>
-    <p:sldId id="267" r:id="rId18"/>
-    <p:sldId id="268" r:id="rId19"/>
-    <p:sldId id="269" r:id="rId20"/>
-    <p:sldId id="270" r:id="rId21"/>
-    <p:sldId id="271" r:id="rId22"/>
-    <p:sldId id="272" r:id="rId23"/>
-    <p:sldId id="273" r:id="rId24"/>
+    <p:sldId id="256" r:id="rId2"/>
+    <p:sldId id="258" r:id="rId3"/>
+    <p:sldId id="257" r:id="rId4"/>
+    <p:sldId id="259" r:id="rId5"/>
+    <p:sldId id="260" r:id="rId6"/>
+    <p:sldId id="261" r:id="rId7"/>
+    <p:sldId id="262" r:id="rId8"/>
+    <p:sldId id="263" r:id="rId9"/>
+    <p:sldId id="264" r:id="rId10"/>
+    <p:sldId id="265" r:id="rId11"/>
+    <p:sldId id="266" r:id="rId12"/>
+    <p:sldId id="267" r:id="rId13"/>
+    <p:sldId id="268" r:id="rId14"/>
+    <p:sldId id="269" r:id="rId15"/>
+    <p:sldId id="270" r:id="rId16"/>
+    <p:sldId id="271" r:id="rId17"/>
+    <p:sldId id="272" r:id="rId18"/>
+    <p:sldId id="273" r:id="rId19"/>
   </p:sldIdLst>
-  <p:sldSz cx="12193200" cy="6858000" type="screen4x3"/>
+  <p:sldSz cx="12193588" cy="6858000"/>
   <p:notesSz cx="6858000" cy="9144000"/>
   <p:defaultTextStyle>
     <a:defPPr>
@@ -121,6 +121,22 @@
       </a:defRPr>
     </a:lvl9pPr>
   </p:defaultTextStyle>
+  <p:extLst>
+    <p:ext uri="{EFAFB233-063F-42B5-8137-9DF3F51BA10A}">
+      <p15:sldGuideLst xmlns:p15="http://schemas.microsoft.com/office/powerpoint/2012/main">
+        <p15:guide id="1" orient="horz" pos="2160">
+          <p15:clr>
+            <a:srgbClr val="A4A3A4"/>
+          </p15:clr>
+        </p15:guide>
+        <p15:guide id="2" pos="2880">
+          <p15:clr>
+            <a:srgbClr val="A4A3A4"/>
+          </p15:clr>
+        </p15:guide>
+      </p15:sldGuideLst>
+    </p:ext>
+  </p:extLst>
 </p:presentation>
 </file>
 
@@ -162,10 +178,9 @@
           <a:lstStyle/>
           <a:p>
             <a:r>
-              <a:rPr lang="en-US" smtClean="0"/>
+              <a:rPr lang="en-US"/>
               <a:t>Click to edit Master title style</a:t>
             </a:r>
-            <a:endParaRPr lang="en-US"/>
           </a:p>
         </p:txBody>
       </p:sp>
@@ -281,10 +296,9 @@
           </a:lstStyle>
           <a:p>
             <a:r>
-              <a:rPr lang="en-US" smtClean="0"/>
+              <a:rPr lang="en-US"/>
               <a:t>Click to edit Master subtitle style</a:t>
             </a:r>
-            <a:endParaRPr lang="en-US"/>
           </a:p>
         </p:txBody>
       </p:sp>
@@ -305,7 +319,7 @@
           <a:p>
             <a:fld id="{5BCAD085-E8A6-8845-BD4E-CB4CCA059FC4}" type="datetimeFigureOut">
               <a:rPr lang="en-US" smtClean="0"/>
-              <a:t>1/27/13</a:t>
+              <a:t>5/26/2026</a:t>
             </a:fld>
             <a:endParaRPr lang="en-US"/>
           </a:p>
@@ -399,10 +413,9 @@
           <a:lstStyle/>
           <a:p>
             <a:r>
-              <a:rPr lang="en-US" smtClean="0"/>
+              <a:rPr lang="en-US"/>
               <a:t>Click to edit Master title style</a:t>
             </a:r>
-            <a:endParaRPr lang="en-US"/>
           </a:p>
         </p:txBody>
       </p:sp>
@@ -423,38 +436,37 @@
           <a:p>
             <a:pPr lvl="0"/>
             <a:r>
-              <a:rPr lang="en-US" smtClean="0"/>
+              <a:rPr lang="en-US"/>
               <a:t>Click to edit Master text styles</a:t>
             </a:r>
           </a:p>
           <a:p>
             <a:pPr lvl="1"/>
             <a:r>
-              <a:rPr lang="en-US" smtClean="0"/>
+              <a:rPr lang="en-US"/>
               <a:t>Second level</a:t>
             </a:r>
           </a:p>
           <a:p>
             <a:pPr lvl="2"/>
             <a:r>
-              <a:rPr lang="en-US" smtClean="0"/>
+              <a:rPr lang="en-US"/>
               <a:t>Third level</a:t>
             </a:r>
           </a:p>
           <a:p>
             <a:pPr lvl="3"/>
             <a:r>
-              <a:rPr lang="en-US" smtClean="0"/>
+              <a:rPr lang="en-US"/>
               <a:t>Fourth level</a:t>
             </a:r>
           </a:p>
           <a:p>
             <a:pPr lvl="4"/>
             <a:r>
-              <a:rPr lang="en-US" smtClean="0"/>
+              <a:rPr lang="en-US"/>
               <a:t>Fifth level</a:t>
             </a:r>
-            <a:endParaRPr lang="en-US"/>
           </a:p>
         </p:txBody>
       </p:sp>
@@ -475,7 +487,7 @@
           <a:p>
             <a:fld id="{5BCAD085-E8A6-8845-BD4E-CB4CCA059FC4}" type="datetimeFigureOut">
               <a:rPr lang="en-US" smtClean="0"/>
-              <a:t>1/27/13</a:t>
+              <a:t>5/26/2026</a:t>
             </a:fld>
             <a:endParaRPr lang="en-US"/>
           </a:p>
@@ -574,10 +586,9 @@
           <a:lstStyle/>
           <a:p>
             <a:r>
-              <a:rPr lang="en-US" smtClean="0"/>
+              <a:rPr lang="en-US"/>
               <a:t>Click to edit Master title style</a:t>
             </a:r>
-            <a:endParaRPr lang="en-US"/>
           </a:p>
         </p:txBody>
       </p:sp>
@@ -603,38 +614,37 @@
           <a:p>
             <a:pPr lvl="0"/>
             <a:r>
-              <a:rPr lang="en-US" smtClean="0"/>
+              <a:rPr lang="en-US"/>
               <a:t>Click to edit Master text styles</a:t>
             </a:r>
           </a:p>
           <a:p>
             <a:pPr lvl="1"/>
             <a:r>
-              <a:rPr lang="en-US" smtClean="0"/>
+              <a:rPr lang="en-US"/>
               <a:t>Second level</a:t>
             </a:r>
           </a:p>
           <a:p>
             <a:pPr lvl="2"/>
             <a:r>
-              <a:rPr lang="en-US" smtClean="0"/>
+              <a:rPr lang="en-US"/>
               <a:t>Third level</a:t>
             </a:r>
           </a:p>
           <a:p>
             <a:pPr lvl="3"/>
             <a:r>
-              <a:rPr lang="en-US" smtClean="0"/>
+              <a:rPr lang="en-US"/>
               <a:t>Fourth level</a:t>
             </a:r>
           </a:p>
           <a:p>
             <a:pPr lvl="4"/>
             <a:r>
-              <a:rPr lang="en-US" smtClean="0"/>
+              <a:rPr lang="en-US"/>
               <a:t>Fifth level</a:t>
             </a:r>
-            <a:endParaRPr lang="en-US"/>
           </a:p>
         </p:txBody>
       </p:sp>
@@ -655,7 +665,7 @@
           <a:p>
             <a:fld id="{5BCAD085-E8A6-8845-BD4E-CB4CCA059FC4}" type="datetimeFigureOut">
               <a:rPr lang="en-US" smtClean="0"/>
-              <a:t>1/27/13</a:t>
+              <a:t>5/26/2026</a:t>
             </a:fld>
             <a:endParaRPr lang="en-US"/>
           </a:p>
@@ -749,10 +759,9 @@
           <a:lstStyle/>
           <a:p>
             <a:r>
-              <a:rPr lang="en-US" smtClean="0"/>
+              <a:rPr lang="en-US"/>
               <a:t>Click to edit Master title style</a:t>
             </a:r>
-            <a:endParaRPr lang="en-US"/>
           </a:p>
         </p:txBody>
       </p:sp>
@@ -773,38 +782,37 @@
           <a:p>
             <a:pPr lvl="0"/>
             <a:r>
-              <a:rPr lang="en-US" smtClean="0"/>
+              <a:rPr lang="en-US"/>
               <a:t>Click to edit Master text styles</a:t>
             </a:r>
           </a:p>
           <a:p>
             <a:pPr lvl="1"/>
             <a:r>
-              <a:rPr lang="en-US" smtClean="0"/>
+              <a:rPr lang="en-US"/>
               <a:t>Second level</a:t>
             </a:r>
           </a:p>
           <a:p>
             <a:pPr lvl="2"/>
             <a:r>
-              <a:rPr lang="en-US" smtClean="0"/>
+              <a:rPr lang="en-US"/>
               <a:t>Third level</a:t>
             </a:r>
           </a:p>
           <a:p>
             <a:pPr lvl="3"/>
             <a:r>
-              <a:rPr lang="en-US" smtClean="0"/>
+              <a:rPr lang="en-US"/>
               <a:t>Fourth level</a:t>
             </a:r>
           </a:p>
           <a:p>
             <a:pPr lvl="4"/>
             <a:r>
-              <a:rPr lang="en-US" smtClean="0"/>
+              <a:rPr lang="en-US"/>
               <a:t>Fifth level</a:t>
             </a:r>
-            <a:endParaRPr lang="en-US"/>
           </a:p>
         </p:txBody>
       </p:sp>
@@ -825,7 +833,7 @@
           <a:p>
             <a:fld id="{5BCAD085-E8A6-8845-BD4E-CB4CCA059FC4}" type="datetimeFigureOut">
               <a:rPr lang="en-US" smtClean="0"/>
-              <a:t>1/27/13</a:t>
+              <a:t>5/26/2026</a:t>
             </a:fld>
             <a:endParaRPr lang="en-US"/>
           </a:p>
@@ -928,10 +936,9 @@
           </a:lstStyle>
           <a:p>
             <a:r>
-              <a:rPr lang="en-US" smtClean="0"/>
+              <a:rPr lang="en-US"/>
               <a:t>Click to edit Master title style</a:t>
             </a:r>
-            <a:endParaRPr lang="en-US"/>
           </a:p>
         </p:txBody>
       </p:sp>
@@ -1048,7 +1055,7 @@
           <a:p>
             <a:pPr lvl="0"/>
             <a:r>
-              <a:rPr lang="en-US" smtClean="0"/>
+              <a:rPr lang="en-US"/>
               <a:t>Click to edit Master text styles</a:t>
             </a:r>
           </a:p>
@@ -1071,7 +1078,7 @@
           <a:p>
             <a:fld id="{5BCAD085-E8A6-8845-BD4E-CB4CCA059FC4}" type="datetimeFigureOut">
               <a:rPr lang="en-US" smtClean="0"/>
-              <a:t>1/27/13</a:t>
+              <a:t>5/26/2026</a:t>
             </a:fld>
             <a:endParaRPr lang="en-US"/>
           </a:p>
@@ -1165,10 +1172,9 @@
           <a:lstStyle/>
           <a:p>
             <a:r>
-              <a:rPr lang="en-US" smtClean="0"/>
+              <a:rPr lang="en-US"/>
               <a:t>Click to edit Master title style</a:t>
             </a:r>
-            <a:endParaRPr lang="en-US"/>
           </a:p>
         </p:txBody>
       </p:sp>
@@ -1222,38 +1228,37 @@
           <a:p>
             <a:pPr lvl="0"/>
             <a:r>
-              <a:rPr lang="en-US" smtClean="0"/>
+              <a:rPr lang="en-US"/>
               <a:t>Click to edit Master text styles</a:t>
             </a:r>
           </a:p>
           <a:p>
             <a:pPr lvl="1"/>
             <a:r>
-              <a:rPr lang="en-US" smtClean="0"/>
+              <a:rPr lang="en-US"/>
               <a:t>Second level</a:t>
             </a:r>
           </a:p>
           <a:p>
             <a:pPr lvl="2"/>
             <a:r>
-              <a:rPr lang="en-US" smtClean="0"/>
+              <a:rPr lang="en-US"/>
               <a:t>Third level</a:t>
             </a:r>
           </a:p>
           <a:p>
             <a:pPr lvl="3"/>
             <a:r>
-              <a:rPr lang="en-US" smtClean="0"/>
+              <a:rPr lang="en-US"/>
               <a:t>Fourth level</a:t>
             </a:r>
           </a:p>
           <a:p>
             <a:pPr lvl="4"/>
             <a:r>
-              <a:rPr lang="en-US" smtClean="0"/>
+              <a:rPr lang="en-US"/>
               <a:t>Fifth level</a:t>
             </a:r>
-            <a:endParaRPr lang="en-US"/>
           </a:p>
         </p:txBody>
       </p:sp>
@@ -1307,38 +1312,37 @@
           <a:p>
             <a:pPr lvl="0"/>
             <a:r>
-              <a:rPr lang="en-US" smtClean="0"/>
+              <a:rPr lang="en-US"/>
               <a:t>Click to edit Master text styles</a:t>
             </a:r>
           </a:p>
           <a:p>
             <a:pPr lvl="1"/>
             <a:r>
-              <a:rPr lang="en-US" smtClean="0"/>
+              <a:rPr lang="en-US"/>
               <a:t>Second level</a:t>
             </a:r>
           </a:p>
           <a:p>
             <a:pPr lvl="2"/>
             <a:r>
-              <a:rPr lang="en-US" smtClean="0"/>
+              <a:rPr lang="en-US"/>
               <a:t>Third level</a:t>
             </a:r>
           </a:p>
           <a:p>
             <a:pPr lvl="3"/>
             <a:r>
-              <a:rPr lang="en-US" smtClean="0"/>
+              <a:rPr lang="en-US"/>
               <a:t>Fourth level</a:t>
             </a:r>
           </a:p>
           <a:p>
             <a:pPr lvl="4"/>
             <a:r>
-              <a:rPr lang="en-US" smtClean="0"/>
+              <a:rPr lang="en-US"/>
               <a:t>Fifth level</a:t>
             </a:r>
-            <a:endParaRPr lang="en-US"/>
           </a:p>
         </p:txBody>
       </p:sp>
@@ -1359,7 +1363,7 @@
           <a:p>
             <a:fld id="{5BCAD085-E8A6-8845-BD4E-CB4CCA059FC4}" type="datetimeFigureOut">
               <a:rPr lang="en-US" smtClean="0"/>
-              <a:t>1/27/13</a:t>
+              <a:t>5/26/2026</a:t>
             </a:fld>
             <a:endParaRPr lang="en-US"/>
           </a:p>
@@ -1457,10 +1461,9 @@
           </a:lstStyle>
           <a:p>
             <a:r>
-              <a:rPr lang="en-US" smtClean="0"/>
+              <a:rPr lang="en-US"/>
               <a:t>Click to edit Master title style</a:t>
             </a:r>
-            <a:endParaRPr lang="en-US"/>
           </a:p>
         </p:txBody>
       </p:sp>
@@ -1523,7 +1526,7 @@
           <a:p>
             <a:pPr lvl="0"/>
             <a:r>
-              <a:rPr lang="en-US" smtClean="0"/>
+              <a:rPr lang="en-US"/>
               <a:t>Click to edit Master text styles</a:t>
             </a:r>
           </a:p>
@@ -1579,38 +1582,37 @@
           <a:p>
             <a:pPr lvl="0"/>
             <a:r>
-              <a:rPr lang="en-US" smtClean="0"/>
+              <a:rPr lang="en-US"/>
               <a:t>Click to edit Master text styles</a:t>
             </a:r>
           </a:p>
           <a:p>
             <a:pPr lvl="1"/>
             <a:r>
-              <a:rPr lang="en-US" smtClean="0"/>
+              <a:rPr lang="en-US"/>
               <a:t>Second level</a:t>
             </a:r>
           </a:p>
           <a:p>
             <a:pPr lvl="2"/>
             <a:r>
-              <a:rPr lang="en-US" smtClean="0"/>
+              <a:rPr lang="en-US"/>
               <a:t>Third level</a:t>
             </a:r>
           </a:p>
           <a:p>
             <a:pPr lvl="3"/>
             <a:r>
-              <a:rPr lang="en-US" smtClean="0"/>
+              <a:rPr lang="en-US"/>
               <a:t>Fourth level</a:t>
             </a:r>
           </a:p>
           <a:p>
             <a:pPr lvl="4"/>
             <a:r>
-              <a:rPr lang="en-US" smtClean="0"/>
+              <a:rPr lang="en-US"/>
               <a:t>Fifth level</a:t>
             </a:r>
-            <a:endParaRPr lang="en-US"/>
           </a:p>
         </p:txBody>
       </p:sp>
@@ -1673,7 +1675,7 @@
           <a:p>
             <a:pPr lvl="0"/>
             <a:r>
-              <a:rPr lang="en-US" smtClean="0"/>
+              <a:rPr lang="en-US"/>
               <a:t>Click to edit Master text styles</a:t>
             </a:r>
           </a:p>
@@ -1729,38 +1731,37 @@
           <a:p>
             <a:pPr lvl="0"/>
             <a:r>
-              <a:rPr lang="en-US" smtClean="0"/>
+              <a:rPr lang="en-US"/>
               <a:t>Click to edit Master text styles</a:t>
             </a:r>
           </a:p>
           <a:p>
             <a:pPr lvl="1"/>
             <a:r>
-              <a:rPr lang="en-US" smtClean="0"/>
+              <a:rPr lang="en-US"/>
               <a:t>Second level</a:t>
             </a:r>
           </a:p>
           <a:p>
             <a:pPr lvl="2"/>
             <a:r>
-              <a:rPr lang="en-US" smtClean="0"/>
+              <a:rPr lang="en-US"/>
               <a:t>Third level</a:t>
             </a:r>
           </a:p>
           <a:p>
             <a:pPr lvl="3"/>
             <a:r>
-              <a:rPr lang="en-US" smtClean="0"/>
+              <a:rPr lang="en-US"/>
               <a:t>Fourth level</a:t>
             </a:r>
           </a:p>
           <a:p>
             <a:pPr lvl="4"/>
             <a:r>
-              <a:rPr lang="en-US" smtClean="0"/>
+              <a:rPr lang="en-US"/>
               <a:t>Fifth level</a:t>
             </a:r>
-            <a:endParaRPr lang="en-US"/>
           </a:p>
         </p:txBody>
       </p:sp>
@@ -1781,7 +1782,7 @@
           <a:p>
             <a:fld id="{5BCAD085-E8A6-8845-BD4E-CB4CCA059FC4}" type="datetimeFigureOut">
               <a:rPr lang="en-US" smtClean="0"/>
-              <a:t>1/27/13</a:t>
+              <a:t>5/26/2026</a:t>
             </a:fld>
             <a:endParaRPr lang="en-US"/>
           </a:p>
@@ -1875,10 +1876,9 @@
           <a:lstStyle/>
           <a:p>
             <a:r>
-              <a:rPr lang="en-US" smtClean="0"/>
+              <a:rPr lang="en-US"/>
               <a:t>Click to edit Master title style</a:t>
             </a:r>
-            <a:endParaRPr lang="en-US"/>
           </a:p>
         </p:txBody>
       </p:sp>
@@ -1899,7 +1899,7 @@
           <a:p>
             <a:fld id="{5BCAD085-E8A6-8845-BD4E-CB4CCA059FC4}" type="datetimeFigureOut">
               <a:rPr lang="en-US" smtClean="0"/>
-              <a:t>1/27/13</a:t>
+              <a:t>5/26/2026</a:t>
             </a:fld>
             <a:endParaRPr lang="en-US"/>
           </a:p>
@@ -1994,7 +1994,7 @@
           <a:p>
             <a:fld id="{5BCAD085-E8A6-8845-BD4E-CB4CCA059FC4}" type="datetimeFigureOut">
               <a:rPr lang="en-US" smtClean="0"/>
-              <a:t>1/27/13</a:t>
+              <a:t>5/26/2026</a:t>
             </a:fld>
             <a:endParaRPr lang="en-US"/>
           </a:p>
@@ -2097,10 +2097,9 @@
           </a:lstStyle>
           <a:p>
             <a:r>
-              <a:rPr lang="en-US" smtClean="0"/>
+              <a:rPr lang="en-US"/>
               <a:t>Click to edit Master title style</a:t>
             </a:r>
-            <a:endParaRPr lang="en-US"/>
           </a:p>
         </p:txBody>
       </p:sp>
@@ -2154,38 +2153,37 @@
           <a:p>
             <a:pPr lvl="0"/>
             <a:r>
-              <a:rPr lang="en-US" smtClean="0"/>
+              <a:rPr lang="en-US"/>
               <a:t>Click to edit Master text styles</a:t>
             </a:r>
           </a:p>
           <a:p>
             <a:pPr lvl="1"/>
             <a:r>
-              <a:rPr lang="en-US" smtClean="0"/>
+              <a:rPr lang="en-US"/>
               <a:t>Second level</a:t>
             </a:r>
           </a:p>
           <a:p>
             <a:pPr lvl="2"/>
             <a:r>
-              <a:rPr lang="en-US" smtClean="0"/>
+              <a:rPr lang="en-US"/>
               <a:t>Third level</a:t>
             </a:r>
           </a:p>
           <a:p>
             <a:pPr lvl="3"/>
             <a:r>
-              <a:rPr lang="en-US" smtClean="0"/>
+              <a:rPr lang="en-US"/>
               <a:t>Fourth level</a:t>
             </a:r>
           </a:p>
           <a:p>
             <a:pPr lvl="4"/>
             <a:r>
-              <a:rPr lang="en-US" smtClean="0"/>
+              <a:rPr lang="en-US"/>
               <a:t>Fifth level</a:t>
             </a:r>
-            <a:endParaRPr lang="en-US"/>
           </a:p>
         </p:txBody>
       </p:sp>
@@ -2248,7 +2246,7 @@
           <a:p>
             <a:pPr lvl="0"/>
             <a:r>
-              <a:rPr lang="en-US" smtClean="0"/>
+              <a:rPr lang="en-US"/>
               <a:t>Click to edit Master text styles</a:t>
             </a:r>
           </a:p>
@@ -2271,7 +2269,7 @@
           <a:p>
             <a:fld id="{5BCAD085-E8A6-8845-BD4E-CB4CCA059FC4}" type="datetimeFigureOut">
               <a:rPr lang="en-US" smtClean="0"/>
-              <a:t>1/27/13</a:t>
+              <a:t>5/26/2026</a:t>
             </a:fld>
             <a:endParaRPr lang="en-US"/>
           </a:p>
@@ -2374,10 +2372,9 @@
           </a:lstStyle>
           <a:p>
             <a:r>
-              <a:rPr lang="en-US" smtClean="0"/>
+              <a:rPr lang="en-US"/>
               <a:t>Click to edit Master title style</a:t>
             </a:r>
-            <a:endParaRPr lang="en-US"/>
           </a:p>
         </p:txBody>
       </p:sp>
@@ -2501,7 +2498,7 @@
           <a:p>
             <a:pPr lvl="0"/>
             <a:r>
-              <a:rPr lang="en-US" smtClean="0"/>
+              <a:rPr lang="en-US"/>
               <a:t>Click to edit Master text styles</a:t>
             </a:r>
           </a:p>
@@ -2524,7 +2521,7 @@
           <a:p>
             <a:fld id="{5BCAD085-E8A6-8845-BD4E-CB4CCA059FC4}" type="datetimeFigureOut">
               <a:rPr lang="en-US" smtClean="0"/>
-              <a:t>1/27/13</a:t>
+              <a:t>5/26/2026</a:t>
             </a:fld>
             <a:endParaRPr lang="en-US"/>
           </a:p>
@@ -2633,10 +2630,9 @@
           <a:lstStyle/>
           <a:p>
             <a:r>
-              <a:rPr lang="en-US" smtClean="0"/>
+              <a:rPr lang="en-US"/>
               <a:t>Click to edit Master title style</a:t>
             </a:r>
-            <a:endParaRPr lang="en-US"/>
           </a:p>
         </p:txBody>
       </p:sp>
@@ -2667,38 +2663,37 @@
           <a:p>
             <a:pPr lvl="0"/>
             <a:r>
-              <a:rPr lang="en-US" smtClean="0"/>
+              <a:rPr lang="en-US"/>
               <a:t>Click to edit Master text styles</a:t>
             </a:r>
           </a:p>
           <a:p>
             <a:pPr lvl="1"/>
             <a:r>
-              <a:rPr lang="en-US" smtClean="0"/>
+              <a:rPr lang="en-US"/>
               <a:t>Second level</a:t>
             </a:r>
           </a:p>
           <a:p>
             <a:pPr lvl="2"/>
             <a:r>
-              <a:rPr lang="en-US" smtClean="0"/>
+              <a:rPr lang="en-US"/>
               <a:t>Third level</a:t>
             </a:r>
           </a:p>
           <a:p>
             <a:pPr lvl="3"/>
             <a:r>
-              <a:rPr lang="en-US" smtClean="0"/>
+              <a:rPr lang="en-US"/>
               <a:t>Fourth level</a:t>
             </a:r>
           </a:p>
           <a:p>
             <a:pPr lvl="4"/>
             <a:r>
-              <a:rPr lang="en-US" smtClean="0"/>
+              <a:rPr lang="en-US"/>
               <a:t>Fifth level</a:t>
             </a:r>
-            <a:endParaRPr lang="en-US"/>
           </a:p>
         </p:txBody>
       </p:sp>
@@ -2737,7 +2732,7 @@
           <a:p>
             <a:fld id="{5BCAD085-E8A6-8845-BD4E-CB4CCA059FC4}" type="datetimeFigureOut">
               <a:rPr lang="en-US" smtClean="0"/>
-              <a:t>1/27/13</a:t>
+              <a:t>5/26/2026</a:t>
             </a:fld>
             <a:endParaRPr lang="en-US"/>
           </a:p>
@@ -3096,7 +3091,7 @@
 </file>
 
 <file path=ppt/slides/slide1.xml><?xml version="1.0" encoding="utf-8"?>
-<p:sld xmlns:a="http://schemas.openxmlformats.org/drawingml/2006/main" xmlns:p="http://schemas.openxmlformats.org/presentationml/2006/main" xmlns:r="http://schemas.openxmlformats.org/officeDocument/2006/relationships">
+<p:sld xmlns:a="http://schemas.openxmlformats.org/drawingml/2006/main" xmlns:r="http://schemas.openxmlformats.org/officeDocument/2006/relationships" xmlns:p="http://schemas.openxmlformats.org/presentationml/2006/main">
   <p:cSld>
     <p:spTree>
       <p:nvGrpSpPr>
@@ -3104,7 +3099,14 @@
         <p:cNvGrpSpPr/>
         <p:nvPr/>
       </p:nvGrpSpPr>
-      <p:grpSpPr/>
+      <p:grpSpPr>
+        <a:xfrm>
+          <a:off x="0" y="0"/>
+          <a:ext cx="0" cy="0"/>
+          <a:chOff x="0" y="0"/>
+          <a:chExt cx="0" cy="0"/>
+        </a:xfrm>
+      </p:grpSpPr>
       <p:sp>
         <p:nvSpPr>
           <p:cNvPr id="2" name="Rectangle 1"/>
@@ -3145,6 +3147,7 @@
           <a:lstStyle/>
           <a:p>
             <a:pPr algn="ctr"/>
+            <a:endParaRPr/>
           </a:p>
         </p:txBody>
       </p:sp>
@@ -3165,7 +3168,7 @@
           <a:noFill/>
         </p:spPr>
         <p:txBody>
-          <a:bodyPr wrap="square" lIns="0" rIns="0" tIns="0" bIns="0">
+          <a:bodyPr wrap="square" lIns="0" tIns="0" rIns="0" bIns="0">
             <a:spAutoFit/>
           </a:bodyPr>
           <a:lstStyle/>
@@ -3200,7 +3203,7 @@
           <a:noFill/>
         </p:spPr>
         <p:txBody>
-          <a:bodyPr wrap="square" lIns="0" rIns="0" tIns="0" bIns="0">
+          <a:bodyPr wrap="square" lIns="0" tIns="0" rIns="0" bIns="0">
             <a:spAutoFit/>
           </a:bodyPr>
           <a:lstStyle/>
@@ -3235,7 +3238,7 @@
           <a:noFill/>
         </p:spPr>
         <p:txBody>
-          <a:bodyPr wrap="square" lIns="0" rIns="0" tIns="0" bIns="0">
+          <a:bodyPr wrap="square" lIns="0" tIns="0" rIns="0" bIns="0">
             <a:spAutoFit/>
           </a:bodyPr>
           <a:lstStyle/>
@@ -3270,7 +3273,7 @@
           <a:noFill/>
         </p:spPr>
         <p:txBody>
-          <a:bodyPr wrap="square" lIns="0" rIns="0" tIns="0" bIns="0">
+          <a:bodyPr wrap="square" lIns="0" tIns="0" rIns="0" bIns="0">
             <a:spAutoFit/>
           </a:bodyPr>
           <a:lstStyle/>
@@ -3305,7 +3308,7 @@
           <a:noFill/>
         </p:spPr>
         <p:txBody>
-          <a:bodyPr wrap="square" lIns="0" rIns="0" tIns="0" bIns="0">
+          <a:bodyPr wrap="square" lIns="0" tIns="0" rIns="0" bIns="0">
             <a:spAutoFit/>
           </a:bodyPr>
           <a:lstStyle/>
@@ -3364,7 +3367,7 @@
           <a:noFill/>
         </p:spPr>
         <p:txBody>
-          <a:bodyPr wrap="square" lIns="0" rIns="0" tIns="0" bIns="0">
+          <a:bodyPr wrap="square" lIns="0" tIns="0" rIns="0" bIns="0">
             <a:spAutoFit/>
           </a:bodyPr>
           <a:lstStyle/>
@@ -3399,7 +3402,7 @@
           <a:noFill/>
         </p:spPr>
         <p:txBody>
-          <a:bodyPr wrap="square" lIns="0" rIns="0" tIns="0" bIns="0">
+          <a:bodyPr wrap="square" lIns="0" tIns="0" rIns="0" bIns="0">
             <a:spAutoFit/>
           </a:bodyPr>
           <a:lstStyle/>
@@ -3434,7 +3437,7 @@
           <a:noFill/>
         </p:spPr>
         <p:txBody>
-          <a:bodyPr wrap="square" lIns="0" rIns="0" tIns="0" bIns="0">
+          <a:bodyPr wrap="square" lIns="0" tIns="0" rIns="0" bIns="0">
             <a:spAutoFit/>
           </a:bodyPr>
           <a:lstStyle/>
@@ -3461,7 +3464,7 @@
 </file>
 
 <file path=ppt/slides/slide10.xml><?xml version="1.0" encoding="utf-8"?>
-<p:sld xmlns:a="http://schemas.openxmlformats.org/drawingml/2006/main" xmlns:p="http://schemas.openxmlformats.org/presentationml/2006/main" xmlns:r="http://schemas.openxmlformats.org/officeDocument/2006/relationships">
+<p:sld xmlns:a="http://schemas.openxmlformats.org/drawingml/2006/main" xmlns:r="http://schemas.openxmlformats.org/officeDocument/2006/relationships" xmlns:p="http://schemas.openxmlformats.org/presentationml/2006/main">
   <p:cSld>
     <p:spTree>
       <p:nvGrpSpPr>
@@ -3469,7 +3472,14 @@
         <p:cNvGrpSpPr/>
         <p:nvPr/>
       </p:nvGrpSpPr>
-      <p:grpSpPr/>
+      <p:grpSpPr>
+        <a:xfrm>
+          <a:off x="0" y="0"/>
+          <a:ext cx="0" cy="0"/>
+          <a:chOff x="0" y="0"/>
+          <a:chExt cx="0" cy="0"/>
+        </a:xfrm>
+      </p:grpSpPr>
       <p:sp>
         <p:nvSpPr>
           <p:cNvPr id="2" name="Rectangle 1"/>
@@ -3510,6 +3520,7 @@
           <a:lstStyle/>
           <a:p>
             <a:pPr algn="ctr"/>
+            <a:endParaRPr/>
           </a:p>
         </p:txBody>
       </p:sp>
@@ -3530,7 +3541,7 @@
           <a:noFill/>
         </p:spPr>
         <p:txBody>
-          <a:bodyPr wrap="square" lIns="0" rIns="0" tIns="0" bIns="0">
+          <a:bodyPr wrap="square" lIns="0" tIns="0" rIns="0" bIns="0">
             <a:spAutoFit/>
           </a:bodyPr>
           <a:lstStyle/>
@@ -3588,6 +3599,7 @@
           <a:lstStyle/>
           <a:p>
             <a:pPr algn="ctr"/>
+            <a:endParaRPr/>
           </a:p>
         </p:txBody>
       </p:sp>
@@ -3632,7 +3644,7 @@
           <a:noFill/>
         </p:spPr>
         <p:txBody>
-          <a:bodyPr wrap="square" lIns="0" rIns="0" tIns="0" bIns="0">
+          <a:bodyPr wrap="square" lIns="0" tIns="0" rIns="0" bIns="0">
             <a:spAutoFit/>
           </a:bodyPr>
           <a:lstStyle/>
@@ -3650,6 +3662,15 @@
           </a:p>
           <a:p>
             <a:pPr algn="l"/>
+            <a:endParaRPr sz="1700" b="0">
+              <a:solidFill>
+                <a:srgbClr val="1A1A1A"/>
+              </a:solidFill>
+              <a:latin typeface="Calibri"/>
+            </a:endParaRPr>
+          </a:p>
+          <a:p>
+            <a:pPr algn="l"/>
             <a:r>
               <a:rPr sz="1700" b="0">
                 <a:solidFill>
@@ -3657,8 +3678,17 @@
                 </a:solidFill>
                 <a:latin typeface="Calibri"/>
               </a:rPr>
-              <a:t/>
-            </a:r>
+              <a:t>•  belt-hash → затравка генератора</a:t>
+            </a:r>
+          </a:p>
+          <a:p>
+            <a:pPr algn="l"/>
+            <a:endParaRPr sz="1700" b="0">
+              <a:solidFill>
+                <a:srgbClr val="1A1A1A"/>
+              </a:solidFill>
+              <a:latin typeface="Calibri"/>
+            </a:endParaRPr>
           </a:p>
           <a:p>
             <a:pPr algn="l"/>
@@ -3669,8 +3699,17 @@
                 </a:solidFill>
                 <a:latin typeface="Calibri"/>
               </a:rPr>
-              <a:t>•  belt-hash → затравка генератора</a:t>
-            </a:r>
+              <a:t>•  d ← brng, Q = d·G</a:t>
+            </a:r>
+          </a:p>
+          <a:p>
+            <a:pPr algn="l"/>
+            <a:endParaRPr sz="1700" b="0">
+              <a:solidFill>
+                <a:srgbClr val="1A1A1A"/>
+              </a:solidFill>
+              <a:latin typeface="Calibri"/>
+            </a:endParaRPr>
           </a:p>
           <a:p>
             <a:pPr algn="l"/>
@@ -3681,8 +3720,17 @@
                 </a:solidFill>
                 <a:latin typeface="Calibri"/>
               </a:rPr>
-              <a:t/>
-            </a:r>
+              <a:t>•  Запись в Flash 0x0801FC00</a:t>
+            </a:r>
+          </a:p>
+          <a:p>
+            <a:pPr algn="l"/>
+            <a:endParaRPr sz="1700" b="0">
+              <a:solidFill>
+                <a:srgbClr val="1A1A1A"/>
+              </a:solidFill>
+              <a:latin typeface="Calibri"/>
+            </a:endParaRPr>
           </a:p>
           <a:p>
             <a:pPr algn="l"/>
@@ -3693,7 +3741,7 @@
                 </a:solidFill>
                 <a:latin typeface="Calibri"/>
               </a:rPr>
-              <a:t>•  d ← brng, Q = d·G</a:t>
+              <a:t>•  Возврат публичного ключа</a:t>
             </a:r>
           </a:p>
           <a:p>
@@ -3705,68 +3753,17 @@
                 </a:solidFill>
                 <a:latin typeface="Calibri"/>
               </a:rPr>
-              <a:t/>
-            </a:r>
-          </a:p>
-          <a:p>
-            <a:pPr algn="l"/>
-            <a:r>
-              <a:rPr sz="1700" b="0">
-                <a:solidFill>
-                  <a:srgbClr val="1A1A1A"/>
-                </a:solidFill>
-                <a:latin typeface="Calibri"/>
-              </a:rPr>
-              <a:t>•  Запись в Flash 0x0801FC00</a:t>
-            </a:r>
-          </a:p>
-          <a:p>
-            <a:pPr algn="l"/>
-            <a:r>
-              <a:rPr sz="1700" b="0">
-                <a:solidFill>
-                  <a:srgbClr val="1A1A1A"/>
-                </a:solidFill>
-                <a:latin typeface="Calibri"/>
-              </a:rPr>
-              <a:t/>
-            </a:r>
-          </a:p>
-          <a:p>
-            <a:pPr algn="l"/>
-            <a:r>
-              <a:rPr sz="1700" b="0">
-                <a:solidFill>
-                  <a:srgbClr val="1A1A1A"/>
-                </a:solidFill>
-                <a:latin typeface="Calibri"/>
-              </a:rPr>
-              <a:t>•  Возврат публичного ключа</a:t>
-            </a:r>
-          </a:p>
-          <a:p>
-            <a:pPr algn="l"/>
-            <a:r>
-              <a:rPr sz="1700" b="0">
-                <a:solidFill>
-                  <a:srgbClr val="1A1A1A"/>
-                </a:solidFill>
-                <a:latin typeface="Calibri"/>
-              </a:rPr>
               <a:t>   (64 байта)</a:t>
             </a:r>
           </a:p>
           <a:p>
             <a:pPr algn="l"/>
-            <a:r>
-              <a:rPr sz="1700" b="0">
-                <a:solidFill>
-                  <a:srgbClr val="1A1A1A"/>
-                </a:solidFill>
-                <a:latin typeface="Calibri"/>
-              </a:rPr>
-              <a:t/>
-            </a:r>
+            <a:endParaRPr sz="1700" b="0">
+              <a:solidFill>
+                <a:srgbClr val="1A1A1A"/>
+              </a:solidFill>
+              <a:latin typeface="Calibri"/>
+            </a:endParaRPr>
           </a:p>
           <a:p>
             <a:pPr algn="l"/>
@@ -3799,7 +3796,7 @@
           <a:noFill/>
         </p:spPr>
         <p:txBody>
-          <a:bodyPr wrap="square" lIns="0" rIns="0" tIns="0" bIns="0">
+          <a:bodyPr wrap="square" lIns="0" tIns="0" rIns="0" bIns="0">
             <a:spAutoFit/>
           </a:bodyPr>
           <a:lstStyle/>
@@ -3834,7 +3831,7 @@
           <a:noFill/>
         </p:spPr>
         <p:txBody>
-          <a:bodyPr wrap="square" lIns="0" rIns="0" tIns="0" bIns="0">
+          <a:bodyPr wrap="square" lIns="0" tIns="0" rIns="0" bIns="0">
             <a:spAutoFit/>
           </a:bodyPr>
           <a:lstStyle/>
@@ -3861,7 +3858,7 @@
 </file>
 
 <file path=ppt/slides/slide11.xml><?xml version="1.0" encoding="utf-8"?>
-<p:sld xmlns:a="http://schemas.openxmlformats.org/drawingml/2006/main" xmlns:p="http://schemas.openxmlformats.org/presentationml/2006/main" xmlns:r="http://schemas.openxmlformats.org/officeDocument/2006/relationships">
+<p:sld xmlns:a="http://schemas.openxmlformats.org/drawingml/2006/main" xmlns:r="http://schemas.openxmlformats.org/officeDocument/2006/relationships" xmlns:p="http://schemas.openxmlformats.org/presentationml/2006/main">
   <p:cSld>
     <p:spTree>
       <p:nvGrpSpPr>
@@ -3869,7 +3866,14 @@
         <p:cNvGrpSpPr/>
         <p:nvPr/>
       </p:nvGrpSpPr>
-      <p:grpSpPr/>
+      <p:grpSpPr>
+        <a:xfrm>
+          <a:off x="0" y="0"/>
+          <a:ext cx="0" cy="0"/>
+          <a:chOff x="0" y="0"/>
+          <a:chExt cx="0" cy="0"/>
+        </a:xfrm>
+      </p:grpSpPr>
       <p:sp>
         <p:nvSpPr>
           <p:cNvPr id="2" name="Rectangle 1"/>
@@ -3910,6 +3914,7 @@
           <a:lstStyle/>
           <a:p>
             <a:pPr algn="ctr"/>
+            <a:endParaRPr/>
           </a:p>
         </p:txBody>
       </p:sp>
@@ -3930,7 +3935,7 @@
           <a:noFill/>
         </p:spPr>
         <p:txBody>
-          <a:bodyPr wrap="square" lIns="0" rIns="0" tIns="0" bIns="0">
+          <a:bodyPr wrap="square" lIns="0" tIns="0" rIns="0" bIns="0">
             <a:spAutoFit/>
           </a:bodyPr>
           <a:lstStyle/>
@@ -3988,6 +3993,7 @@
           <a:lstStyle/>
           <a:p>
             <a:pPr algn="ctr"/>
+            <a:endParaRPr/>
           </a:p>
         </p:txBody>
       </p:sp>
@@ -4032,7 +4038,7 @@
           <a:noFill/>
         </p:spPr>
         <p:txBody>
-          <a:bodyPr wrap="square" lIns="0" rIns="0" tIns="0" bIns="0">
+          <a:bodyPr wrap="square" lIns="0" tIns="0" rIns="0" bIns="0">
             <a:spAutoFit/>
           </a:bodyPr>
           <a:lstStyle/>
@@ -4074,6 +4080,15 @@
           </a:p>
           <a:p>
             <a:pPr algn="l"/>
+            <a:endParaRPr sz="1500" b="0">
+              <a:solidFill>
+                <a:srgbClr val="1A1A1A"/>
+              </a:solidFill>
+              <a:latin typeface="Calibri"/>
+            </a:endParaRPr>
+          </a:p>
+          <a:p>
+            <a:pPr algn="l"/>
             <a:r>
               <a:rPr sz="1500" b="0">
                 <a:solidFill>
@@ -4081,7 +4096,7 @@
                 </a:solidFill>
                 <a:latin typeface="Calibri"/>
               </a:rPr>
-              <a:t/>
+              <a:t>•  bign-sign2 (детерминированный</a:t>
             </a:r>
           </a:p>
           <a:p>
@@ -4093,8 +4108,17 @@
                 </a:solidFill>
                 <a:latin typeface="Calibri"/>
               </a:rPr>
-              <a:t>•  bign-sign2 (детерминированный</a:t>
-            </a:r>
+              <a:t>   k = belt-pbkdf(d || H))</a:t>
+            </a:r>
+          </a:p>
+          <a:p>
+            <a:pPr algn="l"/>
+            <a:endParaRPr sz="1500" b="0">
+              <a:solidFill>
+                <a:srgbClr val="1A1A1A"/>
+              </a:solidFill>
+              <a:latin typeface="Calibri"/>
+            </a:endParaRPr>
           </a:p>
           <a:p>
             <a:pPr algn="l"/>
@@ -4105,7 +4129,7 @@
                 </a:solidFill>
                 <a:latin typeface="Calibri"/>
               </a:rPr>
-              <a:t>   k = belt-pbkdf(d || H))</a:t>
+              <a:t>•  Получена подпись 48 байт:</a:t>
             </a:r>
           </a:p>
           <a:p>
@@ -4117,44 +4141,17 @@
                 </a:solidFill>
                 <a:latin typeface="Calibri"/>
               </a:rPr>
-              <a:t/>
-            </a:r>
-          </a:p>
-          <a:p>
-            <a:pPr algn="l"/>
-            <a:r>
-              <a:rPr sz="1500" b="0">
-                <a:solidFill>
-                  <a:srgbClr val="1A1A1A"/>
-                </a:solidFill>
-                <a:latin typeface="Calibri"/>
-              </a:rPr>
-              <a:t>•  Получена подпись 48 байт:</a:t>
-            </a:r>
-          </a:p>
-          <a:p>
-            <a:pPr algn="l"/>
-            <a:r>
-              <a:rPr sz="1500" b="0">
-                <a:solidFill>
-                  <a:srgbClr val="1A1A1A"/>
-                </a:solidFill>
-                <a:latin typeface="Calibri"/>
-              </a:rPr>
               <a:t>   76199588…861b8946</a:t>
             </a:r>
           </a:p>
           <a:p>
             <a:pPr algn="l"/>
-            <a:r>
-              <a:rPr sz="1500" b="0">
-                <a:solidFill>
-                  <a:srgbClr val="1A1A1A"/>
-                </a:solidFill>
-                <a:latin typeface="Calibri"/>
-              </a:rPr>
-              <a:t/>
-            </a:r>
+            <a:endParaRPr sz="1500" b="0">
+              <a:solidFill>
+                <a:srgbClr val="1A1A1A"/>
+              </a:solidFill>
+              <a:latin typeface="Calibri"/>
+            </a:endParaRPr>
           </a:p>
           <a:p>
             <a:pPr algn="l"/>
@@ -4187,7 +4184,7 @@
           <a:noFill/>
         </p:spPr>
         <p:txBody>
-          <a:bodyPr wrap="square" lIns="0" rIns="0" tIns="0" bIns="0">
+          <a:bodyPr wrap="square" lIns="0" tIns="0" rIns="0" bIns="0">
             <a:spAutoFit/>
           </a:bodyPr>
           <a:lstStyle/>
@@ -4222,7 +4219,7 @@
           <a:noFill/>
         </p:spPr>
         <p:txBody>
-          <a:bodyPr wrap="square" lIns="0" rIns="0" tIns="0" bIns="0">
+          <a:bodyPr wrap="square" lIns="0" tIns="0" rIns="0" bIns="0">
             <a:spAutoFit/>
           </a:bodyPr>
           <a:lstStyle/>
@@ -4249,7 +4246,7 @@
 </file>
 
 <file path=ppt/slides/slide12.xml><?xml version="1.0" encoding="utf-8"?>
-<p:sld xmlns:a="http://schemas.openxmlformats.org/drawingml/2006/main" xmlns:p="http://schemas.openxmlformats.org/presentationml/2006/main" xmlns:r="http://schemas.openxmlformats.org/officeDocument/2006/relationships">
+<p:sld xmlns:a="http://schemas.openxmlformats.org/drawingml/2006/main" xmlns:r="http://schemas.openxmlformats.org/officeDocument/2006/relationships" xmlns:p="http://schemas.openxmlformats.org/presentationml/2006/main">
   <p:cSld>
     <p:spTree>
       <p:nvGrpSpPr>
@@ -4257,7 +4254,14 @@
         <p:cNvGrpSpPr/>
         <p:nvPr/>
       </p:nvGrpSpPr>
-      <p:grpSpPr/>
+      <p:grpSpPr>
+        <a:xfrm>
+          <a:off x="0" y="0"/>
+          <a:ext cx="0" cy="0"/>
+          <a:chOff x="0" y="0"/>
+          <a:chExt cx="0" cy="0"/>
+        </a:xfrm>
+      </p:grpSpPr>
       <p:sp>
         <p:nvSpPr>
           <p:cNvPr id="2" name="Rectangle 1"/>
@@ -4298,6 +4302,7 @@
           <a:lstStyle/>
           <a:p>
             <a:pPr algn="ctr"/>
+            <a:endParaRPr/>
           </a:p>
         </p:txBody>
       </p:sp>
@@ -4318,7 +4323,7 @@
           <a:noFill/>
         </p:spPr>
         <p:txBody>
-          <a:bodyPr wrap="square" lIns="0" rIns="0" tIns="0" bIns="0">
+          <a:bodyPr wrap="square" lIns="0" tIns="0" rIns="0" bIns="0">
             <a:spAutoFit/>
           </a:bodyPr>
           <a:lstStyle/>
@@ -4376,6 +4381,7 @@
           <a:lstStyle/>
           <a:p>
             <a:pPr algn="ctr"/>
+            <a:endParaRPr/>
           </a:p>
         </p:txBody>
       </p:sp>
@@ -4420,7 +4426,7 @@
           <a:noFill/>
         </p:spPr>
         <p:txBody>
-          <a:bodyPr wrap="square" lIns="0" rIns="0" tIns="0" bIns="0">
+          <a:bodyPr wrap="square" lIns="0" tIns="0" rIns="0" bIns="0">
             <a:spAutoFit/>
           </a:bodyPr>
           <a:lstStyle/>
@@ -4438,6 +4444,15 @@
           </a:p>
           <a:p>
             <a:pPr algn="l"/>
+            <a:endParaRPr sz="1600" b="0">
+              <a:solidFill>
+                <a:srgbClr val="1A1A1A"/>
+              </a:solidFill>
+              <a:latin typeface="Calibri"/>
+            </a:endParaRPr>
+          </a:p>
+          <a:p>
+            <a:pPr algn="l"/>
             <a:r>
               <a:rPr sz="1600" b="0">
                 <a:solidFill>
@@ -4445,8 +4460,17 @@
                 </a:solidFill>
                 <a:latin typeface="Calibri"/>
               </a:rPr>
-              <a:t/>
-            </a:r>
+              <a:t>•  Случайный ключ 32 Б, IV 16 Б</a:t>
+            </a:r>
+          </a:p>
+          <a:p>
+            <a:pPr algn="l"/>
+            <a:endParaRPr sz="1600" b="0">
+              <a:solidFill>
+                <a:srgbClr val="1A1A1A"/>
+              </a:solidFill>
+              <a:latin typeface="Calibri"/>
+            </a:endParaRPr>
           </a:p>
           <a:p>
             <a:pPr algn="l"/>
@@ -4457,7 +4481,7 @@
                 </a:solidFill>
                 <a:latin typeface="Calibri"/>
               </a:rPr>
-              <a:t>•  Случайный ключ 32 Б, IV 16 Б</a:t>
+              <a:t>•  После PKCS#7 → 48 байт</a:t>
             </a:r>
           </a:p>
           <a:p>
@@ -4469,8 +4493,17 @@
                 </a:solidFill>
                 <a:latin typeface="Calibri"/>
               </a:rPr>
-              <a:t/>
-            </a:r>
+              <a:t>   передаются на устройство</a:t>
+            </a:r>
+          </a:p>
+          <a:p>
+            <a:pPr algn="l"/>
+            <a:endParaRPr sz="1600" b="0">
+              <a:solidFill>
+                <a:srgbClr val="1A1A1A"/>
+              </a:solidFill>
+              <a:latin typeface="Calibri"/>
+            </a:endParaRPr>
           </a:p>
           <a:p>
             <a:pPr algn="l"/>
@@ -4481,56 +4514,17 @@
                 </a:solidFill>
                 <a:latin typeface="Calibri"/>
               </a:rPr>
-              <a:t>•  После PKCS#7 → 48 байт</a:t>
-            </a:r>
-          </a:p>
-          <a:p>
-            <a:pPr algn="l"/>
-            <a:r>
-              <a:rPr sz="1600" b="0">
-                <a:solidFill>
-                  <a:srgbClr val="1A1A1A"/>
-                </a:solidFill>
-                <a:latin typeface="Calibri"/>
-              </a:rPr>
-              <a:t>   передаются на устройство</a:t>
-            </a:r>
-          </a:p>
-          <a:p>
-            <a:pPr algn="l"/>
-            <a:r>
-              <a:rPr sz="1600" b="0">
-                <a:solidFill>
-                  <a:srgbClr val="1A1A1A"/>
-                </a:solidFill>
-                <a:latin typeface="Calibri"/>
-              </a:rPr>
-              <a:t/>
-            </a:r>
-          </a:p>
-          <a:p>
-            <a:pPr algn="l"/>
-            <a:r>
-              <a:rPr sz="1600" b="0">
-                <a:solidFill>
-                  <a:srgbClr val="1A1A1A"/>
-                </a:solidFill>
-                <a:latin typeface="Calibri"/>
-              </a:rPr>
               <a:t>•  belt-CBC шифрует → 48 байт</a:t>
             </a:r>
           </a:p>
           <a:p>
             <a:pPr algn="l"/>
-            <a:r>
-              <a:rPr sz="1600" b="0">
-                <a:solidFill>
-                  <a:srgbClr val="1A1A1A"/>
-                </a:solidFill>
-                <a:latin typeface="Calibri"/>
-              </a:rPr>
-              <a:t/>
-            </a:r>
+            <a:endParaRPr sz="1600" b="0">
+              <a:solidFill>
+                <a:srgbClr val="1A1A1A"/>
+              </a:solidFill>
+              <a:latin typeface="Calibri"/>
+            </a:endParaRPr>
           </a:p>
           <a:p>
             <a:pPr algn="l"/>
@@ -4575,7 +4569,7 @@
           <a:noFill/>
         </p:spPr>
         <p:txBody>
-          <a:bodyPr wrap="square" lIns="0" rIns="0" tIns="0" bIns="0">
+          <a:bodyPr wrap="square" lIns="0" tIns="0" rIns="0" bIns="0">
             <a:spAutoFit/>
           </a:bodyPr>
           <a:lstStyle/>
@@ -4610,7 +4604,7 @@
           <a:noFill/>
         </p:spPr>
         <p:txBody>
-          <a:bodyPr wrap="square" lIns="0" rIns="0" tIns="0" bIns="0">
+          <a:bodyPr wrap="square" lIns="0" tIns="0" rIns="0" bIns="0">
             <a:spAutoFit/>
           </a:bodyPr>
           <a:lstStyle/>
@@ -4637,7 +4631,7 @@
 </file>
 
 <file path=ppt/slides/slide13.xml><?xml version="1.0" encoding="utf-8"?>
-<p:sld xmlns:a="http://schemas.openxmlformats.org/drawingml/2006/main" xmlns:p="http://schemas.openxmlformats.org/presentationml/2006/main" xmlns:r="http://schemas.openxmlformats.org/officeDocument/2006/relationships">
+<p:sld xmlns:a="http://schemas.openxmlformats.org/drawingml/2006/main" xmlns:r="http://schemas.openxmlformats.org/officeDocument/2006/relationships" xmlns:p="http://schemas.openxmlformats.org/presentationml/2006/main">
   <p:cSld>
     <p:spTree>
       <p:nvGrpSpPr>
@@ -4645,7 +4639,14 @@
         <p:cNvGrpSpPr/>
         <p:nvPr/>
       </p:nvGrpSpPr>
-      <p:grpSpPr/>
+      <p:grpSpPr>
+        <a:xfrm>
+          <a:off x="0" y="0"/>
+          <a:ext cx="0" cy="0"/>
+          <a:chOff x="0" y="0"/>
+          <a:chExt cx="0" cy="0"/>
+        </a:xfrm>
+      </p:grpSpPr>
       <p:sp>
         <p:nvSpPr>
           <p:cNvPr id="2" name="Rectangle 1"/>
@@ -4686,6 +4687,7 @@
           <a:lstStyle/>
           <a:p>
             <a:pPr algn="ctr"/>
+            <a:endParaRPr/>
           </a:p>
         </p:txBody>
       </p:sp>
@@ -4706,7 +4708,7 @@
           <a:noFill/>
         </p:spPr>
         <p:txBody>
-          <a:bodyPr wrap="square" lIns="0" rIns="0" tIns="0" bIns="0">
+          <a:bodyPr wrap="square" lIns="0" tIns="0" rIns="0" bIns="0">
             <a:spAutoFit/>
           </a:bodyPr>
           <a:lstStyle/>
@@ -4764,6 +4766,7 @@
           <a:lstStyle/>
           <a:p>
             <a:pPr algn="ctr"/>
+            <a:endParaRPr/>
           </a:p>
         </p:txBody>
       </p:sp>
@@ -4808,7 +4811,7 @@
           <a:noFill/>
         </p:spPr>
         <p:txBody>
-          <a:bodyPr wrap="square" lIns="0" rIns="0" tIns="0" bIns="0">
+          <a:bodyPr wrap="square" lIns="0" tIns="0" rIns="0" bIns="0">
             <a:spAutoFit/>
           </a:bodyPr>
           <a:lstStyle/>
@@ -4843,7 +4846,7 @@
           <a:noFill/>
         </p:spPr>
         <p:txBody>
-          <a:bodyPr wrap="square" lIns="0" rIns="0" tIns="0" bIns="0">
+          <a:bodyPr wrap="square" lIns="0" tIns="0" rIns="0" bIns="0">
             <a:spAutoFit/>
           </a:bodyPr>
           <a:lstStyle/>
@@ -4878,7 +4881,7 @@
           <a:noFill/>
         </p:spPr>
         <p:txBody>
-          <a:bodyPr wrap="square" lIns="0" rIns="0" tIns="0" bIns="0">
+          <a:bodyPr wrap="square" lIns="0" tIns="0" rIns="0" bIns="0">
             <a:spAutoFit/>
           </a:bodyPr>
           <a:lstStyle/>
@@ -4905,7 +4908,7 @@
 </file>
 
 <file path=ppt/slides/slide14.xml><?xml version="1.0" encoding="utf-8"?>
-<p:sld xmlns:a="http://schemas.openxmlformats.org/drawingml/2006/main" xmlns:p="http://schemas.openxmlformats.org/presentationml/2006/main" xmlns:r="http://schemas.openxmlformats.org/officeDocument/2006/relationships">
+<p:sld xmlns:a="http://schemas.openxmlformats.org/drawingml/2006/main" xmlns:r="http://schemas.openxmlformats.org/officeDocument/2006/relationships" xmlns:p="http://schemas.openxmlformats.org/presentationml/2006/main">
   <p:cSld>
     <p:spTree>
       <p:nvGrpSpPr>
@@ -4913,7 +4916,14 @@
         <p:cNvGrpSpPr/>
         <p:nvPr/>
       </p:nvGrpSpPr>
-      <p:grpSpPr/>
+      <p:grpSpPr>
+        <a:xfrm>
+          <a:off x="0" y="0"/>
+          <a:ext cx="0" cy="0"/>
+          <a:chOff x="0" y="0"/>
+          <a:chExt cx="0" cy="0"/>
+        </a:xfrm>
+      </p:grpSpPr>
       <p:sp>
         <p:nvSpPr>
           <p:cNvPr id="2" name="Rectangle 1"/>
@@ -4954,6 +4964,7 @@
           <a:lstStyle/>
           <a:p>
             <a:pPr algn="ctr"/>
+            <a:endParaRPr/>
           </a:p>
         </p:txBody>
       </p:sp>
@@ -4974,7 +4985,7 @@
           <a:noFill/>
         </p:spPr>
         <p:txBody>
-          <a:bodyPr wrap="square" lIns="0" rIns="0" tIns="0" bIns="0">
+          <a:bodyPr wrap="square" lIns="0" tIns="0" rIns="0" bIns="0">
             <a:spAutoFit/>
           </a:bodyPr>
           <a:lstStyle/>
@@ -5032,6 +5043,7 @@
           <a:lstStyle/>
           <a:p>
             <a:pPr algn="ctr"/>
+            <a:endParaRPr/>
           </a:p>
         </p:txBody>
       </p:sp>
@@ -5054,9 +5066,27 @@
                 <a:tableStyleId>{5C22544A-7EE6-4342-B048-85BDC9FD1C3A}</a:tableStyleId>
               </a:tblPr>
               <a:tblGrid>
-                <a:gridCol w="2880000"/>
-                <a:gridCol w="1800000"/>
-                <a:gridCol w="2520000"/>
+                <a:gridCol w="2880000">
+                  <a:extLst>
+                    <a:ext uri="{9D8B030D-6E8A-4147-A177-3AD203B41FA5}">
+                      <a16:colId xmlns:a16="http://schemas.microsoft.com/office/drawing/2014/main" val="20000"/>
+                    </a:ext>
+                  </a:extLst>
+                </a:gridCol>
+                <a:gridCol w="1800000">
+                  <a:extLst>
+                    <a:ext uri="{9D8B030D-6E8A-4147-A177-3AD203B41FA5}">
+                      <a16:colId xmlns:a16="http://schemas.microsoft.com/office/drawing/2014/main" val="20001"/>
+                    </a:ext>
+                  </a:extLst>
+                </a:gridCol>
+                <a:gridCol w="2520000">
+                  <a:extLst>
+                    <a:ext uri="{9D8B030D-6E8A-4147-A177-3AD203B41FA5}">
+                      <a16:colId xmlns:a16="http://schemas.microsoft.com/office/drawing/2014/main" val="20002"/>
+                    </a:ext>
+                  </a:extLst>
+                </a:gridCol>
               </a:tblGrid>
               <a:tr h="514285">
                 <a:tc>
@@ -5125,6 +5155,11 @@
                     </a:solidFill>
                   </a:tcPr>
                 </a:tc>
+                <a:extLst>
+                  <a:ext uri="{0D108BD9-81ED-4DB2-BD59-A6C34878D82A}">
+                    <a16:rowId xmlns:a16="http://schemas.microsoft.com/office/drawing/2014/main" val="10000"/>
+                  </a:ext>
+                </a:extLst>
               </a:tr>
               <a:tr h="514285">
                 <a:tc>
@@ -5193,6 +5228,11 @@
                     </a:solidFill>
                   </a:tcPr>
                 </a:tc>
+                <a:extLst>
+                  <a:ext uri="{0D108BD9-81ED-4DB2-BD59-A6C34878D82A}">
+                    <a16:rowId xmlns:a16="http://schemas.microsoft.com/office/drawing/2014/main" val="10001"/>
+                  </a:ext>
+                </a:extLst>
               </a:tr>
               <a:tr h="514285">
                 <a:tc>
@@ -5261,6 +5301,11 @@
                     </a:solidFill>
                   </a:tcPr>
                 </a:tc>
+                <a:extLst>
+                  <a:ext uri="{0D108BD9-81ED-4DB2-BD59-A6C34878D82A}">
+                    <a16:rowId xmlns:a16="http://schemas.microsoft.com/office/drawing/2014/main" val="10002"/>
+                  </a:ext>
+                </a:extLst>
               </a:tr>
               <a:tr h="514285">
                 <a:tc>
@@ -5329,6 +5374,11 @@
                     </a:solidFill>
                   </a:tcPr>
                 </a:tc>
+                <a:extLst>
+                  <a:ext uri="{0D108BD9-81ED-4DB2-BD59-A6C34878D82A}">
+                    <a16:rowId xmlns:a16="http://schemas.microsoft.com/office/drawing/2014/main" val="10003"/>
+                  </a:ext>
+                </a:extLst>
               </a:tr>
               <a:tr h="514285">
                 <a:tc>
@@ -5337,13 +5387,31 @@
                     <a:lstStyle/>
                     <a:p>
                       <a:r>
-                        <a:rPr sz="1400">
+                        <a:rPr sz="1400" dirty="0">
                           <a:solidFill>
                             <a:srgbClr val="1A1A1A"/>
                           </a:solidFill>
                           <a:latin typeface="Calibri"/>
                         </a:rPr>
-                        <a:t>bign-sign2 (подпись)</a:t>
+                        <a:t>bign-sign2 (</a:t>
+                      </a:r>
+                      <a:r>
+                        <a:rPr sz="1400" dirty="0" err="1">
+                          <a:solidFill>
+                            <a:srgbClr val="1A1A1A"/>
+                          </a:solidFill>
+                          <a:latin typeface="Calibri"/>
+                        </a:rPr>
+                        <a:t>подпись</a:t>
+                      </a:r>
+                      <a:r>
+                        <a:rPr sz="1400" dirty="0">
+                          <a:solidFill>
+                            <a:srgbClr val="1A1A1A"/>
+                          </a:solidFill>
+                          <a:latin typeface="Calibri"/>
+                        </a:rPr>
+                        <a:t>)</a:t>
                       </a:r>
                     </a:p>
                   </a:txBody>
@@ -5387,7 +5455,7 @@
                           </a:solidFill>
                           <a:latin typeface="Calibri"/>
                         </a:rPr>
-                        <a:t>42 мс</a:t>
+                        <a:t>42 мс  /  ≈ 24 подписей/с</a:t>
                       </a:r>
                     </a:p>
                   </a:txBody>
@@ -5397,6 +5465,11 @@
                     </a:solidFill>
                   </a:tcPr>
                 </a:tc>
+                <a:extLst>
+                  <a:ext uri="{0D108BD9-81ED-4DB2-BD59-A6C34878D82A}">
+                    <a16:rowId xmlns:a16="http://schemas.microsoft.com/office/drawing/2014/main" val="10004"/>
+                  </a:ext>
+                </a:extLst>
               </a:tr>
               <a:tr h="514285">
                 <a:tc>
@@ -5455,7 +5528,7 @@
                           </a:solidFill>
                           <a:latin typeface="Calibri"/>
                         </a:rPr>
-                        <a:t>78 мс</a:t>
+                        <a:t>78 мс  /  ≈ 13 проверок/с</a:t>
                       </a:r>
                     </a:p>
                   </a:txBody>
@@ -5465,6 +5538,11 @@
                     </a:solidFill>
                   </a:tcPr>
                 </a:tc>
+                <a:extLst>
+                  <a:ext uri="{0D108BD9-81ED-4DB2-BD59-A6C34878D82A}">
+                    <a16:rowId xmlns:a16="http://schemas.microsoft.com/office/drawing/2014/main" val="10005"/>
+                  </a:ext>
+                </a:extLst>
               </a:tr>
               <a:tr h="514290">
                 <a:tc>
@@ -5517,14 +5595,29 @@
                     <a:lstStyle/>
                     <a:p>
                       <a:r>
-                        <a:rPr sz="1400">
+                        <a:rPr sz="1400" dirty="0">
                           <a:solidFill>
                             <a:srgbClr val="1A1A1A"/>
                           </a:solidFill>
                           <a:latin typeface="Calibri"/>
                         </a:rPr>
-                        <a:t>110 мс</a:t>
+                        <a:t>110 </a:t>
                       </a:r>
+                      <a:r>
+                        <a:rPr sz="1400" dirty="0" err="1">
+                          <a:solidFill>
+                            <a:srgbClr val="1A1A1A"/>
+                          </a:solidFill>
+                          <a:latin typeface="Calibri"/>
+                        </a:rPr>
+                        <a:t>мс</a:t>
+                      </a:r>
+                      <a:endParaRPr sz="1400" dirty="0">
+                        <a:solidFill>
+                          <a:srgbClr val="1A1A1A"/>
+                        </a:solidFill>
+                        <a:latin typeface="Calibri"/>
+                      </a:endParaRPr>
                     </a:p>
                   </a:txBody>
                   <a:tcPr>
@@ -5533,6 +5626,11 @@
                     </a:solidFill>
                   </a:tcPr>
                 </a:tc>
+                <a:extLst>
+                  <a:ext uri="{0D108BD9-81ED-4DB2-BD59-A6C34878D82A}">
+                    <a16:rowId xmlns:a16="http://schemas.microsoft.com/office/drawing/2014/main" val="10006"/>
+                  </a:ext>
+                </a:extLst>
               </a:tr>
             </a:tbl>
           </a:graphicData>
@@ -5555,7 +5653,7 @@
           <a:noFill/>
         </p:spPr>
         <p:txBody>
-          <a:bodyPr wrap="square" lIns="0" rIns="0" tIns="0" bIns="0">
+          <a:bodyPr wrap="square" lIns="0" tIns="0" rIns="0" bIns="0">
             <a:spAutoFit/>
           </a:bodyPr>
           <a:lstStyle/>
@@ -5590,7 +5688,7 @@
           <a:noFill/>
         </p:spPr>
         <p:txBody>
-          <a:bodyPr wrap="square" lIns="0" rIns="0" tIns="0" bIns="0">
+          <a:bodyPr wrap="square" lIns="0" tIns="0" rIns="0" bIns="0">
             <a:spAutoFit/>
           </a:bodyPr>
           <a:lstStyle/>
@@ -5656,15 +5754,12 @@
           </a:p>
           <a:p>
             <a:pPr algn="l"/>
-            <a:r>
-              <a:rPr sz="1500" b="0">
-                <a:solidFill>
-                  <a:srgbClr val="1A1A1A"/>
-                </a:solidFill>
-                <a:latin typeface="Calibri"/>
-              </a:rPr>
-              <a:t/>
-            </a:r>
+            <a:endParaRPr sz="1500" b="0">
+              <a:solidFill>
+                <a:srgbClr val="1A1A1A"/>
+              </a:solidFill>
+              <a:latin typeface="Calibri"/>
+            </a:endParaRPr>
           </a:p>
           <a:p>
             <a:pPr algn="l"/>
@@ -5733,7 +5828,7 @@
           <a:noFill/>
         </p:spPr>
         <p:txBody>
-          <a:bodyPr wrap="square" lIns="0" rIns="0" tIns="0" bIns="0">
+          <a:bodyPr wrap="square" lIns="0" tIns="0" rIns="0" bIns="0">
             <a:spAutoFit/>
           </a:bodyPr>
           <a:lstStyle/>
@@ -5768,7 +5863,7 @@
           <a:noFill/>
         </p:spPr>
         <p:txBody>
-          <a:bodyPr wrap="square" lIns="0" rIns="0" tIns="0" bIns="0">
+          <a:bodyPr wrap="square" lIns="0" tIns="0" rIns="0" bIns="0">
             <a:spAutoFit/>
           </a:bodyPr>
           <a:lstStyle/>
@@ -5795,7 +5890,7 @@
 </file>
 
 <file path=ppt/slides/slide15.xml><?xml version="1.0" encoding="utf-8"?>
-<p:sld xmlns:a="http://schemas.openxmlformats.org/drawingml/2006/main" xmlns:p="http://schemas.openxmlformats.org/presentationml/2006/main" xmlns:r="http://schemas.openxmlformats.org/officeDocument/2006/relationships">
+<p:sld xmlns:a="http://schemas.openxmlformats.org/drawingml/2006/main" xmlns:r="http://schemas.openxmlformats.org/officeDocument/2006/relationships" xmlns:p="http://schemas.openxmlformats.org/presentationml/2006/main">
   <p:cSld>
     <p:spTree>
       <p:nvGrpSpPr>
@@ -5803,7 +5898,14 @@
         <p:cNvGrpSpPr/>
         <p:nvPr/>
       </p:nvGrpSpPr>
-      <p:grpSpPr/>
+      <p:grpSpPr>
+        <a:xfrm>
+          <a:off x="0" y="0"/>
+          <a:ext cx="0" cy="0"/>
+          <a:chOff x="0" y="0"/>
+          <a:chExt cx="0" cy="0"/>
+        </a:xfrm>
+      </p:grpSpPr>
       <p:sp>
         <p:nvSpPr>
           <p:cNvPr id="2" name="Rectangle 1"/>
@@ -5844,6 +5946,7 @@
           <a:lstStyle/>
           <a:p>
             <a:pPr algn="ctr"/>
+            <a:endParaRPr/>
           </a:p>
         </p:txBody>
       </p:sp>
@@ -5864,7 +5967,7 @@
           <a:noFill/>
         </p:spPr>
         <p:txBody>
-          <a:bodyPr wrap="square" lIns="0" rIns="0" tIns="0" bIns="0">
+          <a:bodyPr wrap="square" lIns="0" tIns="0" rIns="0" bIns="0">
             <a:spAutoFit/>
           </a:bodyPr>
           <a:lstStyle/>
@@ -5922,6 +6025,7 @@
           <a:lstStyle/>
           <a:p>
             <a:pPr algn="ctr"/>
+            <a:endParaRPr/>
           </a:p>
         </p:txBody>
       </p:sp>
@@ -5931,7 +6035,13 @@
           <p:cNvGraphicFramePr>
             <a:graphicFrameLocks noGrp="1"/>
           </p:cNvGraphicFramePr>
-          <p:nvPr/>
+          <p:nvPr>
+            <p:extLst>
+              <p:ext uri="{D42A27DB-BD31-4B8C-83A1-F6EECF244321}">
+                <p14:modId xmlns:p14="http://schemas.microsoft.com/office/powerpoint/2010/main" val="4131981509"/>
+              </p:ext>
+            </p:extLst>
+          </p:nvPr>
         </p:nvGraphicFramePr>
         <p:xfrm>
           <a:off x="540000" y="1188000"/>
@@ -5944,10 +6054,34 @@
                 <a:tableStyleId>{5C22544A-7EE6-4342-B048-85BDC9FD1C3A}</a:tableStyleId>
               </a:tblPr>
               <a:tblGrid>
-                <a:gridCol w="2880000"/>
-                <a:gridCol w="4140000"/>
-                <a:gridCol w="2520000"/>
-                <a:gridCol w="1440000"/>
+                <a:gridCol w="2880000">
+                  <a:extLst>
+                    <a:ext uri="{9D8B030D-6E8A-4147-A177-3AD203B41FA5}">
+                      <a16:colId xmlns:a16="http://schemas.microsoft.com/office/drawing/2014/main" val="20000"/>
+                    </a:ext>
+                  </a:extLst>
+                </a:gridCol>
+                <a:gridCol w="4140000">
+                  <a:extLst>
+                    <a:ext uri="{9D8B030D-6E8A-4147-A177-3AD203B41FA5}">
+                      <a16:colId xmlns:a16="http://schemas.microsoft.com/office/drawing/2014/main" val="20001"/>
+                    </a:ext>
+                  </a:extLst>
+                </a:gridCol>
+                <a:gridCol w="2520000">
+                  <a:extLst>
+                    <a:ext uri="{9D8B030D-6E8A-4147-A177-3AD203B41FA5}">
+                      <a16:colId xmlns:a16="http://schemas.microsoft.com/office/drawing/2014/main" val="20002"/>
+                    </a:ext>
+                  </a:extLst>
+                </a:gridCol>
+                <a:gridCol w="1440000">
+                  <a:extLst>
+                    <a:ext uri="{9D8B030D-6E8A-4147-A177-3AD203B41FA5}">
+                      <a16:colId xmlns:a16="http://schemas.microsoft.com/office/drawing/2014/main" val="20003"/>
+                    </a:ext>
+                  </a:extLst>
+                </a:gridCol>
               </a:tblGrid>
               <a:tr h="540000">
                 <a:tc>
@@ -6038,6 +6172,11 @@
                     </a:solidFill>
                   </a:tcPr>
                 </a:tc>
+                <a:extLst>
+                  <a:ext uri="{0D108BD9-81ED-4DB2-BD59-A6C34878D82A}">
+                    <a16:rowId xmlns:a16="http://schemas.microsoft.com/office/drawing/2014/main" val="10000"/>
+                  </a:ext>
+                </a:extLst>
               </a:tr>
               <a:tr h="540000">
                 <a:tc>
@@ -6046,7 +6185,7 @@
                     <a:lstStyle/>
                     <a:p>
                       <a:r>
-                        <a:rPr sz="1500">
+                        <a:rPr sz="1500" b="0">
                           <a:solidFill>
                             <a:srgbClr val="1A1A1A"/>
                           </a:solidFill>
@@ -6068,7 +6207,7 @@
                     <a:lstStyle/>
                     <a:p>
                       <a:r>
-                        <a:rPr sz="1500">
+                        <a:rPr sz="1500" b="0">
                           <a:solidFill>
                             <a:srgbClr val="1A1A1A"/>
                           </a:solidFill>
@@ -6090,7 +6229,7 @@
                     <a:lstStyle/>
                     <a:p>
                       <a:r>
-                        <a:rPr sz="1500">
+                        <a:rPr sz="1500" b="0">
                           <a:solidFill>
                             <a:srgbClr val="1A1A1A"/>
                           </a:solidFill>
@@ -6112,13 +6251,13 @@
                     <a:lstStyle/>
                     <a:p>
                       <a:r>
-                        <a:rPr sz="1500">
+                        <a:rPr sz="1500" b="0">
                           <a:solidFill>
                             <a:srgbClr val="1A1A1A"/>
                           </a:solidFill>
                           <a:latin typeface="Calibri"/>
                         </a:rPr>
-                        <a:t>коммерч.</a:t>
+                        <a:t>≈ 90 BYN</a:t>
                       </a:r>
                     </a:p>
                   </a:txBody>
@@ -6128,6 +6267,11 @@
                     </a:solidFill>
                   </a:tcPr>
                 </a:tc>
+                <a:extLst>
+                  <a:ext uri="{0D108BD9-81ED-4DB2-BD59-A6C34878D82A}">
+                    <a16:rowId xmlns:a16="http://schemas.microsoft.com/office/drawing/2014/main" val="10001"/>
+                  </a:ext>
+                </a:extLst>
               </a:tr>
               <a:tr h="540000">
                 <a:tc>
@@ -6136,7 +6280,7 @@
                     <a:lstStyle/>
                     <a:p>
                       <a:r>
-                        <a:rPr sz="1500">
+                        <a:rPr sz="1500" b="0">
                           <a:solidFill>
                             <a:srgbClr val="1A1A1A"/>
                           </a:solidFill>
@@ -6158,7 +6302,7 @@
                     <a:lstStyle/>
                     <a:p>
                       <a:r>
-                        <a:rPr sz="1500">
+                        <a:rPr sz="1500" b="0">
                           <a:solidFill>
                             <a:srgbClr val="1A1A1A"/>
                           </a:solidFill>
@@ -6180,7 +6324,7 @@
                     <a:lstStyle/>
                     <a:p>
                       <a:r>
-                        <a:rPr sz="1500">
+                        <a:rPr sz="1500" b="0">
                           <a:solidFill>
                             <a:srgbClr val="1A1A1A"/>
                           </a:solidFill>
@@ -6202,13 +6346,13 @@
                     <a:lstStyle/>
                     <a:p>
                       <a:r>
-                        <a:rPr sz="1500">
+                        <a:rPr sz="1500" b="0">
                           <a:solidFill>
                             <a:srgbClr val="1A1A1A"/>
                           </a:solidFill>
                           <a:latin typeface="Calibri"/>
                         </a:rPr>
-                        <a:t>коммерч.</a:t>
+                        <a:t>≈ 80 BYN</a:t>
                       </a:r>
                     </a:p>
                   </a:txBody>
@@ -6218,6 +6362,11 @@
                     </a:solidFill>
                   </a:tcPr>
                 </a:tc>
+                <a:extLst>
+                  <a:ext uri="{0D108BD9-81ED-4DB2-BD59-A6C34878D82A}">
+                    <a16:rowId xmlns:a16="http://schemas.microsoft.com/office/drawing/2014/main" val="10002"/>
+                  </a:ext>
+                </a:extLst>
               </a:tr>
               <a:tr h="540000">
                 <a:tc>
@@ -6226,7 +6375,7 @@
                     <a:lstStyle/>
                     <a:p>
                       <a:r>
-                        <a:rPr sz="1500">
+                        <a:rPr sz="1500" b="0">
                           <a:solidFill>
                             <a:srgbClr val="1A1A1A"/>
                           </a:solidFill>
@@ -6248,7 +6397,7 @@
                     <a:lstStyle/>
                     <a:p>
                       <a:r>
-                        <a:rPr sz="1500">
+                        <a:rPr sz="1500" b="0">
                           <a:solidFill>
                             <a:srgbClr val="1A1A1A"/>
                           </a:solidFill>
@@ -6270,7 +6419,7 @@
                     <a:lstStyle/>
                     <a:p>
                       <a:r>
-                        <a:rPr sz="1500">
+                        <a:rPr sz="1500" b="0">
                           <a:solidFill>
                             <a:srgbClr val="1A1A1A"/>
                           </a:solidFill>
@@ -6292,13 +6441,13 @@
                     <a:lstStyle/>
                     <a:p>
                       <a:r>
-                        <a:rPr sz="1500">
+                        <a:rPr sz="1500" b="0">
                           <a:solidFill>
                             <a:srgbClr val="1A1A1A"/>
                           </a:solidFill>
                           <a:latin typeface="Calibri"/>
                         </a:rPr>
-                        <a:t>коммерч.</a:t>
+                        <a:t>≈ 120 BYN</a:t>
                       </a:r>
                     </a:p>
                   </a:txBody>
@@ -6308,6 +6457,11 @@
                     </a:solidFill>
                   </a:tcPr>
                 </a:tc>
+                <a:extLst>
+                  <a:ext uri="{0D108BD9-81ED-4DB2-BD59-A6C34878D82A}">
+                    <a16:rowId xmlns:a16="http://schemas.microsoft.com/office/drawing/2014/main" val="10003"/>
+                  </a:ext>
+                </a:extLst>
               </a:tr>
               <a:tr h="540000">
                 <a:tc>
@@ -6316,7 +6470,7 @@
                     <a:lstStyle/>
                     <a:p>
                       <a:r>
-                        <a:rPr sz="1500">
+                        <a:rPr sz="1500" b="0">
                           <a:solidFill>
                             <a:srgbClr val="1A1A1A"/>
                           </a:solidFill>
@@ -6338,7 +6492,7 @@
                     <a:lstStyle/>
                     <a:p>
                       <a:r>
-                        <a:rPr sz="1500">
+                        <a:rPr sz="1500" b="0">
                           <a:solidFill>
                             <a:srgbClr val="1A1A1A"/>
                           </a:solidFill>
@@ -6360,13 +6514,13 @@
                     <a:lstStyle/>
                     <a:p>
                       <a:r>
-                        <a:rPr sz="1500">
+                        <a:rPr sz="1500" b="0">
                           <a:solidFill>
                             <a:srgbClr val="1A1A1A"/>
                           </a:solidFill>
                           <a:latin typeface="Calibri"/>
                         </a:rPr>
-                        <a:t>открытое (Apache 2.0)</a:t>
+                        <a:t>открытое</a:t>
                       </a:r>
                     </a:p>
                   </a:txBody>
@@ -6382,13 +6536,13 @@
                     <a:lstStyle/>
                     <a:p>
                       <a:r>
-                        <a:rPr sz="1500">
+                        <a:rPr sz="1500" b="0">
                           <a:solidFill>
                             <a:srgbClr val="1A1A1A"/>
                           </a:solidFill>
                           <a:latin typeface="Calibri"/>
                         </a:rPr>
-                        <a:t>free</a:t>
+                        <a:t>бесплатно</a:t>
                       </a:r>
                     </a:p>
                   </a:txBody>
@@ -6398,6 +6552,106 @@
                     </a:solidFill>
                   </a:tcPr>
                 </a:tc>
+                <a:extLst>
+                  <a:ext uri="{0D108BD9-81ED-4DB2-BD59-A6C34878D82A}">
+                    <a16:rowId xmlns:a16="http://schemas.microsoft.com/office/drawing/2014/main" val="10004"/>
+                  </a:ext>
+                </a:extLst>
+              </a:tr>
+              <a:tr h="540000">
+                <a:tc>
+                  <a:txBody>
+                    <a:bodyPr/>
+                    <a:lstStyle/>
+                    <a:p>
+                      <a:r>
+                        <a:rPr sz="1500" b="0">
+                          <a:solidFill>
+                            <a:srgbClr val="1A1A1A"/>
+                          </a:solidFill>
+                          <a:latin typeface="Calibri"/>
+                        </a:rPr>
+                        <a:t>ПАК «Подпись» (Авест)</a:t>
+                      </a:r>
+                    </a:p>
+                  </a:txBody>
+                  <a:tcPr>
+                    <a:solidFill>
+                      <a:srgbClr val="FFFFFF"/>
+                    </a:solidFill>
+                  </a:tcPr>
+                </a:tc>
+                <a:tc>
+                  <a:txBody>
+                    <a:bodyPr/>
+                    <a:lstStyle/>
+                    <a:p>
+                      <a:r>
+                        <a:rPr sz="1500" b="0">
+                          <a:solidFill>
+                            <a:srgbClr val="1A1A1A"/>
+                          </a:solidFill>
+                          <a:latin typeface="Calibri"/>
+                        </a:rPr>
+                        <a:t>СТБ 34.101.31/45, ЭЦП ГосСУОК</a:t>
+                      </a:r>
+                    </a:p>
+                  </a:txBody>
+                  <a:tcPr>
+                    <a:solidFill>
+                      <a:srgbClr val="FFFFFF"/>
+                    </a:solidFill>
+                  </a:tcPr>
+                </a:tc>
+                <a:tc>
+                  <a:txBody>
+                    <a:bodyPr/>
+                    <a:lstStyle/>
+                    <a:p>
+                      <a:r>
+                        <a:rPr sz="1500" b="0">
+                          <a:solidFill>
+                            <a:srgbClr val="1A1A1A"/>
+                          </a:solidFill>
+                          <a:latin typeface="Calibri"/>
+                        </a:rPr>
+                        <a:t>закрытое</a:t>
+                      </a:r>
+                    </a:p>
+                  </a:txBody>
+                  <a:tcPr>
+                    <a:solidFill>
+                      <a:srgbClr val="FFFFFF"/>
+                    </a:solidFill>
+                  </a:tcPr>
+                </a:tc>
+                <a:tc>
+                  <a:txBody>
+                    <a:bodyPr/>
+                    <a:lstStyle/>
+                    <a:p>
+                      <a:r>
+                        <a:rPr sz="1500" b="0">
+                          <a:solidFill>
+                            <a:srgbClr val="1A1A1A"/>
+                          </a:solidFill>
+                          <a:latin typeface="Calibri"/>
+                        </a:rPr>
+                        <a:t>≈ 350 BYN</a:t>
+                      </a:r>
+                    </a:p>
+                  </a:txBody>
+                  <a:tcPr>
+                    <a:solidFill>
+                      <a:srgbClr val="FFFFFF"/>
+                    </a:solidFill>
+                  </a:tcPr>
+                </a:tc>
+                <a:extLst>
+                  <a:ext uri="{0D108BD9-81ED-4DB2-BD59-A6C34878D82A}">
+                    <a16:rowId xmlns:a16="http://schemas.microsoft.com/office/drawing/2014/main" val="10003"/>
+                  </a:ext>
+                </a:extLst>
               </a:tr>
               <a:tr h="540000">
                 <a:tc>
@@ -6456,7 +6710,7 @@
                           </a:solidFill>
                           <a:latin typeface="Calibri"/>
                         </a:rPr>
-                        <a:t>открытое (MIT)</a:t>
+                        <a:t>открытое</a:t>
                       </a:r>
                     </a:p>
                   </a:txBody>
@@ -6478,7 +6732,7 @@
                           </a:solidFill>
                           <a:latin typeface="Calibri"/>
                         </a:rPr>
-                        <a:t>&lt; 10 у.е.</a:t>
+                        <a:t>≈ 30 BYN</a:t>
                       </a:r>
                     </a:p>
                   </a:txBody>
@@ -6488,6 +6742,11 @@
                     </a:solidFill>
                   </a:tcPr>
                 </a:tc>
+                <a:extLst>
+                  <a:ext uri="{0D108BD9-81ED-4DB2-BD59-A6C34878D82A}">
+                    <a16:rowId xmlns:a16="http://schemas.microsoft.com/office/drawing/2014/main" val="10005"/>
+                  </a:ext>
+                </a:extLst>
               </a:tr>
             </a:tbl>
           </a:graphicData>
@@ -6495,14 +6754,14 @@
       </p:graphicFrame>
       <p:sp>
         <p:nvSpPr>
-          <p:cNvPr id="6" name="TextBox 5"/>
+          <p:cNvPr id="7" name="TextBox 6"/>
           <p:cNvSpPr txBox="1"/>
           <p:nvPr/>
         </p:nvSpPr>
         <p:spPr>
           <a:xfrm>
-            <a:off x="540000" y="4860000"/>
-            <a:ext cx="10980000" cy="1080000"/>
+            <a:off x="540000" y="6480000"/>
+            <a:ext cx="7200000" cy="251999"/>
           </a:xfrm>
           <a:prstGeom prst="rect">
             <a:avLst/>
@@ -6510,58 +6769,94 @@
           <a:noFill/>
         </p:spPr>
         <p:txBody>
-          <a:bodyPr wrap="square" lIns="0" rIns="0" tIns="0" bIns="0">
+          <a:bodyPr wrap="square" lIns="0" tIns="0" rIns="0" bIns="0">
             <a:spAutoFit/>
           </a:bodyPr>
           <a:lstStyle/>
           <a:p>
-            <a:pPr algn="ctr"/>
-            <a:r>
-              <a:rPr sz="1700" b="0">
-                <a:solidFill>
-                  <a:srgbClr val="1A1A1A"/>
-                </a:solidFill>
-                <a:latin typeface="Calibri"/>
-              </a:rPr>
-              <a:t>Разработанный комплекс занимает промежуточную нишу:</a:t>
-            </a:r>
-          </a:p>
-          <a:p>
-            <a:pPr algn="ctr"/>
-            <a:r>
-              <a:rPr sz="1700" b="0">
-                <a:solidFill>
-                  <a:srgbClr val="1A1A1A"/>
-                </a:solidFill>
-                <a:latin typeface="Calibri"/>
-              </a:rPr>
-              <a:t>аппаратная защита ключа, как у промышленных токенов,</a:t>
-            </a:r>
-          </a:p>
-          <a:p>
-            <a:pPr algn="ctr"/>
-            <a:r>
-              <a:rPr sz="1700" b="0">
-                <a:solidFill>
-                  <a:srgbClr val="1A1A1A"/>
-                </a:solidFill>
-                <a:latin typeface="Calibri"/>
-              </a:rPr>
-              <a:t>при полностью открытом коде и доступном оборудовании.</a:t>
-            </a:r>
-          </a:p>
-        </p:txBody>
-      </p:sp>
-      <p:sp>
-        <p:nvSpPr>
-          <p:cNvPr id="7" name="TextBox 6"/>
+            <a:pPr algn="l"/>
+            <a:r>
+              <a:rPr sz="1000" b="0" dirty="0" err="1">
+                <a:solidFill>
+                  <a:srgbClr val="555555"/>
+                </a:solidFill>
+                <a:latin typeface="Calibri"/>
+              </a:rPr>
+              <a:t>Программно-аппаратный</a:t>
+            </a:r>
+            <a:r>
+              <a:rPr sz="1000" b="0" dirty="0">
+                <a:solidFill>
+                  <a:srgbClr val="555555"/>
+                </a:solidFill>
+                <a:latin typeface="Calibri"/>
+              </a:rPr>
+              <a:t> </a:t>
+            </a:r>
+            <a:r>
+              <a:rPr sz="1000" b="0" dirty="0" err="1">
+                <a:solidFill>
+                  <a:srgbClr val="555555"/>
+                </a:solidFill>
+                <a:latin typeface="Calibri"/>
+              </a:rPr>
+              <a:t>комплекс</a:t>
+            </a:r>
+            <a:r>
+              <a:rPr sz="1000" b="0" dirty="0">
+                <a:solidFill>
+                  <a:srgbClr val="555555"/>
+                </a:solidFill>
+                <a:latin typeface="Calibri"/>
+              </a:rPr>
+              <a:t> </a:t>
+            </a:r>
+            <a:r>
+              <a:rPr sz="1000" b="0" dirty="0" err="1">
+                <a:solidFill>
+                  <a:srgbClr val="555555"/>
+                </a:solidFill>
+                <a:latin typeface="Calibri"/>
+              </a:rPr>
+              <a:t>по</a:t>
+            </a:r>
+            <a:r>
+              <a:rPr sz="1000" b="0" dirty="0">
+                <a:solidFill>
+                  <a:srgbClr val="555555"/>
+                </a:solidFill>
+                <a:latin typeface="Calibri"/>
+              </a:rPr>
+              <a:t> СТБ с USB-</a:t>
+            </a:r>
+            <a:r>
+              <a:rPr sz="1000" b="0" dirty="0" err="1">
+                <a:solidFill>
+                  <a:srgbClr val="555555"/>
+                </a:solidFill>
+                <a:latin typeface="Calibri"/>
+              </a:rPr>
+              <a:t>интерфейсом</a:t>
+            </a:r>
+            <a:endParaRPr sz="1000" b="0" dirty="0">
+              <a:solidFill>
+                <a:srgbClr val="555555"/>
+              </a:solidFill>
+              <a:latin typeface="Calibri"/>
+            </a:endParaRPr>
+          </a:p>
+        </p:txBody>
+      </p:sp>
+      <p:sp>
+        <p:nvSpPr>
+          <p:cNvPr id="8" name="TextBox 7"/>
           <p:cNvSpPr txBox="1"/>
           <p:nvPr/>
         </p:nvSpPr>
         <p:spPr>
           <a:xfrm>
-            <a:off x="540000" y="6480000"/>
-            <a:ext cx="7200000" cy="251999"/>
+            <a:off x="10800000" y="6480000"/>
+            <a:ext cx="900000" cy="251999"/>
           </a:xfrm>
           <a:prstGeom prst="rect">
             <a:avLst/>
@@ -6569,42 +6864,7 @@
           <a:noFill/>
         </p:spPr>
         <p:txBody>
-          <a:bodyPr wrap="square" lIns="0" rIns="0" tIns="0" bIns="0">
-            <a:spAutoFit/>
-          </a:bodyPr>
-          <a:lstStyle/>
-          <a:p>
-            <a:pPr algn="l"/>
-            <a:r>
-              <a:rPr sz="1000" b="0">
-                <a:solidFill>
-                  <a:srgbClr val="555555"/>
-                </a:solidFill>
-                <a:latin typeface="Calibri"/>
-              </a:rPr>
-              <a:t>Программно-аппаратный комплекс по СТБ с USB-интерфейсом</a:t>
-            </a:r>
-          </a:p>
-        </p:txBody>
-      </p:sp>
-      <p:sp>
-        <p:nvSpPr>
-          <p:cNvPr id="8" name="TextBox 7"/>
-          <p:cNvSpPr txBox="1"/>
-          <p:nvPr/>
-        </p:nvSpPr>
-        <p:spPr>
-          <a:xfrm>
-            <a:off x="10800000" y="6480000"/>
-            <a:ext cx="900000" cy="251999"/>
-          </a:xfrm>
-          <a:prstGeom prst="rect">
-            <a:avLst/>
-          </a:prstGeom>
-          <a:noFill/>
-        </p:spPr>
-        <p:txBody>
-          <a:bodyPr wrap="square" lIns="0" rIns="0" tIns="0" bIns="0">
+          <a:bodyPr wrap="square" lIns="0" tIns="0" rIns="0" bIns="0">
             <a:spAutoFit/>
           </a:bodyPr>
           <a:lstStyle/>
@@ -6631,7 +6891,7 @@
 </file>
 
 <file path=ppt/slides/slide16.xml><?xml version="1.0" encoding="utf-8"?>
-<p:sld xmlns:a="http://schemas.openxmlformats.org/drawingml/2006/main" xmlns:p="http://schemas.openxmlformats.org/presentationml/2006/main" xmlns:r="http://schemas.openxmlformats.org/officeDocument/2006/relationships">
+<p:sld xmlns:a="http://schemas.openxmlformats.org/drawingml/2006/main" xmlns:r="http://schemas.openxmlformats.org/officeDocument/2006/relationships" xmlns:p="http://schemas.openxmlformats.org/presentationml/2006/main">
   <p:cSld>
     <p:spTree>
       <p:nvGrpSpPr>
@@ -6639,7 +6899,14 @@
         <p:cNvGrpSpPr/>
         <p:nvPr/>
       </p:nvGrpSpPr>
-      <p:grpSpPr/>
+      <p:grpSpPr>
+        <a:xfrm>
+          <a:off x="0" y="0"/>
+          <a:ext cx="0" cy="0"/>
+          <a:chOff x="0" y="0"/>
+          <a:chExt cx="0" cy="0"/>
+        </a:xfrm>
+      </p:grpSpPr>
       <p:sp>
         <p:nvSpPr>
           <p:cNvPr id="2" name="Rectangle 1"/>
@@ -6680,6 +6947,7 @@
           <a:lstStyle/>
           <a:p>
             <a:pPr algn="ctr"/>
+            <a:endParaRPr/>
           </a:p>
         </p:txBody>
       </p:sp>
@@ -6700,7 +6968,7 @@
           <a:noFill/>
         </p:spPr>
         <p:txBody>
-          <a:bodyPr wrap="square" lIns="0" rIns="0" tIns="0" bIns="0">
+          <a:bodyPr wrap="square" lIns="0" tIns="0" rIns="0" bIns="0">
             <a:spAutoFit/>
           </a:bodyPr>
           <a:lstStyle/>
@@ -6758,6 +7026,7 @@
           <a:lstStyle/>
           <a:p>
             <a:pPr algn="ctr"/>
+            <a:endParaRPr/>
           </a:p>
         </p:txBody>
       </p:sp>
@@ -6778,7 +7047,7 @@
           <a:noFill/>
         </p:spPr>
         <p:txBody>
-          <a:bodyPr wrap="square" lIns="0" rIns="0" tIns="0" bIns="0">
+          <a:bodyPr wrap="square" lIns="0" tIns="0" rIns="0" bIns="0">
             <a:spAutoFit/>
           </a:bodyPr>
           <a:lstStyle/>
@@ -6805,7 +7074,7 @@
         <p:spPr>
           <a:xfrm>
             <a:off x="540000" y="1584000"/>
-            <a:ext cx="5400000" cy="3960000"/>
+            <a:ext cx="5400000" cy="2462213"/>
           </a:xfrm>
           <a:prstGeom prst="rect">
             <a:avLst/>
@@ -6813,129 +7082,384 @@
           <a:noFill/>
         </p:spPr>
         <p:txBody>
-          <a:bodyPr wrap="square" lIns="0" rIns="0" tIns="0" bIns="0">
+          <a:bodyPr wrap="square" lIns="0" tIns="0" rIns="0" bIns="0">
             <a:spAutoFit/>
           </a:bodyPr>
           <a:lstStyle/>
           <a:p>
             <a:pPr algn="l"/>
             <a:r>
-              <a:rPr sz="1600" b="0">
-                <a:solidFill>
-                  <a:srgbClr val="1A1A1A"/>
-                </a:solidFill>
-                <a:latin typeface="Calibri"/>
-              </a:rPr>
-              <a:t>•  belt: 128 бит, лучшая атака ≥ 2¹¹⁰</a:t>
-            </a:r>
-          </a:p>
-          <a:p>
-            <a:pPr algn="l"/>
-            <a:r>
-              <a:rPr sz="1600" b="0">
-                <a:solidFill>
-                  <a:srgbClr val="1A1A1A"/>
-                </a:solidFill>
-                <a:latin typeface="Calibri"/>
-              </a:rPr>
-              <a:t/>
-            </a:r>
-          </a:p>
-          <a:p>
-            <a:pPr algn="l"/>
-            <a:r>
-              <a:rPr sz="1600" b="0">
-                <a:solidFill>
-                  <a:srgbClr val="1A1A1A"/>
-                </a:solidFill>
-                <a:latin typeface="Calibri"/>
-              </a:rPr>
-              <a:t>•  bign на bign-curve256v1:</a:t>
-            </a:r>
-          </a:p>
-          <a:p>
-            <a:pPr algn="l"/>
-            <a:r>
-              <a:rPr sz="1600" b="0">
-                <a:solidFill>
-                  <a:srgbClr val="1A1A1A"/>
-                </a:solidFill>
-                <a:latin typeface="Calibri"/>
-              </a:rPr>
-              <a:t>   ρ-Полларда ≈ 2¹²⁸ операций</a:t>
-            </a:r>
-          </a:p>
-          <a:p>
-            <a:pPr algn="l"/>
-            <a:r>
-              <a:rPr sz="1600" b="0">
-                <a:solidFill>
-                  <a:srgbClr val="1A1A1A"/>
-                </a:solidFill>
-                <a:latin typeface="Calibri"/>
-              </a:rPr>
-              <a:t/>
-            </a:r>
-          </a:p>
-          <a:p>
-            <a:pPr algn="l"/>
-            <a:r>
-              <a:rPr sz="1600" b="0">
-                <a:solidFill>
-                  <a:srgbClr val="1A1A1A"/>
-                </a:solidFill>
-                <a:latin typeface="Calibri"/>
-              </a:rPr>
-              <a:t>•  Детерминированный bign-sign2</a:t>
-            </a:r>
-          </a:p>
-          <a:p>
-            <a:pPr algn="l"/>
-            <a:r>
-              <a:rPr sz="1600" b="0">
-                <a:solidFill>
-                  <a:srgbClr val="1A1A1A"/>
-                </a:solidFill>
-                <a:latin typeface="Calibri"/>
-              </a:rPr>
-              <a:t>   снимает риск повтора k (как в ECDSA)</a:t>
-            </a:r>
-          </a:p>
-          <a:p>
-            <a:pPr algn="l"/>
-            <a:r>
-              <a:rPr sz="1600" b="0">
-                <a:solidFill>
-                  <a:srgbClr val="1A1A1A"/>
-                </a:solidFill>
-                <a:latin typeface="Calibri"/>
-              </a:rPr>
-              <a:t/>
-            </a:r>
-          </a:p>
-          <a:p>
-            <a:pPr algn="l"/>
-            <a:r>
-              <a:rPr sz="1600" b="0">
-                <a:solidFill>
-                  <a:srgbClr val="1A1A1A"/>
-                </a:solidFill>
-                <a:latin typeface="Calibri"/>
-              </a:rPr>
-              <a:t>•  belt-hash в bee2 — постоянное время,</a:t>
-            </a:r>
-          </a:p>
-          <a:p>
-            <a:pPr algn="l"/>
-            <a:r>
-              <a:rPr sz="1600" b="0">
-                <a:solidFill>
-                  <a:srgbClr val="1A1A1A"/>
-                </a:solidFill>
-                <a:latin typeface="Calibri"/>
-              </a:rPr>
-              <a:t>   нечувствительно к тайминг-атакам</a:t>
-            </a:r>
+              <a:rPr sz="1600" b="0" dirty="0">
+                <a:solidFill>
+                  <a:srgbClr val="1A1A1A"/>
+                </a:solidFill>
+                <a:latin typeface="Calibri"/>
+              </a:rPr>
+              <a:t>•  belt: 128 </a:t>
+            </a:r>
+            <a:r>
+              <a:rPr sz="1600" b="0" dirty="0" err="1">
+                <a:solidFill>
+                  <a:srgbClr val="1A1A1A"/>
+                </a:solidFill>
+                <a:latin typeface="Calibri"/>
+              </a:rPr>
+              <a:t>бит</a:t>
+            </a:r>
+            <a:r>
+              <a:rPr sz="1600" b="0" dirty="0">
+                <a:solidFill>
+                  <a:srgbClr val="1A1A1A"/>
+                </a:solidFill>
+                <a:latin typeface="Calibri"/>
+              </a:rPr>
+              <a:t>, </a:t>
+            </a:r>
+            <a:r>
+              <a:rPr sz="1600" b="0" dirty="0" err="1">
+                <a:solidFill>
+                  <a:srgbClr val="1A1A1A"/>
+                </a:solidFill>
+                <a:latin typeface="Calibri"/>
+              </a:rPr>
+              <a:t>лучшая</a:t>
+            </a:r>
+            <a:r>
+              <a:rPr sz="1600" b="0" dirty="0">
+                <a:solidFill>
+                  <a:srgbClr val="1A1A1A"/>
+                </a:solidFill>
+                <a:latin typeface="Calibri"/>
+              </a:rPr>
+              <a:t> </a:t>
+            </a:r>
+            <a:r>
+              <a:rPr sz="1600" b="0" dirty="0" err="1">
+                <a:solidFill>
+                  <a:srgbClr val="1A1A1A"/>
+                </a:solidFill>
+                <a:latin typeface="Calibri"/>
+              </a:rPr>
+              <a:t>атака</a:t>
+            </a:r>
+            <a:r>
+              <a:rPr sz="1600" b="0" dirty="0">
+                <a:solidFill>
+                  <a:srgbClr val="1A1A1A"/>
+                </a:solidFill>
+                <a:latin typeface="Calibri"/>
+              </a:rPr>
+              <a:t> ≥ 2¹¹⁰</a:t>
+            </a:r>
+          </a:p>
+          <a:p>
+            <a:pPr algn="l"/>
+            <a:endParaRPr sz="1600" b="0" dirty="0">
+              <a:solidFill>
+                <a:srgbClr val="1A1A1A"/>
+              </a:solidFill>
+              <a:latin typeface="Calibri"/>
+            </a:endParaRPr>
+          </a:p>
+          <a:p>
+            <a:pPr algn="l"/>
+            <a:r>
+              <a:rPr sz="1600" b="0" dirty="0">
+                <a:solidFill>
+                  <a:srgbClr val="1A1A1A"/>
+                </a:solidFill>
+                <a:latin typeface="Calibri"/>
+              </a:rPr>
+              <a:t>•  </a:t>
+            </a:r>
+            <a:r>
+              <a:rPr sz="1600" b="0" dirty="0" err="1">
+                <a:solidFill>
+                  <a:srgbClr val="1A1A1A"/>
+                </a:solidFill>
+                <a:latin typeface="Calibri"/>
+              </a:rPr>
+              <a:t>bign</a:t>
+            </a:r>
+            <a:r>
+              <a:rPr sz="1600" b="0" dirty="0">
+                <a:solidFill>
+                  <a:srgbClr val="1A1A1A"/>
+                </a:solidFill>
+                <a:latin typeface="Calibri"/>
+              </a:rPr>
+              <a:t> </a:t>
+            </a:r>
+            <a:r>
+              <a:rPr sz="1600" b="0" dirty="0" err="1">
+                <a:solidFill>
+                  <a:srgbClr val="1A1A1A"/>
+                </a:solidFill>
+                <a:latin typeface="Calibri"/>
+              </a:rPr>
+              <a:t>на</a:t>
+            </a:r>
+            <a:r>
+              <a:rPr sz="1600" b="0" dirty="0">
+                <a:solidFill>
+                  <a:srgbClr val="1A1A1A"/>
+                </a:solidFill>
+                <a:latin typeface="Calibri"/>
+              </a:rPr>
+              <a:t> bign-curve256v1:</a:t>
+            </a:r>
+          </a:p>
+          <a:p>
+            <a:pPr algn="l"/>
+            <a:r>
+              <a:rPr sz="1600" b="0" dirty="0">
+                <a:solidFill>
+                  <a:srgbClr val="1A1A1A"/>
+                </a:solidFill>
+                <a:latin typeface="Calibri"/>
+              </a:rPr>
+              <a:t>   ρ-</a:t>
+            </a:r>
+            <a:r>
+              <a:rPr sz="1600" b="0" dirty="0" err="1">
+                <a:solidFill>
+                  <a:srgbClr val="1A1A1A"/>
+                </a:solidFill>
+                <a:latin typeface="Calibri"/>
+              </a:rPr>
+              <a:t>Полларда</a:t>
+            </a:r>
+            <a:r>
+              <a:rPr sz="1600" b="0" dirty="0">
+                <a:solidFill>
+                  <a:srgbClr val="1A1A1A"/>
+                </a:solidFill>
+                <a:latin typeface="Calibri"/>
+              </a:rPr>
+              <a:t> ≈ 2¹²⁸ </a:t>
+            </a:r>
+            <a:r>
+              <a:rPr sz="1600" b="0" dirty="0" err="1">
+                <a:solidFill>
+                  <a:srgbClr val="1A1A1A"/>
+                </a:solidFill>
+                <a:latin typeface="Calibri"/>
+              </a:rPr>
+              <a:t>операций</a:t>
+            </a:r>
+            <a:endParaRPr sz="1600" b="0" dirty="0">
+              <a:solidFill>
+                <a:srgbClr val="1A1A1A"/>
+              </a:solidFill>
+              <a:latin typeface="Calibri"/>
+            </a:endParaRPr>
+          </a:p>
+          <a:p>
+            <a:pPr algn="l"/>
+            <a:endParaRPr sz="1600" b="0" dirty="0">
+              <a:solidFill>
+                <a:srgbClr val="1A1A1A"/>
+              </a:solidFill>
+              <a:latin typeface="Calibri"/>
+            </a:endParaRPr>
+          </a:p>
+          <a:p>
+            <a:pPr algn="l"/>
+            <a:r>
+              <a:rPr sz="1600" b="0" dirty="0">
+                <a:solidFill>
+                  <a:srgbClr val="1A1A1A"/>
+                </a:solidFill>
+                <a:latin typeface="Calibri"/>
+              </a:rPr>
+              <a:t>•  </a:t>
+            </a:r>
+            <a:r>
+              <a:rPr sz="1600" b="0" dirty="0" err="1">
+                <a:solidFill>
+                  <a:srgbClr val="1A1A1A"/>
+                </a:solidFill>
+                <a:latin typeface="Calibri"/>
+              </a:rPr>
+              <a:t>Детерминированный</a:t>
+            </a:r>
+            <a:r>
+              <a:rPr sz="1600" b="0" dirty="0">
+                <a:solidFill>
+                  <a:srgbClr val="1A1A1A"/>
+                </a:solidFill>
+                <a:latin typeface="Calibri"/>
+              </a:rPr>
+              <a:t> bign-sign2</a:t>
+            </a:r>
+          </a:p>
+          <a:p>
+            <a:pPr algn="l"/>
+            <a:r>
+              <a:rPr sz="1600" b="0" dirty="0">
+                <a:solidFill>
+                  <a:srgbClr val="1A1A1A"/>
+                </a:solidFill>
+                <a:latin typeface="Calibri"/>
+              </a:rPr>
+              <a:t>   </a:t>
+            </a:r>
+            <a:r>
+              <a:rPr sz="1600" b="0" dirty="0" err="1">
+                <a:solidFill>
+                  <a:srgbClr val="1A1A1A"/>
+                </a:solidFill>
+                <a:latin typeface="Calibri"/>
+              </a:rPr>
+              <a:t>снимает</a:t>
+            </a:r>
+            <a:r>
+              <a:rPr sz="1600" b="0" dirty="0">
+                <a:solidFill>
+                  <a:srgbClr val="1A1A1A"/>
+                </a:solidFill>
+                <a:latin typeface="Calibri"/>
+              </a:rPr>
+              <a:t> </a:t>
+            </a:r>
+            <a:r>
+              <a:rPr sz="1600" b="0" dirty="0" err="1">
+                <a:solidFill>
+                  <a:srgbClr val="1A1A1A"/>
+                </a:solidFill>
+                <a:latin typeface="Calibri"/>
+              </a:rPr>
+              <a:t>риск</a:t>
+            </a:r>
+            <a:r>
+              <a:rPr sz="1600" b="0" dirty="0">
+                <a:solidFill>
+                  <a:srgbClr val="1A1A1A"/>
+                </a:solidFill>
+                <a:latin typeface="Calibri"/>
+              </a:rPr>
+              <a:t> </a:t>
+            </a:r>
+            <a:r>
+              <a:rPr sz="1600" b="0" dirty="0" err="1">
+                <a:solidFill>
+                  <a:srgbClr val="1A1A1A"/>
+                </a:solidFill>
+                <a:latin typeface="Calibri"/>
+              </a:rPr>
+              <a:t>повтора</a:t>
+            </a:r>
+            <a:r>
+              <a:rPr sz="1600" b="0" dirty="0">
+                <a:solidFill>
+                  <a:srgbClr val="1A1A1A"/>
+                </a:solidFill>
+                <a:latin typeface="Calibri"/>
+              </a:rPr>
+              <a:t> k</a:t>
+            </a:r>
+          </a:p>
+          <a:p>
+            <a:pPr algn="l"/>
+            <a:endParaRPr sz="1600" b="0" dirty="0">
+              <a:solidFill>
+                <a:srgbClr val="1A1A1A"/>
+              </a:solidFill>
+              <a:latin typeface="Calibri"/>
+            </a:endParaRPr>
+          </a:p>
+          <a:p>
+            <a:pPr algn="l"/>
+            <a:r>
+              <a:rPr sz="1600" b="0" dirty="0">
+                <a:solidFill>
+                  <a:srgbClr val="1A1A1A"/>
+                </a:solidFill>
+                <a:latin typeface="Calibri"/>
+              </a:rPr>
+              <a:t>•  belt-hash в bee2 — </a:t>
+            </a:r>
+            <a:r>
+              <a:rPr sz="1600" b="0" dirty="0" err="1">
+                <a:solidFill>
+                  <a:srgbClr val="1A1A1A"/>
+                </a:solidFill>
+                <a:latin typeface="Calibri"/>
+              </a:rPr>
+              <a:t>постоянное</a:t>
+            </a:r>
+            <a:r>
+              <a:rPr sz="1600" b="0" dirty="0">
+                <a:solidFill>
+                  <a:srgbClr val="1A1A1A"/>
+                </a:solidFill>
+                <a:latin typeface="Calibri"/>
+              </a:rPr>
+              <a:t> </a:t>
+            </a:r>
+            <a:r>
+              <a:rPr sz="1600" b="0" dirty="0" err="1">
+                <a:solidFill>
+                  <a:srgbClr val="1A1A1A"/>
+                </a:solidFill>
+                <a:latin typeface="Calibri"/>
+              </a:rPr>
+              <a:t>время</a:t>
+            </a:r>
+            <a:r>
+              <a:rPr sz="1600" b="0" dirty="0">
+                <a:solidFill>
+                  <a:srgbClr val="1A1A1A"/>
+                </a:solidFill>
+                <a:latin typeface="Calibri"/>
+              </a:rPr>
+              <a:t>,</a:t>
+            </a:r>
+          </a:p>
+          <a:p>
+            <a:pPr algn="l"/>
+            <a:r>
+              <a:rPr sz="1600" b="0" dirty="0">
+                <a:solidFill>
+                  <a:srgbClr val="1A1A1A"/>
+                </a:solidFill>
+                <a:latin typeface="Calibri"/>
+              </a:rPr>
+              <a:t>   </a:t>
+            </a:r>
+            <a:r>
+              <a:rPr sz="1600" b="0" dirty="0" err="1">
+                <a:solidFill>
+                  <a:srgbClr val="1A1A1A"/>
+                </a:solidFill>
+                <a:latin typeface="Calibri"/>
+              </a:rPr>
+              <a:t>нечувствительно</a:t>
+            </a:r>
+            <a:r>
+              <a:rPr sz="1600" b="0" dirty="0">
+                <a:solidFill>
+                  <a:srgbClr val="1A1A1A"/>
+                </a:solidFill>
+                <a:latin typeface="Calibri"/>
+              </a:rPr>
+              <a:t> к </a:t>
+            </a:r>
+            <a:r>
+              <a:rPr sz="1600" b="0" dirty="0" err="1">
+                <a:solidFill>
+                  <a:srgbClr val="1A1A1A"/>
+                </a:solidFill>
+                <a:latin typeface="Calibri"/>
+              </a:rPr>
+              <a:t>тайминг-атакам</a:t>
+            </a:r>
+            <a:endParaRPr sz="1600" b="0" dirty="0">
+              <a:solidFill>
+                <a:srgbClr val="1A1A1A"/>
+              </a:solidFill>
+              <a:latin typeface="Calibri"/>
+            </a:endParaRPr>
           </a:p>
         </p:txBody>
       </p:sp>
@@ -6956,7 +7480,7 @@
           <a:noFill/>
         </p:spPr>
         <p:txBody>
-          <a:bodyPr wrap="square" lIns="0" rIns="0" tIns="0" bIns="0">
+          <a:bodyPr wrap="square" lIns="0" tIns="0" rIns="0" bIns="0">
             <a:spAutoFit/>
           </a:bodyPr>
           <a:lstStyle/>
@@ -6991,7 +7515,7 @@
           <a:noFill/>
         </p:spPr>
         <p:txBody>
-          <a:bodyPr wrap="square" lIns="0" rIns="0" tIns="0" bIns="0">
+          <a:bodyPr wrap="square" lIns="0" tIns="0" rIns="0" bIns="0">
             <a:spAutoFit/>
           </a:bodyPr>
           <a:lstStyle/>
@@ -7009,6 +7533,15 @@
           </a:p>
           <a:p>
             <a:pPr algn="l"/>
+            <a:endParaRPr sz="1600" b="0">
+              <a:solidFill>
+                <a:srgbClr val="1A1A1A"/>
+              </a:solidFill>
+              <a:latin typeface="Calibri"/>
+            </a:endParaRPr>
+          </a:p>
+          <a:p>
+            <a:pPr algn="l"/>
             <a:r>
               <a:rPr sz="1600" b="0">
                 <a:solidFill>
@@ -7016,7 +7549,7 @@
                 </a:solidFill>
                 <a:latin typeface="Calibri"/>
               </a:rPr>
-              <a:t/>
+              <a:t>•  CRC-32 защищает ключевую пару</a:t>
             </a:r>
           </a:p>
           <a:p>
@@ -7028,8 +7561,17 @@
                 </a:solidFill>
                 <a:latin typeface="Calibri"/>
               </a:rPr>
-              <a:t>•  CRC-32 защищает ключевую пару</a:t>
-            </a:r>
+              <a:t>   от повреждения</a:t>
+            </a:r>
+          </a:p>
+          <a:p>
+            <a:pPr algn="l"/>
+            <a:endParaRPr sz="1600" b="0">
+              <a:solidFill>
+                <a:srgbClr val="1A1A1A"/>
+              </a:solidFill>
+              <a:latin typeface="Calibri"/>
+            </a:endParaRPr>
           </a:p>
           <a:p>
             <a:pPr algn="l"/>
@@ -7040,7 +7582,7 @@
                 </a:solidFill>
                 <a:latin typeface="Calibri"/>
               </a:rPr>
-              <a:t>   от повреждения</a:t>
+              <a:t>•  Read-out Protection блокирует</a:t>
             </a:r>
           </a:p>
           <a:p>
@@ -7052,8 +7594,17 @@
                 </a:solidFill>
                 <a:latin typeface="Calibri"/>
               </a:rPr>
-              <a:t/>
-            </a:r>
+              <a:t>   чтение Flash через JTAG/SWD</a:t>
+            </a:r>
+          </a:p>
+          <a:p>
+            <a:pPr algn="l"/>
+            <a:endParaRPr sz="1600" b="0">
+              <a:solidFill>
+                <a:srgbClr val="1A1A1A"/>
+              </a:solidFill>
+              <a:latin typeface="Calibri"/>
+            </a:endParaRPr>
           </a:p>
           <a:p>
             <a:pPr algn="l"/>
@@ -7064,7 +7615,7 @@
                 </a:solidFill>
                 <a:latin typeface="Calibri"/>
               </a:rPr>
-              <a:t>•  Read-out Protection блокирует</a:t>
+              <a:t>•  Негативный тест: изменение 1 байта</a:t>
             </a:r>
           </a:p>
           <a:p>
@@ -7076,56 +7627,17 @@
                 </a:solidFill>
                 <a:latin typeface="Calibri"/>
               </a:rPr>
-              <a:t>   чтение Flash через JTAG/SWD</a:t>
-            </a:r>
-          </a:p>
-          <a:p>
-            <a:pPr algn="l"/>
-            <a:r>
-              <a:rPr sz="1600" b="0">
-                <a:solidFill>
-                  <a:srgbClr val="1A1A1A"/>
-                </a:solidFill>
-                <a:latin typeface="Calibri"/>
-              </a:rPr>
-              <a:t/>
-            </a:r>
-          </a:p>
-          <a:p>
-            <a:pPr algn="l"/>
-            <a:r>
-              <a:rPr sz="1600" b="0">
-                <a:solidFill>
-                  <a:srgbClr val="1A1A1A"/>
-                </a:solidFill>
-                <a:latin typeface="Calibri"/>
-              </a:rPr>
-              <a:t>•  Негативный тест: изменение 1 байта</a:t>
-            </a:r>
-          </a:p>
-          <a:p>
-            <a:pPr algn="l"/>
-            <a:r>
-              <a:rPr sz="1600" b="0">
-                <a:solidFill>
-                  <a:srgbClr val="1A1A1A"/>
-                </a:solidFill>
-                <a:latin typeface="Calibri"/>
-              </a:rPr>
               <a:t>   → BAD SIGNATURE</a:t>
             </a:r>
           </a:p>
           <a:p>
             <a:pPr algn="l"/>
-            <a:r>
-              <a:rPr sz="1600" b="0">
-                <a:solidFill>
-                  <a:srgbClr val="1A1A1A"/>
-                </a:solidFill>
-                <a:latin typeface="Calibri"/>
-              </a:rPr>
-              <a:t/>
-            </a:r>
+            <a:endParaRPr sz="1600" b="0">
+              <a:solidFill>
+                <a:srgbClr val="1A1A1A"/>
+              </a:solidFill>
+              <a:latin typeface="Calibri"/>
+            </a:endParaRPr>
           </a:p>
           <a:p>
             <a:pPr algn="l"/>
@@ -7158,7 +7670,7 @@
           <a:noFill/>
         </p:spPr>
         <p:txBody>
-          <a:bodyPr wrap="square" lIns="0" rIns="0" tIns="0" bIns="0">
+          <a:bodyPr wrap="square" lIns="0" tIns="0" rIns="0" bIns="0">
             <a:spAutoFit/>
           </a:bodyPr>
           <a:lstStyle/>
@@ -7193,7 +7705,7 @@
           <a:noFill/>
         </p:spPr>
         <p:txBody>
-          <a:bodyPr wrap="square" lIns="0" rIns="0" tIns="0" bIns="0">
+          <a:bodyPr wrap="square" lIns="0" tIns="0" rIns="0" bIns="0">
             <a:spAutoFit/>
           </a:bodyPr>
           <a:lstStyle/>
@@ -7220,7 +7732,7 @@
 </file>
 
 <file path=ppt/slides/slide17.xml><?xml version="1.0" encoding="utf-8"?>
-<p:sld xmlns:a="http://schemas.openxmlformats.org/drawingml/2006/main" xmlns:p="http://schemas.openxmlformats.org/presentationml/2006/main" xmlns:r="http://schemas.openxmlformats.org/officeDocument/2006/relationships">
+<p:sld xmlns:a="http://schemas.openxmlformats.org/drawingml/2006/main" xmlns:r="http://schemas.openxmlformats.org/officeDocument/2006/relationships" xmlns:p="http://schemas.openxmlformats.org/presentationml/2006/main">
   <p:cSld>
     <p:spTree>
       <p:nvGrpSpPr>
@@ -7228,7 +7740,14 @@
         <p:cNvGrpSpPr/>
         <p:nvPr/>
       </p:nvGrpSpPr>
-      <p:grpSpPr/>
+      <p:grpSpPr>
+        <a:xfrm>
+          <a:off x="0" y="0"/>
+          <a:ext cx="0" cy="0"/>
+          <a:chOff x="0" y="0"/>
+          <a:chExt cx="0" cy="0"/>
+        </a:xfrm>
+      </p:grpSpPr>
       <p:sp>
         <p:nvSpPr>
           <p:cNvPr id="2" name="Rectangle 1"/>
@@ -7269,6 +7788,7 @@
           <a:lstStyle/>
           <a:p>
             <a:pPr algn="ctr"/>
+            <a:endParaRPr/>
           </a:p>
         </p:txBody>
       </p:sp>
@@ -7289,7 +7809,7 @@
           <a:noFill/>
         </p:spPr>
         <p:txBody>
-          <a:bodyPr wrap="square" lIns="0" rIns="0" tIns="0" bIns="0">
+          <a:bodyPr wrap="square" lIns="0" tIns="0" rIns="0" bIns="0">
             <a:spAutoFit/>
           </a:bodyPr>
           <a:lstStyle/>
@@ -7347,6 +7867,7 @@
           <a:lstStyle/>
           <a:p>
             <a:pPr algn="ctr"/>
+            <a:endParaRPr/>
           </a:p>
         </p:txBody>
       </p:sp>
@@ -7367,7 +7888,7 @@
           <a:noFill/>
         </p:spPr>
         <p:txBody>
-          <a:bodyPr wrap="square" lIns="0" rIns="0" tIns="0" bIns="0">
+          <a:bodyPr wrap="square" lIns="0" tIns="0" rIns="0" bIns="0">
             <a:spAutoFit/>
           </a:bodyPr>
           <a:lstStyle/>
@@ -7402,140 +7923,593 @@
           <a:noFill/>
         </p:spPr>
         <p:txBody>
-          <a:bodyPr wrap="square" lIns="0" rIns="0" tIns="0" bIns="0">
+          <a:bodyPr wrap="square" lIns="0" tIns="0" rIns="0" bIns="0">
             <a:spAutoFit/>
           </a:bodyPr>
           <a:lstStyle/>
           <a:p>
             <a:pPr algn="l"/>
             <a:r>
+              <a:rPr sz="1700" b="0" dirty="0">
+                <a:solidFill>
+                  <a:srgbClr val="1A1A1A"/>
+                </a:solidFill>
+                <a:latin typeface="Calibri"/>
+              </a:rPr>
+              <a:t>•  </a:t>
+            </a:r>
+            <a:r>
+              <a:rPr sz="1700" b="0" dirty="0" err="1">
+                <a:solidFill>
+                  <a:srgbClr val="1A1A1A"/>
+                </a:solidFill>
+                <a:latin typeface="Calibri"/>
+              </a:rPr>
+              <a:t>Изучены</a:t>
+            </a:r>
+            <a:r>
+              <a:rPr sz="1700" b="0" dirty="0">
+                <a:solidFill>
+                  <a:srgbClr val="1A1A1A"/>
+                </a:solidFill>
+                <a:latin typeface="Calibri"/>
+              </a:rPr>
+              <a:t> </a:t>
+            </a:r>
+            <a:r>
+              <a:rPr sz="1700" b="0" dirty="0" err="1">
+                <a:solidFill>
+                  <a:srgbClr val="1A1A1A"/>
+                </a:solidFill>
+                <a:latin typeface="Calibri"/>
+              </a:rPr>
+              <a:t>национальные</a:t>
+            </a:r>
+            <a:r>
+              <a:rPr sz="1700" b="0" dirty="0">
+                <a:solidFill>
+                  <a:srgbClr val="1A1A1A"/>
+                </a:solidFill>
+                <a:latin typeface="Calibri"/>
+              </a:rPr>
+              <a:t> </a:t>
+            </a:r>
+            <a:r>
+              <a:rPr sz="1700" b="0" dirty="0" err="1">
+                <a:solidFill>
+                  <a:srgbClr val="1A1A1A"/>
+                </a:solidFill>
+                <a:latin typeface="Calibri"/>
+              </a:rPr>
+              <a:t>стандарты</a:t>
+            </a:r>
+            <a:r>
+              <a:rPr sz="1700" b="0" dirty="0">
+                <a:solidFill>
+                  <a:srgbClr val="1A1A1A"/>
+                </a:solidFill>
+                <a:latin typeface="Calibri"/>
+              </a:rPr>
+              <a:t> СТБ 34.101.31, 34.101.45, 34.101.47, 34.101.66.</a:t>
+            </a:r>
+          </a:p>
+          <a:p>
+            <a:pPr algn="l"/>
+            <a:endParaRPr sz="1700" b="0" dirty="0">
+              <a:solidFill>
+                <a:srgbClr val="1A1A1A"/>
+              </a:solidFill>
+              <a:latin typeface="Calibri"/>
+            </a:endParaRPr>
+          </a:p>
+          <a:p>
+            <a:pPr algn="l"/>
+            <a:r>
+              <a:rPr sz="1700" b="0" dirty="0">
+                <a:solidFill>
+                  <a:srgbClr val="1A1A1A"/>
+                </a:solidFill>
+                <a:latin typeface="Calibri"/>
+              </a:rPr>
+              <a:t>•  </a:t>
+            </a:r>
+            <a:r>
+              <a:rPr sz="1700" b="0" dirty="0" err="1">
+                <a:solidFill>
+                  <a:srgbClr val="1A1A1A"/>
+                </a:solidFill>
+                <a:latin typeface="Calibri"/>
+              </a:rPr>
+              <a:t>Спроектирована</a:t>
+            </a:r>
+            <a:r>
+              <a:rPr sz="1700" b="0" dirty="0">
+                <a:solidFill>
+                  <a:srgbClr val="1A1A1A"/>
+                </a:solidFill>
+                <a:latin typeface="Calibri"/>
+              </a:rPr>
+              <a:t> </a:t>
+            </a:r>
+            <a:r>
+              <a:rPr sz="1700" b="0" dirty="0" err="1">
+                <a:solidFill>
+                  <a:srgbClr val="1A1A1A"/>
+                </a:solidFill>
+                <a:latin typeface="Calibri"/>
+              </a:rPr>
+              <a:t>архитектура</a:t>
+            </a:r>
+            <a:r>
+              <a:rPr sz="1700" b="0" dirty="0">
+                <a:solidFill>
+                  <a:srgbClr val="1A1A1A"/>
+                </a:solidFill>
+                <a:latin typeface="Calibri"/>
+              </a:rPr>
+              <a:t> </a:t>
+            </a:r>
+            <a:r>
+              <a:rPr sz="1700" b="0" dirty="0" err="1">
+                <a:solidFill>
+                  <a:srgbClr val="1A1A1A"/>
+                </a:solidFill>
+                <a:latin typeface="Calibri"/>
+              </a:rPr>
+              <a:t>комплекса</a:t>
+            </a:r>
+            <a:r>
+              <a:rPr sz="1700" b="0" dirty="0">
+                <a:solidFill>
+                  <a:srgbClr val="1A1A1A"/>
+                </a:solidFill>
+                <a:latin typeface="Calibri"/>
+              </a:rPr>
+              <a:t> «ПК + STM32» с USB CDC-</a:t>
+            </a:r>
+            <a:r>
+              <a:rPr sz="1700" b="0" dirty="0" err="1">
+                <a:solidFill>
+                  <a:srgbClr val="1A1A1A"/>
+                </a:solidFill>
+                <a:latin typeface="Calibri"/>
+              </a:rPr>
+              <a:t>обменом</a:t>
+            </a:r>
+            <a:r>
+              <a:rPr sz="1700" b="0" dirty="0">
+                <a:solidFill>
+                  <a:srgbClr val="1A1A1A"/>
+                </a:solidFill>
+                <a:latin typeface="Calibri"/>
+              </a:rPr>
+              <a:t>.</a:t>
+            </a:r>
+          </a:p>
+          <a:p>
+            <a:pPr algn="l"/>
+            <a:endParaRPr sz="1700" b="0" dirty="0">
+              <a:solidFill>
+                <a:srgbClr val="1A1A1A"/>
+              </a:solidFill>
+              <a:latin typeface="Calibri"/>
+            </a:endParaRPr>
+          </a:p>
+          <a:p>
+            <a:pPr algn="l"/>
+            <a:r>
+              <a:rPr sz="1700" b="0" dirty="0">
+                <a:solidFill>
+                  <a:srgbClr val="1A1A1A"/>
+                </a:solidFill>
+                <a:latin typeface="Calibri"/>
+              </a:rPr>
+              <a:t>•  </a:t>
+            </a:r>
+            <a:r>
+              <a:rPr sz="1700" b="0" dirty="0" err="1">
+                <a:solidFill>
+                  <a:srgbClr val="1A1A1A"/>
+                </a:solidFill>
+                <a:latin typeface="Calibri"/>
+              </a:rPr>
+              <a:t>Выполнен</a:t>
+            </a:r>
+            <a:r>
+              <a:rPr sz="1700" b="0" dirty="0">
+                <a:solidFill>
+                  <a:srgbClr val="1A1A1A"/>
+                </a:solidFill>
+                <a:latin typeface="Calibri"/>
+              </a:rPr>
+              <a:t> </a:t>
+            </a:r>
+            <a:r>
+              <a:rPr sz="1700" b="0" dirty="0" err="1">
+                <a:solidFill>
+                  <a:srgbClr val="1A1A1A"/>
+                </a:solidFill>
+                <a:latin typeface="Calibri"/>
+              </a:rPr>
+              <a:t>обзор</a:t>
+            </a:r>
+            <a:r>
+              <a:rPr sz="1700" b="0" dirty="0">
+                <a:solidFill>
+                  <a:srgbClr val="1A1A1A"/>
+                </a:solidFill>
+                <a:latin typeface="Calibri"/>
+              </a:rPr>
+              <a:t> </a:t>
+            </a:r>
+            <a:r>
+              <a:rPr sz="1700" b="0" dirty="0" err="1">
+                <a:solidFill>
+                  <a:srgbClr val="1A1A1A"/>
+                </a:solidFill>
+                <a:latin typeface="Calibri"/>
+              </a:rPr>
+              <a:t>аппаратно-программных</a:t>
+            </a:r>
+            <a:r>
+              <a:rPr sz="1700" b="0" dirty="0">
+                <a:solidFill>
+                  <a:srgbClr val="1A1A1A"/>
+                </a:solidFill>
+                <a:latin typeface="Calibri"/>
+              </a:rPr>
+              <a:t> </a:t>
+            </a:r>
+            <a:r>
+              <a:rPr sz="1700" b="0" dirty="0" err="1">
+                <a:solidFill>
+                  <a:srgbClr val="1A1A1A"/>
+                </a:solidFill>
+                <a:latin typeface="Calibri"/>
+              </a:rPr>
+              <a:t>средств</a:t>
+            </a:r>
+            <a:r>
+              <a:rPr sz="1700" b="0" dirty="0">
+                <a:solidFill>
+                  <a:srgbClr val="1A1A1A"/>
+                </a:solidFill>
+                <a:latin typeface="Calibri"/>
+              </a:rPr>
+              <a:t> </a:t>
+            </a:r>
+            <a:r>
+              <a:rPr sz="1700" b="0" dirty="0" err="1">
+                <a:solidFill>
+                  <a:srgbClr val="1A1A1A"/>
+                </a:solidFill>
+                <a:latin typeface="Calibri"/>
+              </a:rPr>
+              <a:t>защиты</a:t>
+            </a:r>
+            <a:r>
+              <a:rPr sz="1700" b="0" dirty="0">
+                <a:solidFill>
+                  <a:srgbClr val="1A1A1A"/>
+                </a:solidFill>
+                <a:latin typeface="Calibri"/>
+              </a:rPr>
+              <a:t> </a:t>
+            </a:r>
+            <a:r>
+              <a:rPr sz="1700" b="0" dirty="0" err="1">
+                <a:solidFill>
+                  <a:srgbClr val="1A1A1A"/>
+                </a:solidFill>
+                <a:latin typeface="Calibri"/>
+              </a:rPr>
+              <a:t>по</a:t>
+            </a:r>
+            <a:r>
+              <a:rPr sz="1700" b="0" dirty="0">
+                <a:solidFill>
+                  <a:srgbClr val="1A1A1A"/>
+                </a:solidFill>
+                <a:latin typeface="Calibri"/>
+              </a:rPr>
+              <a:t> СТБ в </a:t>
+            </a:r>
+            <a:r>
+              <a:rPr sz="1700" b="0" dirty="0" err="1">
+                <a:solidFill>
+                  <a:srgbClr val="1A1A1A"/>
+                </a:solidFill>
+                <a:latin typeface="Calibri"/>
+              </a:rPr>
+              <a:t>Беларуси</a:t>
+            </a:r>
+            <a:r>
+              <a:rPr sz="1700" b="0" dirty="0">
+                <a:solidFill>
+                  <a:srgbClr val="1A1A1A"/>
+                </a:solidFill>
+                <a:latin typeface="Calibri"/>
+              </a:rPr>
+              <a:t>.</a:t>
+            </a:r>
+          </a:p>
+          <a:p>
+            <a:pPr algn="l"/>
+            <a:endParaRPr sz="1700" b="0" dirty="0">
+              <a:solidFill>
+                <a:srgbClr val="1A1A1A"/>
+              </a:solidFill>
+              <a:latin typeface="Calibri"/>
+            </a:endParaRPr>
+          </a:p>
+          <a:p>
+            <a:pPr algn="l"/>
+            <a:r>
+              <a:rPr sz="1700" b="0" dirty="0">
+                <a:solidFill>
+                  <a:srgbClr val="1A1A1A"/>
+                </a:solidFill>
+                <a:latin typeface="Calibri"/>
+              </a:rPr>
+              <a:t>•  </a:t>
+            </a:r>
+            <a:r>
+              <a:rPr sz="1700" b="0" dirty="0" err="1">
+                <a:solidFill>
+                  <a:srgbClr val="1A1A1A"/>
+                </a:solidFill>
+                <a:latin typeface="Calibri"/>
+              </a:rPr>
+              <a:t>Реализована</a:t>
+            </a:r>
+            <a:r>
+              <a:rPr sz="1700" b="0" dirty="0">
+                <a:solidFill>
+                  <a:srgbClr val="1A1A1A"/>
+                </a:solidFill>
+                <a:latin typeface="Calibri"/>
+              </a:rPr>
+              <a:t> </a:t>
+            </a:r>
+            <a:r>
+              <a:rPr sz="1700" b="0" dirty="0" err="1">
+                <a:solidFill>
+                  <a:srgbClr val="1A1A1A"/>
+                </a:solidFill>
+                <a:latin typeface="Calibri"/>
+              </a:rPr>
+              <a:t>прошивка</a:t>
+            </a:r>
+            <a:r>
+              <a:rPr sz="1700" b="0" dirty="0">
+                <a:solidFill>
+                  <a:srgbClr val="1A1A1A"/>
+                </a:solidFill>
+                <a:latin typeface="Calibri"/>
+              </a:rPr>
+              <a:t> STM32F103C8T6 </a:t>
+            </a:r>
+            <a:r>
+              <a:rPr sz="1700" b="0" dirty="0" err="1">
+                <a:solidFill>
+                  <a:srgbClr val="1A1A1A"/>
+                </a:solidFill>
+                <a:latin typeface="Calibri"/>
+              </a:rPr>
+              <a:t>на</a:t>
+            </a:r>
+            <a:r>
+              <a:rPr sz="1700" b="0" dirty="0">
+                <a:solidFill>
+                  <a:srgbClr val="1A1A1A"/>
+                </a:solidFill>
+                <a:latin typeface="Calibri"/>
+              </a:rPr>
+              <a:t> bee2 (~83 КБ Flash, 18,5 КБ ОЗУ).</a:t>
+            </a:r>
+          </a:p>
+          <a:p>
+            <a:pPr algn="l"/>
+            <a:endParaRPr sz="1700" b="0" dirty="0">
+              <a:solidFill>
+                <a:srgbClr val="1A1A1A"/>
+              </a:solidFill>
+              <a:latin typeface="Calibri"/>
+            </a:endParaRPr>
+          </a:p>
+          <a:p>
+            <a:pPr algn="l"/>
+            <a:r>
+              <a:rPr sz="1700" b="0" dirty="0">
+                <a:solidFill>
+                  <a:srgbClr val="1A1A1A"/>
+                </a:solidFill>
+                <a:latin typeface="Calibri"/>
+              </a:rPr>
+              <a:t>•  </a:t>
+            </a:r>
+            <a:r>
+              <a:rPr sz="1700" b="0" dirty="0" err="1">
+                <a:solidFill>
+                  <a:srgbClr val="1A1A1A"/>
+                </a:solidFill>
+                <a:latin typeface="Calibri"/>
+              </a:rPr>
+              <a:t>Создано</a:t>
+            </a:r>
+            <a:r>
+              <a:rPr sz="1700" b="0" dirty="0">
+                <a:solidFill>
+                  <a:srgbClr val="1A1A1A"/>
+                </a:solidFill>
+                <a:latin typeface="Calibri"/>
+              </a:rPr>
+              <a:t> </a:t>
+            </a:r>
+            <a:r>
+              <a:rPr sz="1700" b="0" dirty="0" err="1">
+                <a:solidFill>
+                  <a:srgbClr val="1A1A1A"/>
+                </a:solidFill>
+                <a:latin typeface="Calibri"/>
+              </a:rPr>
+              <a:t>хост-приложение</a:t>
+            </a:r>
+            <a:r>
+              <a:rPr sz="1700" b="0" dirty="0">
+                <a:solidFill>
+                  <a:srgbClr val="1A1A1A"/>
+                </a:solidFill>
+                <a:latin typeface="Calibri"/>
+              </a:rPr>
+              <a:t> </a:t>
+            </a:r>
+            <a:r>
+              <a:rPr sz="1700" b="0" dirty="0" err="1">
+                <a:solidFill>
+                  <a:srgbClr val="1A1A1A"/>
+                </a:solidFill>
+                <a:latin typeface="Calibri"/>
+              </a:rPr>
+              <a:t>Tkinter</a:t>
+            </a:r>
+            <a:r>
+              <a:rPr sz="1700" b="0" dirty="0">
+                <a:solidFill>
+                  <a:srgbClr val="1A1A1A"/>
+                </a:solidFill>
+                <a:latin typeface="Calibri"/>
+              </a:rPr>
+              <a:t> с </a:t>
+            </a:r>
+            <a:r>
+              <a:rPr sz="1700" b="0" dirty="0" err="1">
+                <a:solidFill>
+                  <a:srgbClr val="1A1A1A"/>
+                </a:solidFill>
+                <a:latin typeface="Calibri"/>
+              </a:rPr>
+              <a:t>тремя</a:t>
+            </a:r>
+            <a:r>
+              <a:rPr sz="1700" b="0" dirty="0">
+                <a:solidFill>
+                  <a:srgbClr val="1A1A1A"/>
+                </a:solidFill>
+                <a:latin typeface="Calibri"/>
+              </a:rPr>
+              <a:t> </a:t>
+            </a:r>
+            <a:r>
+              <a:rPr sz="1700" b="0" dirty="0" err="1">
+                <a:solidFill>
+                  <a:srgbClr val="1A1A1A"/>
+                </a:solidFill>
+                <a:latin typeface="Calibri"/>
+              </a:rPr>
+              <a:t>рабочими</a:t>
+            </a:r>
+            <a:r>
+              <a:rPr sz="1700" b="0" dirty="0">
+                <a:solidFill>
+                  <a:srgbClr val="1A1A1A"/>
+                </a:solidFill>
+                <a:latin typeface="Calibri"/>
+              </a:rPr>
+              <a:t> </a:t>
+            </a:r>
+            <a:r>
+              <a:rPr sz="1700" b="0" dirty="0" err="1">
+                <a:solidFill>
+                  <a:srgbClr val="1A1A1A"/>
+                </a:solidFill>
+                <a:latin typeface="Calibri"/>
+              </a:rPr>
+              <a:t>вкладками</a:t>
+            </a:r>
+            <a:r>
               <a:rPr sz="1700" b="0">
                 <a:solidFill>
                   <a:srgbClr val="1A1A1A"/>
                 </a:solidFill>
                 <a:latin typeface="Calibri"/>
               </a:rPr>
-              <a:t>•  Изучены национальные стандарты СТБ 34.101.31, 34.101.45, 34.101.47, 34.101.66.</a:t>
-            </a:r>
-          </a:p>
-          <a:p>
-            <a:pPr algn="l"/>
-            <a:r>
-              <a:rPr sz="1700" b="0">
-                <a:solidFill>
-                  <a:srgbClr val="1A1A1A"/>
-                </a:solidFill>
-                <a:latin typeface="Calibri"/>
-              </a:rPr>
-              <a:t/>
-            </a:r>
-          </a:p>
-          <a:p>
-            <a:pPr algn="l"/>
-            <a:r>
-              <a:rPr sz="1700" b="0">
-                <a:solidFill>
-                  <a:srgbClr val="1A1A1A"/>
-                </a:solidFill>
-                <a:latin typeface="Calibri"/>
-              </a:rPr>
-              <a:t>•  Спроектирована архитектура комплекса «ПК + STM32» с USB CDC-обменом.</a:t>
-            </a:r>
-          </a:p>
-          <a:p>
-            <a:pPr algn="l"/>
-            <a:r>
-              <a:rPr sz="1700" b="0">
-                <a:solidFill>
-                  <a:srgbClr val="1A1A1A"/>
-                </a:solidFill>
-                <a:latin typeface="Calibri"/>
-              </a:rPr>
-              <a:t/>
-            </a:r>
-          </a:p>
-          <a:p>
-            <a:pPr algn="l"/>
-            <a:r>
-              <a:rPr sz="1700" b="0">
-                <a:solidFill>
-                  <a:srgbClr val="1A1A1A"/>
-                </a:solidFill>
-                <a:latin typeface="Calibri"/>
-              </a:rPr>
-              <a:t>•  Выполнен обзор аппаратно-программных средств защиты по СТБ в Беларуси.</a:t>
-            </a:r>
-          </a:p>
-          <a:p>
-            <a:pPr algn="l"/>
-            <a:r>
-              <a:rPr sz="1700" b="0">
-                <a:solidFill>
-                  <a:srgbClr val="1A1A1A"/>
-                </a:solidFill>
-                <a:latin typeface="Calibri"/>
-              </a:rPr>
-              <a:t/>
-            </a:r>
-          </a:p>
-          <a:p>
-            <a:pPr algn="l"/>
-            <a:r>
-              <a:rPr sz="1700" b="0">
-                <a:solidFill>
-                  <a:srgbClr val="1A1A1A"/>
-                </a:solidFill>
-                <a:latin typeface="Calibri"/>
-              </a:rPr>
-              <a:t>•  Реализована прошивка STM32F103C8T6 на bee2 (~83 КБ Flash, 18,5 КБ ОЗУ).</a:t>
-            </a:r>
-          </a:p>
-          <a:p>
-            <a:pPr algn="l"/>
-            <a:r>
-              <a:rPr sz="1700" b="0">
-                <a:solidFill>
-                  <a:srgbClr val="1A1A1A"/>
-                </a:solidFill>
-                <a:latin typeface="Calibri"/>
-              </a:rPr>
-              <a:t/>
-            </a:r>
-          </a:p>
-          <a:p>
-            <a:pPr algn="l"/>
-            <a:r>
-              <a:rPr sz="1700" b="0">
-                <a:solidFill>
-                  <a:srgbClr val="1A1A1A"/>
-                </a:solidFill>
-                <a:latin typeface="Calibri"/>
-              </a:rPr>
-              <a:t>•  Создано хост-приложение Tkinter с тремя рабочими вкладками.</a:t>
-            </a:r>
-          </a:p>
-          <a:p>
-            <a:pPr algn="l"/>
-            <a:r>
-              <a:rPr sz="1700" b="0">
-                <a:solidFill>
-                  <a:srgbClr val="1A1A1A"/>
-                </a:solidFill>
-                <a:latin typeface="Calibri"/>
-              </a:rPr>
-              <a:t/>
-            </a:r>
-          </a:p>
-          <a:p>
-            <a:pPr algn="l"/>
-            <a:r>
-              <a:rPr sz="1700" b="0">
-                <a:solidFill>
-                  <a:srgbClr val="1A1A1A"/>
-                </a:solidFill>
-                <a:latin typeface="Calibri"/>
-              </a:rPr>
-              <a:t>•  Натурно подтверждены: belt-hash, bign-sign / verify, belt-CBC + PKCS#7.</a:t>
+              <a:t>.</a:t>
+            </a:r>
+          </a:p>
+          <a:p>
+            <a:pPr algn="l"/>
+            <a:endParaRPr sz="1700" b="0">
+              <a:solidFill>
+                <a:srgbClr val="1A1A1A"/>
+              </a:solidFill>
+              <a:latin typeface="Calibri"/>
+            </a:endParaRPr>
+          </a:p>
+          <a:p>
+            <a:pPr algn="l"/>
+            <a:r>
+              <a:rPr sz="1700" b="0" dirty="0">
+                <a:solidFill>
+                  <a:srgbClr val="1A1A1A"/>
+                </a:solidFill>
+                <a:latin typeface="Calibri"/>
+              </a:rPr>
+              <a:t>•  </a:t>
+            </a:r>
+            <a:r>
+              <a:rPr sz="1700" b="0" dirty="0" err="1">
+                <a:solidFill>
+                  <a:srgbClr val="1A1A1A"/>
+                </a:solidFill>
+                <a:latin typeface="Calibri"/>
+              </a:rPr>
+              <a:t>Натурно</a:t>
+            </a:r>
+            <a:r>
+              <a:rPr sz="1700" b="0" dirty="0">
+                <a:solidFill>
+                  <a:srgbClr val="1A1A1A"/>
+                </a:solidFill>
+                <a:latin typeface="Calibri"/>
+              </a:rPr>
+              <a:t> </a:t>
+            </a:r>
+            <a:r>
+              <a:rPr sz="1700" b="0" dirty="0" err="1">
+                <a:solidFill>
+                  <a:srgbClr val="1A1A1A"/>
+                </a:solidFill>
+                <a:latin typeface="Calibri"/>
+              </a:rPr>
+              <a:t>подтверждены</a:t>
+            </a:r>
+            <a:r>
+              <a:rPr sz="1700" b="0" dirty="0">
+                <a:solidFill>
+                  <a:srgbClr val="1A1A1A"/>
+                </a:solidFill>
+                <a:latin typeface="Calibri"/>
+              </a:rPr>
+              <a:t>: belt-hash, </a:t>
+            </a:r>
+            <a:r>
+              <a:rPr sz="1700" b="0" dirty="0" err="1">
+                <a:solidFill>
+                  <a:srgbClr val="1A1A1A"/>
+                </a:solidFill>
+                <a:latin typeface="Calibri"/>
+              </a:rPr>
+              <a:t>bign</a:t>
+            </a:r>
+            <a:r>
+              <a:rPr sz="1700" b="0" dirty="0">
+                <a:solidFill>
+                  <a:srgbClr val="1A1A1A"/>
+                </a:solidFill>
+                <a:latin typeface="Calibri"/>
+              </a:rPr>
+              <a:t>-sign / verify, belt-CBC + PKCS#7.</a:t>
             </a:r>
           </a:p>
         </p:txBody>
@@ -7557,7 +8531,7 @@
           <a:noFill/>
         </p:spPr>
         <p:txBody>
-          <a:bodyPr wrap="square" lIns="0" rIns="0" tIns="0" bIns="0">
+          <a:bodyPr wrap="square" lIns="0" tIns="0" rIns="0" bIns="0">
             <a:spAutoFit/>
           </a:bodyPr>
           <a:lstStyle/>
@@ -7584,7 +8558,7 @@
         <p:spPr>
           <a:xfrm>
             <a:off x="540000" y="5364000"/>
-            <a:ext cx="10800000" cy="900000"/>
+            <a:ext cx="10800000" cy="923330"/>
           </a:xfrm>
           <a:prstGeom prst="rect">
             <a:avLst/>
@@ -7592,44 +8566,359 @@
           <a:noFill/>
         </p:spPr>
         <p:txBody>
-          <a:bodyPr wrap="square" lIns="0" rIns="0" tIns="0" bIns="0">
+          <a:bodyPr wrap="square" lIns="0" tIns="0" rIns="0" bIns="0">
             <a:spAutoFit/>
           </a:bodyPr>
           <a:lstStyle/>
           <a:p>
             <a:pPr algn="l"/>
             <a:r>
-              <a:rPr sz="1500" b="0">
-                <a:solidFill>
-                  <a:srgbClr val="1A1A1A"/>
-                </a:solidFill>
-                <a:latin typeface="Calibri"/>
-              </a:rPr>
-              <a:t>•  реализация PKCS#11-провайдера для интеграции в стандартные приложения;</a:t>
-            </a:r>
-          </a:p>
-          <a:p>
-            <a:pPr algn="l"/>
-            <a:r>
-              <a:rPr sz="1500" b="0">
-                <a:solidFill>
-                  <a:srgbClr val="1A1A1A"/>
-                </a:solidFill>
-                <a:latin typeface="Calibri"/>
-              </a:rPr>
-              <a:t>•  использование bake (СТБ 34.101.66) для защищённой передачи сеансовых ключей;</a:t>
-            </a:r>
-          </a:p>
-          <a:p>
-            <a:pPr algn="l"/>
-            <a:r>
-              <a:rPr sz="1500" b="0">
-                <a:solidFill>
-                  <a:srgbClr val="1A1A1A"/>
-                </a:solidFill>
-                <a:latin typeface="Calibri"/>
-              </a:rPr>
-              <a:t>•  переход на STM32 с аппаратным TRNG и большим объёмом ОЗУ.</a:t>
+              <a:rPr sz="1500" b="0" dirty="0">
+                <a:solidFill>
+                  <a:srgbClr val="1A1A1A"/>
+                </a:solidFill>
+                <a:latin typeface="Calibri"/>
+              </a:rPr>
+              <a:t>•  </a:t>
+            </a:r>
+            <a:r>
+              <a:rPr sz="1500" b="0" dirty="0" err="1">
+                <a:solidFill>
+                  <a:srgbClr val="1A1A1A"/>
+                </a:solidFill>
+                <a:latin typeface="Calibri"/>
+              </a:rPr>
+              <a:t>реализация</a:t>
+            </a:r>
+            <a:r>
+              <a:rPr sz="1500" b="0" dirty="0">
+                <a:solidFill>
+                  <a:srgbClr val="1A1A1A"/>
+                </a:solidFill>
+                <a:latin typeface="Calibri"/>
+              </a:rPr>
+              <a:t> PKCS#11-провайдера </a:t>
+            </a:r>
+            <a:r>
+              <a:rPr sz="1500" b="0" dirty="0" err="1">
+                <a:solidFill>
+                  <a:srgbClr val="1A1A1A"/>
+                </a:solidFill>
+                <a:latin typeface="Calibri"/>
+              </a:rPr>
+              <a:t>для</a:t>
+            </a:r>
+            <a:r>
+              <a:rPr sz="1500" b="0" dirty="0">
+                <a:solidFill>
+                  <a:srgbClr val="1A1A1A"/>
+                </a:solidFill>
+                <a:latin typeface="Calibri"/>
+              </a:rPr>
+              <a:t> </a:t>
+            </a:r>
+            <a:r>
+              <a:rPr sz="1500" b="0" dirty="0" err="1">
+                <a:solidFill>
+                  <a:srgbClr val="1A1A1A"/>
+                </a:solidFill>
+                <a:latin typeface="Calibri"/>
+              </a:rPr>
+              <a:t>интеграции</a:t>
+            </a:r>
+            <a:r>
+              <a:rPr sz="1500" b="0" dirty="0">
+                <a:solidFill>
+                  <a:srgbClr val="1A1A1A"/>
+                </a:solidFill>
+                <a:latin typeface="Calibri"/>
+              </a:rPr>
+              <a:t> в </a:t>
+            </a:r>
+            <a:r>
+              <a:rPr sz="1500" b="0" dirty="0" err="1">
+                <a:solidFill>
+                  <a:srgbClr val="1A1A1A"/>
+                </a:solidFill>
+                <a:latin typeface="Calibri"/>
+              </a:rPr>
+              <a:t>стандартные</a:t>
+            </a:r>
+            <a:r>
+              <a:rPr sz="1500" b="0" dirty="0">
+                <a:solidFill>
+                  <a:srgbClr val="1A1A1A"/>
+                </a:solidFill>
+                <a:latin typeface="Calibri"/>
+              </a:rPr>
+              <a:t> </a:t>
+            </a:r>
+            <a:r>
+              <a:rPr sz="1500" b="0" dirty="0" err="1">
+                <a:solidFill>
+                  <a:srgbClr val="1A1A1A"/>
+                </a:solidFill>
+                <a:latin typeface="Calibri"/>
+              </a:rPr>
+              <a:t>приложения</a:t>
+            </a:r>
+            <a:r>
+              <a:rPr sz="1500" b="0" dirty="0">
+                <a:solidFill>
+                  <a:srgbClr val="1A1A1A"/>
+                </a:solidFill>
+                <a:latin typeface="Calibri"/>
+              </a:rPr>
+              <a:t>;</a:t>
+            </a:r>
+          </a:p>
+          <a:p>
+            <a:pPr algn="l"/>
+            <a:r>
+              <a:rPr sz="1500" b="0" dirty="0">
+                <a:solidFill>
+                  <a:srgbClr val="1A1A1A"/>
+                </a:solidFill>
+                <a:latin typeface="Calibri"/>
+              </a:rPr>
+              <a:t>•  </a:t>
+            </a:r>
+            <a:r>
+              <a:rPr sz="1500" b="0" dirty="0" err="1">
+                <a:solidFill>
+                  <a:srgbClr val="1A1A1A"/>
+                </a:solidFill>
+                <a:latin typeface="Calibri"/>
+              </a:rPr>
+              <a:t>использование</a:t>
+            </a:r>
+            <a:r>
+              <a:rPr sz="1500" b="0" dirty="0">
+                <a:solidFill>
+                  <a:srgbClr val="1A1A1A"/>
+                </a:solidFill>
+                <a:latin typeface="Calibri"/>
+              </a:rPr>
+              <a:t> bake (СТБ 34.101.66) </a:t>
+            </a:r>
+            <a:r>
+              <a:rPr sz="1500" b="0" dirty="0" err="1">
+                <a:solidFill>
+                  <a:srgbClr val="1A1A1A"/>
+                </a:solidFill>
+                <a:latin typeface="Calibri"/>
+              </a:rPr>
+              <a:t>для</a:t>
+            </a:r>
+            <a:r>
+              <a:rPr sz="1500" b="0" dirty="0">
+                <a:solidFill>
+                  <a:srgbClr val="1A1A1A"/>
+                </a:solidFill>
+                <a:latin typeface="Calibri"/>
+              </a:rPr>
+              <a:t> </a:t>
+            </a:r>
+            <a:r>
+              <a:rPr sz="1500" b="0" dirty="0" err="1">
+                <a:solidFill>
+                  <a:srgbClr val="1A1A1A"/>
+                </a:solidFill>
+                <a:latin typeface="Calibri"/>
+              </a:rPr>
+              <a:t>защищённой</a:t>
+            </a:r>
+            <a:r>
+              <a:rPr sz="1500" b="0" dirty="0">
+                <a:solidFill>
+                  <a:srgbClr val="1A1A1A"/>
+                </a:solidFill>
+                <a:latin typeface="Calibri"/>
+              </a:rPr>
+              <a:t> </a:t>
+            </a:r>
+            <a:r>
+              <a:rPr sz="1500" b="0" dirty="0" err="1">
+                <a:solidFill>
+                  <a:srgbClr val="1A1A1A"/>
+                </a:solidFill>
+                <a:latin typeface="Calibri"/>
+              </a:rPr>
+              <a:t>передачи</a:t>
+            </a:r>
+            <a:r>
+              <a:rPr sz="1500" b="0" dirty="0">
+                <a:solidFill>
+                  <a:srgbClr val="1A1A1A"/>
+                </a:solidFill>
+                <a:latin typeface="Calibri"/>
+              </a:rPr>
+              <a:t> </a:t>
+            </a:r>
+            <a:r>
+              <a:rPr sz="1500" b="0" dirty="0" err="1">
+                <a:solidFill>
+                  <a:srgbClr val="1A1A1A"/>
+                </a:solidFill>
+                <a:latin typeface="Calibri"/>
+              </a:rPr>
+              <a:t>сеансовых</a:t>
+            </a:r>
+            <a:r>
+              <a:rPr sz="1500" b="0" dirty="0">
+                <a:solidFill>
+                  <a:srgbClr val="1A1A1A"/>
+                </a:solidFill>
+                <a:latin typeface="Calibri"/>
+              </a:rPr>
+              <a:t> </a:t>
+            </a:r>
+            <a:r>
+              <a:rPr sz="1500" b="0" dirty="0" err="1">
+                <a:solidFill>
+                  <a:srgbClr val="1A1A1A"/>
+                </a:solidFill>
+                <a:latin typeface="Calibri"/>
+              </a:rPr>
+              <a:t>ключей</a:t>
+            </a:r>
+            <a:r>
+              <a:rPr sz="1500" b="0" dirty="0">
+                <a:solidFill>
+                  <a:srgbClr val="1A1A1A"/>
+                </a:solidFill>
+                <a:latin typeface="Calibri"/>
+              </a:rPr>
+              <a:t>;</a:t>
+            </a:r>
+          </a:p>
+          <a:p>
+            <a:pPr algn="l"/>
+            <a:r>
+              <a:rPr sz="1500" b="0" dirty="0">
+                <a:solidFill>
+                  <a:srgbClr val="1A1A1A"/>
+                </a:solidFill>
+                <a:latin typeface="Calibri"/>
+              </a:rPr>
+              <a:t>•  </a:t>
+            </a:r>
+            <a:r>
+              <a:rPr sz="1500" b="0" dirty="0" err="1">
+                <a:solidFill>
+                  <a:srgbClr val="1A1A1A"/>
+                </a:solidFill>
+                <a:latin typeface="Calibri"/>
+              </a:rPr>
+              <a:t>переход</a:t>
+            </a:r>
+            <a:r>
+              <a:rPr sz="1500" b="0" dirty="0">
+                <a:solidFill>
+                  <a:srgbClr val="1A1A1A"/>
+                </a:solidFill>
+                <a:latin typeface="Calibri"/>
+              </a:rPr>
+              <a:t> </a:t>
+            </a:r>
+            <a:r>
+              <a:rPr sz="1500" b="0" dirty="0" err="1">
+                <a:solidFill>
+                  <a:srgbClr val="1A1A1A"/>
+                </a:solidFill>
+                <a:latin typeface="Calibri"/>
+              </a:rPr>
+              <a:t>на</a:t>
+            </a:r>
+            <a:r>
+              <a:rPr sz="1500" b="0" dirty="0">
+                <a:solidFill>
+                  <a:srgbClr val="1A1A1A"/>
+                </a:solidFill>
+                <a:latin typeface="Calibri"/>
+              </a:rPr>
+              <a:t> STM32 с </a:t>
+            </a:r>
+            <a:r>
+              <a:rPr sz="1500" b="0" dirty="0" err="1">
+                <a:solidFill>
+                  <a:srgbClr val="1A1A1A"/>
+                </a:solidFill>
+                <a:latin typeface="Calibri"/>
+              </a:rPr>
+              <a:t>аппаратным</a:t>
+            </a:r>
+            <a:r>
+              <a:rPr sz="1500" b="0" dirty="0">
+                <a:solidFill>
+                  <a:srgbClr val="1A1A1A"/>
+                </a:solidFill>
+                <a:latin typeface="Calibri"/>
+              </a:rPr>
+              <a:t> TRNG и </a:t>
+            </a:r>
+            <a:r>
+              <a:rPr sz="1500" b="0" dirty="0" err="1">
+                <a:solidFill>
+                  <a:srgbClr val="1A1A1A"/>
+                </a:solidFill>
+                <a:latin typeface="Calibri"/>
+              </a:rPr>
+              <a:t>большим</a:t>
+            </a:r>
+            <a:r>
+              <a:rPr sz="1500" b="0" dirty="0">
+                <a:solidFill>
+                  <a:srgbClr val="1A1A1A"/>
+                </a:solidFill>
+                <a:latin typeface="Calibri"/>
+              </a:rPr>
+              <a:t> </a:t>
+            </a:r>
+            <a:r>
+              <a:rPr sz="1500" b="0" dirty="0" err="1">
+                <a:solidFill>
+                  <a:srgbClr val="1A1A1A"/>
+                </a:solidFill>
+                <a:latin typeface="Calibri"/>
+              </a:rPr>
+              <a:t>объёмом</a:t>
+            </a:r>
+            <a:r>
+              <a:rPr sz="1500" b="0" dirty="0">
+                <a:solidFill>
+                  <a:srgbClr val="1A1A1A"/>
+                </a:solidFill>
+                <a:latin typeface="Calibri"/>
+              </a:rPr>
+              <a:t> ОЗУ.</a:t>
+            </a:r>
+            <a:endParaRPr lang="ru-RU" sz="1500" b="0" dirty="0">
+              <a:solidFill>
+                <a:srgbClr val="1A1A1A"/>
+              </a:solidFill>
+              <a:latin typeface="Calibri"/>
+            </a:endParaRPr>
+          </a:p>
+          <a:p>
+            <a:pPr algn="l"/>
+            <a:r>
+              <a:rPr lang="ru-BY" sz="1500" b="0" dirty="0">
+                <a:solidFill>
+                  <a:srgbClr val="1A1A1A"/>
+                </a:solidFill>
+                <a:latin typeface="Calibri"/>
+              </a:rPr>
+              <a:t>•</a:t>
+            </a:r>
+            <a:r>
+              <a:rPr lang="ru-RU" sz="1500" b="0" dirty="0">
+                <a:solidFill>
+                  <a:srgbClr val="1A1A1A"/>
+                </a:solidFill>
+                <a:latin typeface="Calibri"/>
+              </a:rPr>
+              <a:t> Разработка аппаратных и программных средств защиты от НСД для разработанного ПАК</a:t>
             </a:r>
           </a:p>
         </p:txBody>
@@ -7651,7 +8940,7 @@
           <a:noFill/>
         </p:spPr>
         <p:txBody>
-          <a:bodyPr wrap="square" lIns="0" rIns="0" tIns="0" bIns="0">
+          <a:bodyPr wrap="square" lIns="0" tIns="0" rIns="0" bIns="0">
             <a:spAutoFit/>
           </a:bodyPr>
           <a:lstStyle/>
@@ -7686,7 +8975,7 @@
           <a:noFill/>
         </p:spPr>
         <p:txBody>
-          <a:bodyPr wrap="square" lIns="0" rIns="0" tIns="0" bIns="0">
+          <a:bodyPr wrap="square" lIns="0" tIns="0" rIns="0" bIns="0">
             <a:spAutoFit/>
           </a:bodyPr>
           <a:lstStyle/>
@@ -7713,7 +9002,7 @@
 </file>
 
 <file path=ppt/slides/slide18.xml><?xml version="1.0" encoding="utf-8"?>
-<p:sld xmlns:a="http://schemas.openxmlformats.org/drawingml/2006/main" xmlns:p="http://schemas.openxmlformats.org/presentationml/2006/main" xmlns:r="http://schemas.openxmlformats.org/officeDocument/2006/relationships">
+<p:sld xmlns:a="http://schemas.openxmlformats.org/drawingml/2006/main" xmlns:r="http://schemas.openxmlformats.org/officeDocument/2006/relationships" xmlns:p="http://schemas.openxmlformats.org/presentationml/2006/main">
   <p:cSld>
     <p:spTree>
       <p:nvGrpSpPr>
@@ -7721,7 +9010,14 @@
         <p:cNvGrpSpPr/>
         <p:nvPr/>
       </p:nvGrpSpPr>
-      <p:grpSpPr/>
+      <p:grpSpPr>
+        <a:xfrm>
+          <a:off x="0" y="0"/>
+          <a:ext cx="0" cy="0"/>
+          <a:chOff x="0" y="0"/>
+          <a:chExt cx="0" cy="0"/>
+        </a:xfrm>
+      </p:grpSpPr>
       <p:sp>
         <p:nvSpPr>
           <p:cNvPr id="2" name="Rectangle 1"/>
@@ -7762,6 +9058,7 @@
           <a:lstStyle/>
           <a:p>
             <a:pPr algn="ctr"/>
+            <a:endParaRPr/>
           </a:p>
         </p:txBody>
       </p:sp>
@@ -7773,7 +9070,7 @@
         </p:nvSpPr>
         <p:spPr>
           <a:xfrm>
-            <a:off x="720000" y="2160000"/>
+            <a:off x="881925" y="2700000"/>
             <a:ext cx="10800000" cy="1080000"/>
           </a:xfrm>
           <a:prstGeom prst="rect">
@@ -7782,90 +9079,65 @@
           <a:noFill/>
         </p:spPr>
         <p:txBody>
-          <a:bodyPr wrap="square" lIns="0" rIns="0" tIns="0" bIns="0">
+          <a:bodyPr wrap="square" lIns="0" tIns="0" rIns="0" bIns="0">
             <a:spAutoFit/>
           </a:bodyPr>
           <a:lstStyle/>
           <a:p>
             <a:pPr algn="ctr"/>
             <a:r>
-              <a:rPr sz="4800" b="1">
+              <a:rPr sz="4800" b="1" dirty="0" err="1">
                 <a:solidFill>
                   <a:srgbClr val="F5F7FA"/>
                 </a:solidFill>
                 <a:latin typeface="Calibri"/>
               </a:rPr>
-              <a:t>Спасибо за внимание!</a:t>
-            </a:r>
-          </a:p>
-        </p:txBody>
-      </p:sp>
-      <p:sp>
-        <p:nvSpPr>
-          <p:cNvPr id="4" name="TextBox 3"/>
-          <p:cNvSpPr txBox="1"/>
-          <p:nvPr/>
-        </p:nvSpPr>
-        <p:spPr>
-          <a:xfrm>
-            <a:off x="720000" y="3600000"/>
-            <a:ext cx="10800000" cy="720000"/>
-          </a:xfrm>
-          <a:prstGeom prst="rect">
-            <a:avLst/>
-          </a:prstGeom>
-          <a:noFill/>
-        </p:spPr>
-        <p:txBody>
-          <a:bodyPr wrap="square" lIns="0" rIns="0" tIns="0" bIns="0">
-            <a:spAutoFit/>
-          </a:bodyPr>
-          <a:lstStyle/>
-          <a:p>
-            <a:pPr algn="ctr"/>
-            <a:r>
-              <a:rPr sz="2200" b="0">
+              <a:t>Спасибо</a:t>
+            </a:r>
+            <a:r>
+              <a:rPr sz="4800" b="1" dirty="0">
                 <a:solidFill>
                   <a:srgbClr val="F5F7FA"/>
                 </a:solidFill>
                 <a:latin typeface="Calibri"/>
               </a:rPr>
-              <a:t>Готов ответить на вопросы.</a:t>
-            </a:r>
-          </a:p>
-        </p:txBody>
-      </p:sp>
-      <p:sp>
-        <p:nvSpPr>
-          <p:cNvPr id="5" name="TextBox 4"/>
-          <p:cNvSpPr txBox="1"/>
-          <p:nvPr/>
-        </p:nvSpPr>
-        <p:spPr>
-          <a:xfrm>
-            <a:off x="720000" y="5400000"/>
-            <a:ext cx="10800000" cy="720000"/>
-          </a:xfrm>
-          <a:prstGeom prst="rect">
-            <a:avLst/>
-          </a:prstGeom>
-          <a:noFill/>
-        </p:spPr>
-        <p:txBody>
-          <a:bodyPr wrap="square" lIns="0" rIns="0" tIns="0" bIns="0">
-            <a:spAutoFit/>
-          </a:bodyPr>
-          <a:lstStyle/>
-          <a:p>
-            <a:pPr algn="ctr"/>
-            <a:r>
-              <a:rPr sz="1600" b="0">
+              <a:t> </a:t>
+            </a:r>
+            <a:r>
+              <a:rPr sz="4800" b="1" dirty="0" err="1">
                 <a:solidFill>
                   <a:srgbClr val="F5F7FA"/>
                 </a:solidFill>
                 <a:latin typeface="Calibri"/>
               </a:rPr>
-              <a:t>github.com/viccino2006/Cursovaya</a:t>
+              <a:t>за</a:t>
+            </a:r>
+            <a:r>
+              <a:rPr sz="4800" b="1" dirty="0">
+                <a:solidFill>
+                  <a:srgbClr val="F5F7FA"/>
+                </a:solidFill>
+                <a:latin typeface="Calibri"/>
+              </a:rPr>
+              <a:t> </a:t>
+            </a:r>
+            <a:r>
+              <a:rPr sz="4800" b="1" dirty="0" err="1">
+                <a:solidFill>
+                  <a:srgbClr val="F5F7FA"/>
+                </a:solidFill>
+                <a:latin typeface="Calibri"/>
+              </a:rPr>
+              <a:t>внимание</a:t>
+            </a:r>
+            <a:r>
+              <a:rPr sz="4800" b="1" dirty="0">
+                <a:solidFill>
+                  <a:srgbClr val="F5F7FA"/>
+                </a:solidFill>
+                <a:latin typeface="Calibri"/>
+              </a:rPr>
+              <a:t>!</a:t>
             </a:r>
           </a:p>
         </p:txBody>
@@ -7879,7 +9151,7 @@
 </file>
 
 <file path=ppt/slides/slide2.xml><?xml version="1.0" encoding="utf-8"?>
-<p:sld xmlns:a="http://schemas.openxmlformats.org/drawingml/2006/main" xmlns:p="http://schemas.openxmlformats.org/presentationml/2006/main" xmlns:r="http://schemas.openxmlformats.org/officeDocument/2006/relationships">
+<p:sld xmlns:a="http://schemas.openxmlformats.org/drawingml/2006/main" xmlns:r="http://schemas.openxmlformats.org/officeDocument/2006/relationships" xmlns:p="http://schemas.openxmlformats.org/presentationml/2006/main">
   <p:cSld>
     <p:spTree>
       <p:nvGrpSpPr>
@@ -7887,7 +9159,14 @@
         <p:cNvGrpSpPr/>
         <p:nvPr/>
       </p:nvGrpSpPr>
-      <p:grpSpPr/>
+      <p:grpSpPr>
+        <a:xfrm>
+          <a:off x="0" y="0"/>
+          <a:ext cx="0" cy="0"/>
+          <a:chOff x="0" y="0"/>
+          <a:chExt cx="0" cy="0"/>
+        </a:xfrm>
+      </p:grpSpPr>
       <p:sp>
         <p:nvSpPr>
           <p:cNvPr id="2" name="Rectangle 1"/>
@@ -7928,6 +9207,7 @@
           <a:lstStyle/>
           <a:p>
             <a:pPr algn="ctr"/>
+            <a:endParaRPr/>
           </a:p>
         </p:txBody>
       </p:sp>
@@ -7948,7 +9228,7 @@
           <a:noFill/>
         </p:spPr>
         <p:txBody>
-          <a:bodyPr wrap="square" lIns="0" rIns="0" tIns="0" bIns="0">
+          <a:bodyPr wrap="square" lIns="0" tIns="0" rIns="0" bIns="0">
             <a:spAutoFit/>
           </a:bodyPr>
           <a:lstStyle/>
@@ -7961,7 +9241,7 @@
                 </a:solidFill>
                 <a:latin typeface="Calibri"/>
               </a:rPr>
-              <a:t>Цель и задачи работы</a:t>
+              <a:t>Актуальность</a:t>
             </a:r>
           </a:p>
         </p:txBody>
@@ -8006,6 +9286,7 @@
           <a:lstStyle/>
           <a:p>
             <a:pPr algn="ctr"/>
+            <a:endParaRPr/>
           </a:p>
         </p:txBody>
       </p:sp>
@@ -8017,8 +9298,8 @@
         </p:nvSpPr>
         <p:spPr>
           <a:xfrm>
-            <a:off x="540000" y="1080000"/>
-            <a:ext cx="10800000" cy="540000"/>
+            <a:off x="540000" y="1152000"/>
+            <a:ext cx="10800000" cy="3600000"/>
           </a:xfrm>
           <a:prstGeom prst="rect">
             <a:avLst/>
@@ -8026,20 +9307,104 @@
           <a:noFill/>
         </p:spPr>
         <p:txBody>
-          <a:bodyPr wrap="square" lIns="0" rIns="0" tIns="0" bIns="0">
+          <a:bodyPr wrap="square" lIns="0" tIns="0" rIns="0" bIns="0">
             <a:spAutoFit/>
           </a:bodyPr>
           <a:lstStyle/>
           <a:p>
             <a:pPr algn="l"/>
             <a:r>
-              <a:rPr sz="2200" b="1">
-                <a:solidFill>
-                  <a:srgbClr val="1F3A68"/>
-                </a:solidFill>
-                <a:latin typeface="Calibri"/>
-              </a:rPr>
-              <a:t>Цель</a:t>
+              <a:rPr sz="2000" b="0">
+                <a:solidFill>
+                  <a:srgbClr val="1A1A1A"/>
+                </a:solidFill>
+                <a:latin typeface="Calibri"/>
+              </a:rPr>
+              <a:t>•  Государственные и финансовые системы РБ обязаны защищать данные по СТБ.</a:t>
+            </a:r>
+          </a:p>
+          <a:p>
+            <a:pPr algn="l"/>
+            <a:endParaRPr sz="2000" b="0">
+              <a:solidFill>
+                <a:srgbClr val="1A1A1A"/>
+              </a:solidFill>
+              <a:latin typeface="Calibri"/>
+            </a:endParaRPr>
+          </a:p>
+          <a:p>
+            <a:pPr algn="l"/>
+            <a:r>
+              <a:rPr sz="2000" b="0">
+                <a:solidFill>
+                  <a:srgbClr val="1A1A1A"/>
+                </a:solidFill>
+                <a:latin typeface="Calibri"/>
+              </a:rPr>
+              <a:t>•  Использование иностранных решений ограничено законодательством (Указ № 196).</a:t>
+            </a:r>
+          </a:p>
+          <a:p>
+            <a:pPr algn="l"/>
+            <a:endParaRPr sz="2000" b="0">
+              <a:solidFill>
+                <a:srgbClr val="1A1A1A"/>
+              </a:solidFill>
+              <a:latin typeface="Calibri"/>
+            </a:endParaRPr>
+          </a:p>
+          <a:p>
+            <a:pPr algn="l"/>
+            <a:r>
+              <a:rPr sz="2000" b="0">
+                <a:solidFill>
+                  <a:srgbClr val="1A1A1A"/>
+                </a:solidFill>
+                <a:latin typeface="Calibri"/>
+              </a:rPr>
+              <a:t>•  Программные хранилища ключей уязвимы при компрометации хост-системы.</a:t>
+            </a:r>
+          </a:p>
+          <a:p>
+            <a:pPr algn="l"/>
+            <a:endParaRPr sz="2000" b="0">
+              <a:solidFill>
+                <a:srgbClr val="1A1A1A"/>
+              </a:solidFill>
+              <a:latin typeface="Calibri"/>
+            </a:endParaRPr>
+          </a:p>
+          <a:p>
+            <a:pPr algn="l"/>
+            <a:r>
+              <a:rPr sz="2000" b="0">
+                <a:solidFill>
+                  <a:srgbClr val="1A1A1A"/>
+                </a:solidFill>
+                <a:latin typeface="Calibri"/>
+              </a:rPr>
+              <a:t>•  Сертифицированные токены (АвестКлюч, Rutoken) дороги и закрыты.</a:t>
+            </a:r>
+          </a:p>
+          <a:p>
+            <a:pPr algn="l"/>
+            <a:endParaRPr sz="2000" b="0">
+              <a:solidFill>
+                <a:srgbClr val="1A1A1A"/>
+              </a:solidFill>
+              <a:latin typeface="Calibri"/>
+            </a:endParaRPr>
+          </a:p>
+          <a:p>
+            <a:pPr algn="l"/>
+            <a:r>
+              <a:rPr sz="2000" b="0">
+                <a:solidFill>
+                  <a:srgbClr val="1A1A1A"/>
+                </a:solidFill>
+                <a:latin typeface="Calibri"/>
+              </a:rPr>
+              <a:t>•  Нет открытых учебных образцов на отладочных платах STM32.</a:t>
             </a:r>
           </a:p>
         </p:txBody>
@@ -8052,8 +9417,8 @@
         </p:nvSpPr>
         <p:spPr>
           <a:xfrm>
-            <a:off x="540000" y="1512000"/>
-            <a:ext cx="10800000" cy="720000"/>
+            <a:off x="540000" y="4860000"/>
+            <a:ext cx="10800000" cy="1080000"/>
           </a:xfrm>
           <a:prstGeom prst="rect">
             <a:avLst/>
@@ -8061,20 +9426,32 @@
           <a:noFill/>
         </p:spPr>
         <p:txBody>
-          <a:bodyPr wrap="square" lIns="0" rIns="0" tIns="0" bIns="0">
+          <a:bodyPr wrap="square" lIns="0" tIns="0" rIns="0" bIns="0">
             <a:spAutoFit/>
           </a:bodyPr>
           <a:lstStyle/>
           <a:p>
             <a:pPr algn="l"/>
             <a:r>
-              <a:rPr sz="1800" b="0">
-                <a:solidFill>
-                  <a:srgbClr val="1A1A1A"/>
-                </a:solidFill>
-                <a:latin typeface="Calibri"/>
-              </a:rPr>
-              <a:t>Разработка программно-аппаратного комплекса, выполняющего криптографические преобразования информации по белорусским стандартам СТБ 34.101.31 и СТБ 34.101.45 на отдельном USB-устройстве.</a:t>
+              <a:rPr sz="2200" b="1">
+                <a:solidFill>
+                  <a:srgbClr val="1F3A68"/>
+                </a:solidFill>
+                <a:latin typeface="Calibri"/>
+              </a:rPr>
+              <a:t>⇒ Открытый, недорогой и расширяемый макет</a:t>
+            </a:r>
+          </a:p>
+          <a:p>
+            <a:pPr algn="l"/>
+            <a:r>
+              <a:rPr sz="2200" b="1">
+                <a:solidFill>
+                  <a:srgbClr val="1F3A68"/>
+                </a:solidFill>
+                <a:latin typeface="Calibri"/>
+              </a:rPr>
+              <a:t>USB-токена, реализующего отечественные стандарты СТБ.</a:t>
             </a:r>
           </a:p>
         </p:txBody>
@@ -8087,8 +9464,8 @@
         </p:nvSpPr>
         <p:spPr>
           <a:xfrm>
-            <a:off x="540000" y="2700000"/>
-            <a:ext cx="10800000" cy="540000"/>
+            <a:off x="540000" y="6480000"/>
+            <a:ext cx="7200000" cy="251999"/>
           </a:xfrm>
           <a:prstGeom prst="rect">
             <a:avLst/>
@@ -8096,20 +9473,20 @@
           <a:noFill/>
         </p:spPr>
         <p:txBody>
-          <a:bodyPr wrap="square" lIns="0" rIns="0" tIns="0" bIns="0">
+          <a:bodyPr wrap="square" lIns="0" tIns="0" rIns="0" bIns="0">
             <a:spAutoFit/>
           </a:bodyPr>
           <a:lstStyle/>
           <a:p>
             <a:pPr algn="l"/>
             <a:r>
-              <a:rPr sz="2200" b="1">
-                <a:solidFill>
-                  <a:srgbClr val="1F3A68"/>
-                </a:solidFill>
-                <a:latin typeface="Calibri"/>
-              </a:rPr>
-              <a:t>Задачи</a:t>
+              <a:rPr sz="1000" b="0">
+                <a:solidFill>
+                  <a:srgbClr val="555555"/>
+                </a:solidFill>
+                <a:latin typeface="Calibri"/>
+              </a:rPr>
+              <a:t>Программно-аппаратный комплекс по СТБ с USB-интерфейсом</a:t>
             </a:r>
           </a:p>
         </p:txBody>
@@ -8122,8 +9499,8 @@
         </p:nvSpPr>
         <p:spPr>
           <a:xfrm>
-            <a:off x="540000" y="3131999"/>
-            <a:ext cx="10800000" cy="2880000"/>
+            <a:off x="10800000" y="6480000"/>
+            <a:ext cx="900000" cy="251999"/>
           </a:xfrm>
           <a:prstGeom prst="rect">
             <a:avLst/>
@@ -8131,107 +9508,12 @@
           <a:noFill/>
         </p:spPr>
         <p:txBody>
-          <a:bodyPr wrap="square" lIns="0" rIns="0" tIns="0" bIns="0">
+          <a:bodyPr wrap="square" lIns="0" tIns="0" rIns="0" bIns="0">
             <a:spAutoFit/>
           </a:bodyPr>
           <a:lstStyle/>
           <a:p>
-            <a:pPr algn="l"/>
-            <a:r>
-              <a:rPr sz="1700" b="0">
-                <a:solidFill>
-                  <a:srgbClr val="1A1A1A"/>
-                </a:solidFill>
-                <a:latin typeface="Calibri"/>
-              </a:rPr>
-              <a:t>1. Изучить теоретические основы и национальные криптографические стандарты СТБ.</a:t>
-            </a:r>
-          </a:p>
-          <a:p>
-            <a:pPr algn="l"/>
-            <a:r>
-              <a:rPr sz="1700" b="0">
-                <a:solidFill>
-                  <a:srgbClr val="1A1A1A"/>
-                </a:solidFill>
-                <a:latin typeface="Calibri"/>
-              </a:rPr>
-              <a:t>2. Обосновать выбор микроконтроллерной платформы и архитектуры комплекса.</a:t>
-            </a:r>
-          </a:p>
-          <a:p>
-            <a:pPr algn="l"/>
-            <a:r>
-              <a:rPr sz="1700" b="0">
-                <a:solidFill>
-                  <a:srgbClr val="1A1A1A"/>
-                </a:solidFill>
-                <a:latin typeface="Calibri"/>
-              </a:rPr>
-              <a:t>3. Провести обзор существующих аппаратно-программных средств защиты по СТБ.</a:t>
-            </a:r>
-          </a:p>
-          <a:p>
-            <a:pPr algn="l"/>
-            <a:r>
-              <a:rPr sz="1700" b="0">
-                <a:solidFill>
-                  <a:srgbClr val="1A1A1A"/>
-                </a:solidFill>
-                <a:latin typeface="Calibri"/>
-              </a:rPr>
-              <a:t>4. Разработать прошивку устройства на основе криптобиблиотеки bee2.</a:t>
-            </a:r>
-          </a:p>
-          <a:p>
-            <a:pPr algn="l"/>
-            <a:r>
-              <a:rPr sz="1700" b="0">
-                <a:solidFill>
-                  <a:srgbClr val="1A1A1A"/>
-                </a:solidFill>
-                <a:latin typeface="Calibri"/>
-              </a:rPr>
-              <a:t>5. Реализовать хост-приложение для управления комплексом по USB CDC.</a:t>
-            </a:r>
-          </a:p>
-          <a:p>
-            <a:pPr algn="l"/>
-            <a:r>
-              <a:rPr sz="1700" b="0">
-                <a:solidFill>
-                  <a:srgbClr val="1A1A1A"/>
-                </a:solidFill>
-                <a:latin typeface="Calibri"/>
-              </a:rPr>
-              <a:t>6. Провести натурные испытания и оценить производительность и стойкость.</a:t>
-            </a:r>
-          </a:p>
-        </p:txBody>
-      </p:sp>
-      <p:sp>
-        <p:nvSpPr>
-          <p:cNvPr id="9" name="TextBox 8"/>
-          <p:cNvSpPr txBox="1"/>
-          <p:nvPr/>
-        </p:nvSpPr>
-        <p:spPr>
-          <a:xfrm>
-            <a:off x="540000" y="6480000"/>
-            <a:ext cx="7200000" cy="251999"/>
-          </a:xfrm>
-          <a:prstGeom prst="rect">
-            <a:avLst/>
-          </a:prstGeom>
-          <a:noFill/>
-        </p:spPr>
-        <p:txBody>
-          <a:bodyPr wrap="square" lIns="0" rIns="0" tIns="0" bIns="0">
-            <a:spAutoFit/>
-          </a:bodyPr>
-          <a:lstStyle/>
-          <a:p>
-            <a:pPr algn="l"/>
+            <a:pPr algn="r"/>
             <a:r>
               <a:rPr sz="1000" b="0">
                 <a:solidFill>
@@ -8239,42 +9521,7 @@
                 </a:solidFill>
                 <a:latin typeface="Calibri"/>
               </a:rPr>
-              <a:t>Программно-аппаратный комплекс по СТБ с USB-интерфейсом</a:t>
-            </a:r>
-          </a:p>
-        </p:txBody>
-      </p:sp>
-      <p:sp>
-        <p:nvSpPr>
-          <p:cNvPr id="10" name="TextBox 9"/>
-          <p:cNvSpPr txBox="1"/>
-          <p:nvPr/>
-        </p:nvSpPr>
-        <p:spPr>
-          <a:xfrm>
-            <a:off x="10800000" y="6480000"/>
-            <a:ext cx="900000" cy="251999"/>
-          </a:xfrm>
-          <a:prstGeom prst="rect">
-            <a:avLst/>
-          </a:prstGeom>
-          <a:noFill/>
-        </p:spPr>
-        <p:txBody>
-          <a:bodyPr wrap="square" lIns="0" rIns="0" tIns="0" bIns="0">
-            <a:spAutoFit/>
-          </a:bodyPr>
-          <a:lstStyle/>
-          <a:p>
-            <a:pPr algn="r"/>
-            <a:r>
-              <a:rPr sz="1000" b="0">
-                <a:solidFill>
-                  <a:srgbClr val="555555"/>
-                </a:solidFill>
-                <a:latin typeface="Calibri"/>
-              </a:rPr>
-              <a:t>2 / 18</a:t>
+              <a:t>3 / 18</a:t>
             </a:r>
           </a:p>
         </p:txBody>
@@ -8288,7 +9535,7 @@
 </file>
 
 <file path=ppt/slides/slide3.xml><?xml version="1.0" encoding="utf-8"?>
-<p:sld xmlns:a="http://schemas.openxmlformats.org/drawingml/2006/main" xmlns:p="http://schemas.openxmlformats.org/presentationml/2006/main" xmlns:r="http://schemas.openxmlformats.org/officeDocument/2006/relationships">
+<p:sld xmlns:a="http://schemas.openxmlformats.org/drawingml/2006/main" xmlns:r="http://schemas.openxmlformats.org/officeDocument/2006/relationships" xmlns:p="http://schemas.openxmlformats.org/presentationml/2006/main">
   <p:cSld>
     <p:spTree>
       <p:nvGrpSpPr>
@@ -8296,7 +9543,14 @@
         <p:cNvGrpSpPr/>
         <p:nvPr/>
       </p:nvGrpSpPr>
-      <p:grpSpPr/>
+      <p:grpSpPr>
+        <a:xfrm>
+          <a:off x="0" y="0"/>
+          <a:ext cx="0" cy="0"/>
+          <a:chOff x="0" y="0"/>
+          <a:chExt cx="0" cy="0"/>
+        </a:xfrm>
+      </p:grpSpPr>
       <p:sp>
         <p:nvSpPr>
           <p:cNvPr id="2" name="Rectangle 1"/>
@@ -8337,6 +9591,7 @@
           <a:lstStyle/>
           <a:p>
             <a:pPr algn="ctr"/>
+            <a:endParaRPr/>
           </a:p>
         </p:txBody>
       </p:sp>
@@ -8357,7 +9612,7 @@
           <a:noFill/>
         </p:spPr>
         <p:txBody>
-          <a:bodyPr wrap="square" lIns="0" rIns="0" tIns="0" bIns="0">
+          <a:bodyPr wrap="square" lIns="0" tIns="0" rIns="0" bIns="0">
             <a:spAutoFit/>
           </a:bodyPr>
           <a:lstStyle/>
@@ -8370,7 +9625,7 @@
                 </a:solidFill>
                 <a:latin typeface="Calibri"/>
               </a:rPr>
-              <a:t>Актуальность</a:t>
+              <a:t>Цель и задачи работы</a:t>
             </a:r>
           </a:p>
         </p:txBody>
@@ -8415,6 +9670,7 @@
           <a:lstStyle/>
           <a:p>
             <a:pPr algn="ctr"/>
+            <a:endParaRPr/>
           </a:p>
         </p:txBody>
       </p:sp>
@@ -8426,8 +9682,8 @@
         </p:nvSpPr>
         <p:spPr>
           <a:xfrm>
-            <a:off x="540000" y="1152000"/>
-            <a:ext cx="10800000" cy="3600000"/>
+            <a:off x="540000" y="1080000"/>
+            <a:ext cx="10800000" cy="540000"/>
           </a:xfrm>
           <a:prstGeom prst="rect">
             <a:avLst/>
@@ -8435,116 +9691,20 @@
           <a:noFill/>
         </p:spPr>
         <p:txBody>
-          <a:bodyPr wrap="square" lIns="0" rIns="0" tIns="0" bIns="0">
+          <a:bodyPr wrap="square" lIns="0" tIns="0" rIns="0" bIns="0">
             <a:spAutoFit/>
           </a:bodyPr>
           <a:lstStyle/>
           <a:p>
             <a:pPr algn="l"/>
             <a:r>
-              <a:rPr sz="2000" b="0">
-                <a:solidFill>
-                  <a:srgbClr val="1A1A1A"/>
-                </a:solidFill>
-                <a:latin typeface="Calibri"/>
-              </a:rPr>
-              <a:t>•  Государственные и финансовые системы РБ обязаны защищать данные по СТБ.</a:t>
-            </a:r>
-          </a:p>
-          <a:p>
-            <a:pPr algn="l"/>
-            <a:r>
-              <a:rPr sz="2000" b="0">
-                <a:solidFill>
-                  <a:srgbClr val="1A1A1A"/>
-                </a:solidFill>
-                <a:latin typeface="Calibri"/>
-              </a:rPr>
-              <a:t/>
-            </a:r>
-          </a:p>
-          <a:p>
-            <a:pPr algn="l"/>
-            <a:r>
-              <a:rPr sz="2000" b="0">
-                <a:solidFill>
-                  <a:srgbClr val="1A1A1A"/>
-                </a:solidFill>
-                <a:latin typeface="Calibri"/>
-              </a:rPr>
-              <a:t>•  Использование иностранных решений ограничено законодательством (Указ № 196).</a:t>
-            </a:r>
-          </a:p>
-          <a:p>
-            <a:pPr algn="l"/>
-            <a:r>
-              <a:rPr sz="2000" b="0">
-                <a:solidFill>
-                  <a:srgbClr val="1A1A1A"/>
-                </a:solidFill>
-                <a:latin typeface="Calibri"/>
-              </a:rPr>
-              <a:t/>
-            </a:r>
-          </a:p>
-          <a:p>
-            <a:pPr algn="l"/>
-            <a:r>
-              <a:rPr sz="2000" b="0">
-                <a:solidFill>
-                  <a:srgbClr val="1A1A1A"/>
-                </a:solidFill>
-                <a:latin typeface="Calibri"/>
-              </a:rPr>
-              <a:t>•  Программные хранилища ключей уязвимы при компрометации хост-системы.</a:t>
-            </a:r>
-          </a:p>
-          <a:p>
-            <a:pPr algn="l"/>
-            <a:r>
-              <a:rPr sz="2000" b="0">
-                <a:solidFill>
-                  <a:srgbClr val="1A1A1A"/>
-                </a:solidFill>
-                <a:latin typeface="Calibri"/>
-              </a:rPr>
-              <a:t/>
-            </a:r>
-          </a:p>
-          <a:p>
-            <a:pPr algn="l"/>
-            <a:r>
-              <a:rPr sz="2000" b="0">
-                <a:solidFill>
-                  <a:srgbClr val="1A1A1A"/>
-                </a:solidFill>
-                <a:latin typeface="Calibri"/>
-              </a:rPr>
-              <a:t>•  Сертифицированные токены (АвестКлюч, Rutoken) дороги и закрыты.</a:t>
-            </a:r>
-          </a:p>
-          <a:p>
-            <a:pPr algn="l"/>
-            <a:r>
-              <a:rPr sz="2000" b="0">
-                <a:solidFill>
-                  <a:srgbClr val="1A1A1A"/>
-                </a:solidFill>
-                <a:latin typeface="Calibri"/>
-              </a:rPr>
-              <a:t/>
-            </a:r>
-          </a:p>
-          <a:p>
-            <a:pPr algn="l"/>
-            <a:r>
-              <a:rPr sz="2000" b="0">
-                <a:solidFill>
-                  <a:srgbClr val="1A1A1A"/>
-                </a:solidFill>
-                <a:latin typeface="Calibri"/>
-              </a:rPr>
-              <a:t>•  Нет открытых учебных образцов на отладочных платах STM32.</a:t>
+              <a:rPr sz="2200" b="1">
+                <a:solidFill>
+                  <a:srgbClr val="1F3A68"/>
+                </a:solidFill>
+                <a:latin typeface="Calibri"/>
+              </a:rPr>
+              <a:t>Цель</a:t>
             </a:r>
           </a:p>
         </p:txBody>
@@ -8557,8 +9717,8 @@
         </p:nvSpPr>
         <p:spPr>
           <a:xfrm>
-            <a:off x="540000" y="4860000"/>
-            <a:ext cx="10800000" cy="1080000"/>
+            <a:off x="540000" y="1512000"/>
+            <a:ext cx="10800000" cy="553998"/>
           </a:xfrm>
           <a:prstGeom prst="rect">
             <a:avLst/>
@@ -8566,32 +9726,245 @@
           <a:noFill/>
         </p:spPr>
         <p:txBody>
-          <a:bodyPr wrap="square" lIns="0" rIns="0" tIns="0" bIns="0">
+          <a:bodyPr wrap="square" lIns="0" tIns="0" rIns="0" bIns="0">
             <a:spAutoFit/>
           </a:bodyPr>
           <a:lstStyle/>
           <a:p>
             <a:pPr algn="l"/>
             <a:r>
-              <a:rPr sz="2200" b="1">
-                <a:solidFill>
-                  <a:srgbClr val="1F3A68"/>
-                </a:solidFill>
-                <a:latin typeface="Calibri"/>
-              </a:rPr>
-              <a:t>⇒ Открытый, недорогой и расширяемый макет</a:t>
-            </a:r>
-          </a:p>
-          <a:p>
-            <a:pPr algn="l"/>
-            <a:r>
-              <a:rPr sz="2200" b="1">
-                <a:solidFill>
-                  <a:srgbClr val="1F3A68"/>
-                </a:solidFill>
-                <a:latin typeface="Calibri"/>
-              </a:rPr>
-              <a:t>USB-токена, реализующего отечественные стандарты СТБ.</a:t>
+              <a:rPr sz="1800" b="0" dirty="0" err="1">
+                <a:solidFill>
+                  <a:srgbClr val="1A1A1A"/>
+                </a:solidFill>
+                <a:latin typeface="Calibri"/>
+              </a:rPr>
+              <a:t>Разработка</a:t>
+            </a:r>
+            <a:r>
+              <a:rPr sz="1800" b="0" dirty="0">
+                <a:solidFill>
+                  <a:srgbClr val="1A1A1A"/>
+                </a:solidFill>
+                <a:latin typeface="Calibri"/>
+              </a:rPr>
+              <a:t> </a:t>
+            </a:r>
+            <a:r>
+              <a:rPr sz="1800" b="0" dirty="0" err="1">
+                <a:solidFill>
+                  <a:srgbClr val="1A1A1A"/>
+                </a:solidFill>
+                <a:latin typeface="Calibri"/>
+              </a:rPr>
+              <a:t>программно-аппаратного</a:t>
+            </a:r>
+            <a:r>
+              <a:rPr sz="1800" b="0" dirty="0">
+                <a:solidFill>
+                  <a:srgbClr val="1A1A1A"/>
+                </a:solidFill>
+                <a:latin typeface="Calibri"/>
+              </a:rPr>
+              <a:t> </a:t>
+            </a:r>
+            <a:r>
+              <a:rPr sz="1800" b="0" dirty="0" err="1">
+                <a:solidFill>
+                  <a:srgbClr val="1A1A1A"/>
+                </a:solidFill>
+                <a:latin typeface="Calibri"/>
+              </a:rPr>
+              <a:t>комплекса</a:t>
+            </a:r>
+            <a:r>
+              <a:rPr sz="1800" b="0" dirty="0">
+                <a:solidFill>
+                  <a:srgbClr val="1A1A1A"/>
+                </a:solidFill>
+                <a:latin typeface="Calibri"/>
+              </a:rPr>
+              <a:t>, </a:t>
+            </a:r>
+            <a:r>
+              <a:rPr sz="1800" b="0" dirty="0" err="1">
+                <a:solidFill>
+                  <a:srgbClr val="1A1A1A"/>
+                </a:solidFill>
+                <a:latin typeface="Calibri"/>
+              </a:rPr>
+              <a:t>выполняющего</a:t>
+            </a:r>
+            <a:r>
+              <a:rPr sz="1800" b="0" dirty="0">
+                <a:solidFill>
+                  <a:srgbClr val="1A1A1A"/>
+                </a:solidFill>
+                <a:latin typeface="Calibri"/>
+              </a:rPr>
+              <a:t> </a:t>
+            </a:r>
+            <a:r>
+              <a:rPr sz="1800" b="0" dirty="0" err="1">
+                <a:solidFill>
+                  <a:srgbClr val="1A1A1A"/>
+                </a:solidFill>
+                <a:latin typeface="Calibri"/>
+              </a:rPr>
+              <a:t>криптографические</a:t>
+            </a:r>
+            <a:r>
+              <a:rPr sz="1800" b="0" dirty="0">
+                <a:solidFill>
+                  <a:srgbClr val="1A1A1A"/>
+                </a:solidFill>
+                <a:latin typeface="Calibri"/>
+              </a:rPr>
+              <a:t> </a:t>
+            </a:r>
+            <a:r>
+              <a:rPr sz="1800" b="0" dirty="0" err="1">
+                <a:solidFill>
+                  <a:srgbClr val="1A1A1A"/>
+                </a:solidFill>
+                <a:latin typeface="Calibri"/>
+              </a:rPr>
+              <a:t>преобразования</a:t>
+            </a:r>
+            <a:r>
+              <a:rPr sz="1800" b="0" dirty="0">
+                <a:solidFill>
+                  <a:srgbClr val="1A1A1A"/>
+                </a:solidFill>
+                <a:latin typeface="Calibri"/>
+              </a:rPr>
+              <a:t> </a:t>
+            </a:r>
+            <a:r>
+              <a:rPr sz="1800" b="0" dirty="0" err="1">
+                <a:solidFill>
+                  <a:srgbClr val="1A1A1A"/>
+                </a:solidFill>
+                <a:latin typeface="Calibri"/>
+              </a:rPr>
+              <a:t>информации</a:t>
+            </a:r>
+            <a:r>
+              <a:rPr sz="1800" b="0" dirty="0">
+                <a:solidFill>
+                  <a:srgbClr val="1A1A1A"/>
+                </a:solidFill>
+                <a:latin typeface="Calibri"/>
+              </a:rPr>
+              <a:t> </a:t>
+            </a:r>
+            <a:r>
+              <a:rPr sz="1800" b="0" dirty="0" err="1">
+                <a:solidFill>
+                  <a:srgbClr val="1A1A1A"/>
+                </a:solidFill>
+                <a:latin typeface="Calibri"/>
+              </a:rPr>
+              <a:t>по</a:t>
+            </a:r>
+            <a:r>
+              <a:rPr sz="1800" b="0" dirty="0">
+                <a:solidFill>
+                  <a:srgbClr val="1A1A1A"/>
+                </a:solidFill>
+                <a:latin typeface="Calibri"/>
+              </a:rPr>
+              <a:t> </a:t>
+            </a:r>
+            <a:r>
+              <a:rPr sz="1800" b="0" dirty="0" err="1">
+                <a:solidFill>
+                  <a:srgbClr val="1A1A1A"/>
+                </a:solidFill>
+                <a:latin typeface="Calibri"/>
+              </a:rPr>
+              <a:t>белорусским</a:t>
+            </a:r>
+            <a:r>
+              <a:rPr sz="1800" b="0" dirty="0">
+                <a:solidFill>
+                  <a:srgbClr val="1A1A1A"/>
+                </a:solidFill>
+                <a:latin typeface="Calibri"/>
+              </a:rPr>
+              <a:t> </a:t>
+            </a:r>
+            <a:r>
+              <a:rPr sz="1800" b="0" dirty="0" err="1">
+                <a:solidFill>
+                  <a:srgbClr val="1A1A1A"/>
+                </a:solidFill>
+                <a:latin typeface="Calibri"/>
+              </a:rPr>
+              <a:t>стандартам</a:t>
+            </a:r>
+            <a:r>
+              <a:rPr sz="1800" b="0" dirty="0">
+                <a:solidFill>
+                  <a:srgbClr val="1A1A1A"/>
+                </a:solidFill>
+                <a:latin typeface="Calibri"/>
+              </a:rPr>
+              <a:t> СТБ </a:t>
+            </a:r>
+            <a:r>
+              <a:rPr sz="1800" b="0" dirty="0" err="1">
+                <a:solidFill>
+                  <a:srgbClr val="1A1A1A"/>
+                </a:solidFill>
+                <a:latin typeface="Calibri"/>
+              </a:rPr>
+              <a:t>на</a:t>
+            </a:r>
+            <a:r>
+              <a:rPr sz="1800" b="0" dirty="0">
+                <a:solidFill>
+                  <a:srgbClr val="1A1A1A"/>
+                </a:solidFill>
+                <a:latin typeface="Calibri"/>
+              </a:rPr>
+              <a:t> </a:t>
+            </a:r>
+            <a:r>
+              <a:rPr sz="1800" b="0" dirty="0" err="1">
+                <a:solidFill>
+                  <a:srgbClr val="1A1A1A"/>
+                </a:solidFill>
+                <a:latin typeface="Calibri"/>
+              </a:rPr>
+              <a:t>отдельном</a:t>
+            </a:r>
+            <a:r>
+              <a:rPr sz="1800" b="0" dirty="0">
+                <a:solidFill>
+                  <a:srgbClr val="1A1A1A"/>
+                </a:solidFill>
+                <a:latin typeface="Calibri"/>
+              </a:rPr>
+              <a:t> USB-</a:t>
+            </a:r>
+            <a:r>
+              <a:rPr sz="1800" b="0" dirty="0" err="1">
+                <a:solidFill>
+                  <a:srgbClr val="1A1A1A"/>
+                </a:solidFill>
+                <a:latin typeface="Calibri"/>
+              </a:rPr>
+              <a:t>устройстве</a:t>
+            </a:r>
+            <a:r>
+              <a:rPr sz="1800" b="0" dirty="0">
+                <a:solidFill>
+                  <a:srgbClr val="1A1A1A"/>
+                </a:solidFill>
+                <a:latin typeface="Calibri"/>
+              </a:rPr>
+              <a:t>.</a:t>
             </a:r>
           </a:p>
         </p:txBody>
@@ -8604,8 +9977,8 @@
         </p:nvSpPr>
         <p:spPr>
           <a:xfrm>
-            <a:off x="540000" y="6480000"/>
-            <a:ext cx="7200000" cy="251999"/>
+            <a:off x="540000" y="2700000"/>
+            <a:ext cx="10800000" cy="540000"/>
           </a:xfrm>
           <a:prstGeom prst="rect">
             <a:avLst/>
@@ -8613,20 +9986,20 @@
           <a:noFill/>
         </p:spPr>
         <p:txBody>
-          <a:bodyPr wrap="square" lIns="0" rIns="0" tIns="0" bIns="0">
+          <a:bodyPr wrap="square" lIns="0" tIns="0" rIns="0" bIns="0">
             <a:spAutoFit/>
           </a:bodyPr>
           <a:lstStyle/>
           <a:p>
             <a:pPr algn="l"/>
             <a:r>
-              <a:rPr sz="1000" b="0">
-                <a:solidFill>
-                  <a:srgbClr val="555555"/>
-                </a:solidFill>
-                <a:latin typeface="Calibri"/>
-              </a:rPr>
-              <a:t>Программно-аппаратный комплекс по СТБ с USB-интерфейсом</a:t>
+              <a:rPr sz="2200" b="1">
+                <a:solidFill>
+                  <a:srgbClr val="1F3A68"/>
+                </a:solidFill>
+                <a:latin typeface="Calibri"/>
+              </a:rPr>
+              <a:t>Задачи</a:t>
             </a:r>
           </a:p>
         </p:txBody>
@@ -8639,8 +10012,8 @@
         </p:nvSpPr>
         <p:spPr>
           <a:xfrm>
-            <a:off x="10800000" y="6480000"/>
-            <a:ext cx="900000" cy="251999"/>
+            <a:off x="540000" y="3131999"/>
+            <a:ext cx="10800000" cy="2880000"/>
           </a:xfrm>
           <a:prstGeom prst="rect">
             <a:avLst/>
@@ -8648,11 +10021,141 @@
           <a:noFill/>
         </p:spPr>
         <p:txBody>
-          <a:bodyPr wrap="square" lIns="0" rIns="0" tIns="0" bIns="0">
+          <a:bodyPr wrap="square" lIns="0" tIns="0" rIns="0" bIns="0">
             <a:spAutoFit/>
           </a:bodyPr>
           <a:lstStyle/>
           <a:p>
+            <a:pPr algn="l"/>
+            <a:r>
+              <a:rPr sz="1700" b="0">
+                <a:solidFill>
+                  <a:srgbClr val="1A1A1A"/>
+                </a:solidFill>
+                <a:latin typeface="Calibri"/>
+              </a:rPr>
+              <a:t>1. Изучить теоретические основы и национальные криптографические стандарты СТБ.</a:t>
+            </a:r>
+          </a:p>
+          <a:p>
+            <a:pPr algn="l"/>
+            <a:r>
+              <a:rPr sz="1700" b="0">
+                <a:solidFill>
+                  <a:srgbClr val="1A1A1A"/>
+                </a:solidFill>
+                <a:latin typeface="Calibri"/>
+              </a:rPr>
+              <a:t>2. Обосновать выбор микроконтроллерной платформы и архитектуры комплекса.</a:t>
+            </a:r>
+          </a:p>
+          <a:p>
+            <a:pPr algn="l"/>
+            <a:r>
+              <a:rPr sz="1700" b="0">
+                <a:solidFill>
+                  <a:srgbClr val="1A1A1A"/>
+                </a:solidFill>
+                <a:latin typeface="Calibri"/>
+              </a:rPr>
+              <a:t>3. Провести обзор существующих аппаратно-программных средств защиты по СТБ.</a:t>
+            </a:r>
+          </a:p>
+          <a:p>
+            <a:pPr algn="l"/>
+            <a:r>
+              <a:rPr sz="1700" b="0">
+                <a:solidFill>
+                  <a:srgbClr val="1A1A1A"/>
+                </a:solidFill>
+                <a:latin typeface="Calibri"/>
+              </a:rPr>
+              <a:t>4. Разработать прошивку устройства на основе криптобиблиотеки bee2.</a:t>
+            </a:r>
+          </a:p>
+          <a:p>
+            <a:pPr algn="l"/>
+            <a:r>
+              <a:rPr sz="1700" b="0">
+                <a:solidFill>
+                  <a:srgbClr val="1A1A1A"/>
+                </a:solidFill>
+                <a:latin typeface="Calibri"/>
+              </a:rPr>
+              <a:t>5. Реализовать хост-приложение для управления комплексом по USB CDC.</a:t>
+            </a:r>
+          </a:p>
+          <a:p>
+            <a:pPr algn="l"/>
+            <a:r>
+              <a:rPr sz="1700" b="0">
+                <a:solidFill>
+                  <a:srgbClr val="1A1A1A"/>
+                </a:solidFill>
+                <a:latin typeface="Calibri"/>
+              </a:rPr>
+              <a:t>6. Провести натурные испытания и оценить производительность и стойкость.</a:t>
+            </a:r>
+          </a:p>
+        </p:txBody>
+      </p:sp>
+      <p:sp>
+        <p:nvSpPr>
+          <p:cNvPr id="9" name="TextBox 8"/>
+          <p:cNvSpPr txBox="1"/>
+          <p:nvPr/>
+        </p:nvSpPr>
+        <p:spPr>
+          <a:xfrm>
+            <a:off x="540000" y="6480000"/>
+            <a:ext cx="7200000" cy="251999"/>
+          </a:xfrm>
+          <a:prstGeom prst="rect">
+            <a:avLst/>
+          </a:prstGeom>
+          <a:noFill/>
+        </p:spPr>
+        <p:txBody>
+          <a:bodyPr wrap="square" lIns="0" tIns="0" rIns="0" bIns="0">
+            <a:spAutoFit/>
+          </a:bodyPr>
+          <a:lstStyle/>
+          <a:p>
+            <a:pPr algn="l"/>
+            <a:r>
+              <a:rPr sz="1000" b="0">
+                <a:solidFill>
+                  <a:srgbClr val="555555"/>
+                </a:solidFill>
+                <a:latin typeface="Calibri"/>
+              </a:rPr>
+              <a:t>Программно-аппаратный комплекс по СТБ с USB-интерфейсом</a:t>
+            </a:r>
+          </a:p>
+        </p:txBody>
+      </p:sp>
+      <p:sp>
+        <p:nvSpPr>
+          <p:cNvPr id="10" name="TextBox 9"/>
+          <p:cNvSpPr txBox="1"/>
+          <p:nvPr/>
+        </p:nvSpPr>
+        <p:spPr>
+          <a:xfrm>
+            <a:off x="10800000" y="6480000"/>
+            <a:ext cx="900000" cy="251999"/>
+          </a:xfrm>
+          <a:prstGeom prst="rect">
+            <a:avLst/>
+          </a:prstGeom>
+          <a:noFill/>
+        </p:spPr>
+        <p:txBody>
+          <a:bodyPr wrap="square" lIns="0" tIns="0" rIns="0" bIns="0">
+            <a:spAutoFit/>
+          </a:bodyPr>
+          <a:lstStyle/>
+          <a:p>
             <a:pPr algn="r"/>
             <a:r>
               <a:rPr sz="1000" b="0">
@@ -8661,7 +10164,7 @@
                 </a:solidFill>
                 <a:latin typeface="Calibri"/>
               </a:rPr>
-              <a:t>3 / 18</a:t>
+              <a:t>2 / 18</a:t>
             </a:r>
           </a:p>
         </p:txBody>
@@ -8675,7 +10178,7 @@
 </file>
 
 <file path=ppt/slides/slide4.xml><?xml version="1.0" encoding="utf-8"?>
-<p:sld xmlns:a="http://schemas.openxmlformats.org/drawingml/2006/main" xmlns:p="http://schemas.openxmlformats.org/presentationml/2006/main" xmlns:r="http://schemas.openxmlformats.org/officeDocument/2006/relationships">
+<p:sld xmlns:a="http://schemas.openxmlformats.org/drawingml/2006/main" xmlns:r="http://schemas.openxmlformats.org/officeDocument/2006/relationships" xmlns:p="http://schemas.openxmlformats.org/presentationml/2006/main">
   <p:cSld>
     <p:spTree>
       <p:nvGrpSpPr>
@@ -8683,7 +10186,14 @@
         <p:cNvGrpSpPr/>
         <p:nvPr/>
       </p:nvGrpSpPr>
-      <p:grpSpPr/>
+      <p:grpSpPr>
+        <a:xfrm>
+          <a:off x="0" y="0"/>
+          <a:ext cx="0" cy="0"/>
+          <a:chOff x="0" y="0"/>
+          <a:chExt cx="0" cy="0"/>
+        </a:xfrm>
+      </p:grpSpPr>
       <p:sp>
         <p:nvSpPr>
           <p:cNvPr id="2" name="Rectangle 1"/>
@@ -8724,6 +10234,7 @@
           <a:lstStyle/>
           <a:p>
             <a:pPr algn="ctr"/>
+            <a:endParaRPr/>
           </a:p>
         </p:txBody>
       </p:sp>
@@ -8744,7 +10255,7 @@
           <a:noFill/>
         </p:spPr>
         <p:txBody>
-          <a:bodyPr wrap="square" lIns="0" rIns="0" tIns="0" bIns="0">
+          <a:bodyPr wrap="square" lIns="0" tIns="0" rIns="0" bIns="0">
             <a:spAutoFit/>
           </a:bodyPr>
           <a:lstStyle/>
@@ -8802,6 +10313,7 @@
           <a:lstStyle/>
           <a:p>
             <a:pPr algn="ctr"/>
+            <a:endParaRPr/>
           </a:p>
         </p:txBody>
       </p:sp>
@@ -8811,7 +10323,13 @@
           <p:cNvGraphicFramePr>
             <a:graphicFrameLocks noGrp="1"/>
           </p:cNvGraphicFramePr>
-          <p:nvPr/>
+          <p:nvPr>
+            <p:extLst>
+              <p:ext uri="{D42A27DB-BD31-4B8C-83A1-F6EECF244321}">
+                <p14:modId xmlns:p14="http://schemas.microsoft.com/office/powerpoint/2010/main" val="3395502296"/>
+              </p:ext>
+            </p:extLst>
+          </p:nvPr>
         </p:nvGraphicFramePr>
         <p:xfrm>
           <a:off x="540000" y="1260000"/>
@@ -8824,9 +10342,27 @@
                 <a:tableStyleId>{5C22544A-7EE6-4342-B048-85BDC9FD1C3A}</a:tableStyleId>
               </a:tblPr>
               <a:tblGrid>
-                <a:gridCol w="2340000"/>
-                <a:gridCol w="4680000"/>
-                <a:gridCol w="3960000"/>
+                <a:gridCol w="2340000">
+                  <a:extLst>
+                    <a:ext uri="{9D8B030D-6E8A-4147-A177-3AD203B41FA5}">
+                      <a16:colId xmlns:a16="http://schemas.microsoft.com/office/drawing/2014/main" val="20000"/>
+                    </a:ext>
+                  </a:extLst>
+                </a:gridCol>
+                <a:gridCol w="4680000">
+                  <a:extLst>
+                    <a:ext uri="{9D8B030D-6E8A-4147-A177-3AD203B41FA5}">
+                      <a16:colId xmlns:a16="http://schemas.microsoft.com/office/drawing/2014/main" val="20001"/>
+                    </a:ext>
+                  </a:extLst>
+                </a:gridCol>
+                <a:gridCol w="3960000">
+                  <a:extLst>
+                    <a:ext uri="{9D8B030D-6E8A-4147-A177-3AD203B41FA5}">
+                      <a16:colId xmlns:a16="http://schemas.microsoft.com/office/drawing/2014/main" val="20002"/>
+                    </a:ext>
+                  </a:extLst>
+                </a:gridCol>
               </a:tblGrid>
               <a:tr h="792000">
                 <a:tc>
@@ -8895,6 +10431,11 @@
                     </a:solidFill>
                   </a:tcPr>
                 </a:tc>
+                <a:extLst>
+                  <a:ext uri="{0D108BD9-81ED-4DB2-BD59-A6C34878D82A}">
+                    <a16:rowId xmlns:a16="http://schemas.microsoft.com/office/drawing/2014/main" val="10000"/>
+                  </a:ext>
+                </a:extLst>
               </a:tr>
               <a:tr h="792000">
                 <a:tc>
@@ -8965,6 +10506,11 @@
                     </a:solidFill>
                   </a:tcPr>
                 </a:tc>
+                <a:extLst>
+                  <a:ext uri="{0D108BD9-81ED-4DB2-BD59-A6C34878D82A}">
+                    <a16:rowId xmlns:a16="http://schemas.microsoft.com/office/drawing/2014/main" val="10001"/>
+                  </a:ext>
+                </a:extLst>
               </a:tr>
               <a:tr h="792000">
                 <a:tc>
@@ -9035,6 +10581,11 @@
                     </a:solidFill>
                   </a:tcPr>
                 </a:tc>
+                <a:extLst>
+                  <a:ext uri="{0D108BD9-81ED-4DB2-BD59-A6C34878D82A}">
+                    <a16:rowId xmlns:a16="http://schemas.microsoft.com/office/drawing/2014/main" val="10002"/>
+                  </a:ext>
+                </a:extLst>
               </a:tr>
               <a:tr h="792000">
                 <a:tc>
@@ -9105,6 +10656,11 @@
                     </a:solidFill>
                   </a:tcPr>
                 </a:tc>
+                <a:extLst>
+                  <a:ext uri="{0D108BD9-81ED-4DB2-BD59-A6C34878D82A}">
+                    <a16:rowId xmlns:a16="http://schemas.microsoft.com/office/drawing/2014/main" val="10003"/>
+                  </a:ext>
+                </a:extLst>
               </a:tr>
               <a:tr h="792000">
                 <a:tc>
@@ -9112,15 +10668,12 @@
                     <a:bodyPr/>
                     <a:lstStyle/>
                     <a:p>
-                      <a:r>
-                        <a:rPr sz="1500">
-                          <a:solidFill>
-                            <a:srgbClr val="1A1A1A"/>
-                          </a:solidFill>
-                          <a:latin typeface="Calibri"/>
-                        </a:rPr>
-                        <a:t>СТБ 34.101.66-2014</a:t>
-                      </a:r>
+                      <a:endParaRPr sz="1500" dirty="0">
+                        <a:solidFill>
+                          <a:srgbClr val="1A1A1A"/>
+                        </a:solidFill>
+                        <a:latin typeface="Calibri"/>
+                      </a:endParaRPr>
                     </a:p>
                   </a:txBody>
                   <a:tcPr>
@@ -9134,16 +10687,12 @@
                     <a:bodyPr/>
                     <a:lstStyle/>
                     <a:p>
-                      <a:r>
-                        <a:rPr sz="1500">
-                          <a:solidFill>
-                            <a:srgbClr val="1A1A1A"/>
-                          </a:solidFill>
-                          <a:latin typeface="Calibri"/>
-                        </a:rPr>
-                        <a:t>Протокол выработки общего
-ключа bake</a:t>
-                      </a:r>
+                      <a:endParaRPr sz="1500">
+                        <a:solidFill>
+                          <a:srgbClr val="1A1A1A"/>
+                        </a:solidFill>
+                        <a:latin typeface="Calibri"/>
+                      </a:endParaRPr>
                     </a:p>
                   </a:txBody>
                   <a:tcPr>
@@ -9157,16 +10706,12 @@
                     <a:bodyPr/>
                     <a:lstStyle/>
                     <a:p>
-                      <a:r>
-                        <a:rPr sz="1500">
-                          <a:solidFill>
-                            <a:srgbClr val="1A1A1A"/>
-                          </a:solidFill>
-                          <a:latin typeface="Calibri"/>
-                        </a:rPr>
-                        <a:t>Перспективное направление
-для защиты канала</a:t>
-                      </a:r>
+                      <a:endParaRPr sz="1500" dirty="0">
+                        <a:solidFill>
+                          <a:srgbClr val="1A1A1A"/>
+                        </a:solidFill>
+                        <a:latin typeface="Calibri"/>
+                      </a:endParaRPr>
                     </a:p>
                   </a:txBody>
                   <a:tcPr>
@@ -9175,6 +10720,11 @@
                     </a:solidFill>
                   </a:tcPr>
                 </a:tc>
+                <a:extLst>
+                  <a:ext uri="{0D108BD9-81ED-4DB2-BD59-A6C34878D82A}">
+                    <a16:rowId xmlns:a16="http://schemas.microsoft.com/office/drawing/2014/main" val="10004"/>
+                  </a:ext>
+                </a:extLst>
               </a:tr>
             </a:tbl>
           </a:graphicData>
@@ -9197,7 +10747,7 @@
           <a:noFill/>
         </p:spPr>
         <p:txBody>
-          <a:bodyPr wrap="square" lIns="0" rIns="0" tIns="0" bIns="0">
+          <a:bodyPr wrap="square" lIns="0" tIns="0" rIns="0" bIns="0">
             <a:spAutoFit/>
           </a:bodyPr>
           <a:lstStyle/>
@@ -9232,7 +10782,7 @@
           <a:noFill/>
         </p:spPr>
         <p:txBody>
-          <a:bodyPr wrap="square" lIns="0" rIns="0" tIns="0" bIns="0">
+          <a:bodyPr wrap="square" lIns="0" tIns="0" rIns="0" bIns="0">
             <a:spAutoFit/>
           </a:bodyPr>
           <a:lstStyle/>
@@ -9259,7 +10809,7 @@
 </file>
 
 <file path=ppt/slides/slide5.xml><?xml version="1.0" encoding="utf-8"?>
-<p:sld xmlns:a="http://schemas.openxmlformats.org/drawingml/2006/main" xmlns:p="http://schemas.openxmlformats.org/presentationml/2006/main" xmlns:r="http://schemas.openxmlformats.org/officeDocument/2006/relationships">
+<p:sld xmlns:a="http://schemas.openxmlformats.org/drawingml/2006/main" xmlns:r="http://schemas.openxmlformats.org/officeDocument/2006/relationships" xmlns:p="http://schemas.openxmlformats.org/presentationml/2006/main">
   <p:cSld>
     <p:spTree>
       <p:nvGrpSpPr>
@@ -9267,7 +10817,14 @@
         <p:cNvGrpSpPr/>
         <p:nvPr/>
       </p:nvGrpSpPr>
-      <p:grpSpPr/>
+      <p:grpSpPr>
+        <a:xfrm>
+          <a:off x="0" y="0"/>
+          <a:ext cx="0" cy="0"/>
+          <a:chOff x="0" y="0"/>
+          <a:chExt cx="0" cy="0"/>
+        </a:xfrm>
+      </p:grpSpPr>
       <p:sp>
         <p:nvSpPr>
           <p:cNvPr id="2" name="Rectangle 1"/>
@@ -9308,6 +10865,7 @@
           <a:lstStyle/>
           <a:p>
             <a:pPr algn="ctr"/>
+            <a:endParaRPr/>
           </a:p>
         </p:txBody>
       </p:sp>
@@ -9328,7 +10886,7 @@
           <a:noFill/>
         </p:spPr>
         <p:txBody>
-          <a:bodyPr wrap="square" lIns="0" rIns="0" tIns="0" bIns="0">
+          <a:bodyPr wrap="square" lIns="0" tIns="0" rIns="0" bIns="0">
             <a:spAutoFit/>
           </a:bodyPr>
           <a:lstStyle/>
@@ -9386,6 +10944,7 @@
           <a:lstStyle/>
           <a:p>
             <a:pPr algn="ctr"/>
+            <a:endParaRPr/>
           </a:p>
         </p:txBody>
       </p:sp>
@@ -9431,6 +10990,7 @@
           <a:lstStyle/>
           <a:p>
             <a:pPr algn="ctr"/>
+            <a:endParaRPr/>
           </a:p>
         </p:txBody>
       </p:sp>
@@ -9451,7 +11011,7 @@
           <a:noFill/>
         </p:spPr>
         <p:txBody>
-          <a:bodyPr wrap="square" lIns="0" rIns="0" tIns="0" bIns="0">
+          <a:bodyPr wrap="square" lIns="0" tIns="0" rIns="0" bIns="0">
             <a:spAutoFit/>
           </a:bodyPr>
           <a:lstStyle/>
@@ -9478,7 +11038,7 @@
         <p:spPr>
           <a:xfrm>
             <a:off x="900000" y="2340000"/>
-            <a:ext cx="3600000" cy="2520000"/>
+            <a:ext cx="3600000" cy="1384995"/>
           </a:xfrm>
           <a:prstGeom prst="rect">
             <a:avLst/>
@@ -9486,81 +11046,276 @@
           <a:noFill/>
         </p:spPr>
         <p:txBody>
-          <a:bodyPr wrap="square" lIns="0" rIns="0" tIns="0" bIns="0">
+          <a:bodyPr wrap="square" lIns="0" tIns="0" rIns="0" bIns="0">
             <a:spAutoFit/>
           </a:bodyPr>
           <a:lstStyle/>
           <a:p>
             <a:pPr algn="l"/>
             <a:r>
-              <a:rPr sz="1500" b="0">
-                <a:solidFill>
-                  <a:srgbClr val="1A1A1A"/>
-                </a:solidFill>
-                <a:latin typeface="Calibri"/>
-              </a:rPr>
-              <a:t>•  Tkinter GUI</a:t>
-            </a:r>
-          </a:p>
-          <a:p>
-            <a:pPr algn="l"/>
-            <a:r>
-              <a:rPr sz="1500" b="0">
-                <a:solidFill>
-                  <a:srgbClr val="1A1A1A"/>
-                </a:solidFill>
-                <a:latin typeface="Calibri"/>
-              </a:rPr>
-              <a:t>•  stm32_protocol.py (PySerial)</a:t>
-            </a:r>
-          </a:p>
-          <a:p>
-            <a:pPr algn="l"/>
-            <a:r>
-              <a:rPr sz="1500" b="0">
-                <a:solidFill>
-                  <a:srgbClr val="1A1A1A"/>
-                </a:solidFill>
-                <a:latin typeface="Calibri"/>
-              </a:rPr>
-              <a:t>•  belt_hash.py — эталон</a:t>
-            </a:r>
-          </a:p>
-          <a:p>
-            <a:pPr algn="l"/>
-            <a:r>
-              <a:rPr sz="1500" b="0">
-                <a:solidFill>
-                  <a:srgbClr val="1A1A1A"/>
-                </a:solidFill>
-                <a:latin typeface="Calibri"/>
-              </a:rPr>
-              <a:t>•  belt.py — программный шифр</a:t>
-            </a:r>
-          </a:p>
-          <a:p>
-            <a:pPr algn="l"/>
-            <a:r>
-              <a:rPr sz="1500" b="0">
-                <a:solidFill>
-                  <a:srgbClr val="1A1A1A"/>
-                </a:solidFill>
-                <a:latin typeface="Calibri"/>
-              </a:rPr>
-              <a:t>•  чтение/запись файлов</a:t>
-            </a:r>
-          </a:p>
-          <a:p>
-            <a:pPr algn="l"/>
-            <a:r>
-              <a:rPr sz="1500" b="0">
-                <a:solidFill>
-                  <a:srgbClr val="1A1A1A"/>
-                </a:solidFill>
-                <a:latin typeface="Calibri"/>
-              </a:rPr>
-              <a:t>•  хранение публичных ключей</a:t>
-            </a:r>
+              <a:rPr sz="1500" b="0" dirty="0">
+                <a:solidFill>
+                  <a:srgbClr val="1A1A1A"/>
+                </a:solidFill>
+                <a:latin typeface="Calibri"/>
+              </a:rPr>
+              <a:t>•  </a:t>
+            </a:r>
+            <a:r>
+              <a:rPr sz="1500" b="0" dirty="0" err="1">
+                <a:solidFill>
+                  <a:srgbClr val="1A1A1A"/>
+                </a:solidFill>
+                <a:latin typeface="Calibri"/>
+              </a:rPr>
+              <a:t>Tkinter</a:t>
+            </a:r>
+            <a:r>
+              <a:rPr sz="1500" b="0" dirty="0">
+                <a:solidFill>
+                  <a:srgbClr val="1A1A1A"/>
+                </a:solidFill>
+                <a:latin typeface="Calibri"/>
+              </a:rPr>
+              <a:t> GUI</a:t>
+            </a:r>
+          </a:p>
+          <a:p>
+            <a:pPr algn="l"/>
+            <a:r>
+              <a:rPr sz="1500" b="0" dirty="0">
+                <a:solidFill>
+                  <a:srgbClr val="1A1A1A"/>
+                </a:solidFill>
+                <a:latin typeface="Calibri"/>
+              </a:rPr>
+              <a:t>•  stm32_protocol.py (</a:t>
+            </a:r>
+            <a:r>
+              <a:rPr sz="1500" b="0" dirty="0" err="1">
+                <a:solidFill>
+                  <a:srgbClr val="1A1A1A"/>
+                </a:solidFill>
+                <a:latin typeface="Calibri"/>
+              </a:rPr>
+              <a:t>PySerial</a:t>
+            </a:r>
+            <a:r>
+              <a:rPr sz="1500" b="0" dirty="0">
+                <a:solidFill>
+                  <a:srgbClr val="1A1A1A"/>
+                </a:solidFill>
+                <a:latin typeface="Calibri"/>
+              </a:rPr>
+              <a:t>)</a:t>
+            </a:r>
+          </a:p>
+          <a:p>
+            <a:pPr algn="l"/>
+            <a:r>
+              <a:rPr sz="1500" b="0" dirty="0">
+                <a:solidFill>
+                  <a:srgbClr val="1A1A1A"/>
+                </a:solidFill>
+                <a:latin typeface="Calibri"/>
+              </a:rPr>
+              <a:t>•  belt_hash.py — </a:t>
+            </a:r>
+            <a:r>
+              <a:rPr lang="ru-RU" sz="1500" b="0" dirty="0" err="1">
+                <a:solidFill>
+                  <a:srgbClr val="1A1A1A"/>
+                </a:solidFill>
+                <a:latin typeface="Calibri"/>
+              </a:rPr>
+              <a:t>хеш</a:t>
+            </a:r>
+            <a:r>
+              <a:rPr lang="ru-RU" sz="1500" b="0" dirty="0">
+                <a:solidFill>
+                  <a:srgbClr val="1A1A1A"/>
+                </a:solidFill>
+                <a:latin typeface="Calibri"/>
+              </a:rPr>
+              <a:t> по стандарту</a:t>
+            </a:r>
+            <a:endParaRPr sz="1500" b="0" dirty="0">
+              <a:solidFill>
+                <a:srgbClr val="1A1A1A"/>
+              </a:solidFill>
+              <a:latin typeface="Calibri"/>
+            </a:endParaRPr>
+          </a:p>
+          <a:p>
+            <a:pPr algn="l"/>
+            <a:r>
+              <a:rPr sz="1500" b="0" dirty="0">
+                <a:solidFill>
+                  <a:srgbClr val="1A1A1A"/>
+                </a:solidFill>
+                <a:latin typeface="Calibri"/>
+              </a:rPr>
+              <a:t>•  belt.py — </a:t>
+            </a:r>
+            <a:r>
+              <a:rPr sz="1500" b="0" dirty="0" err="1">
+                <a:solidFill>
+                  <a:srgbClr val="1A1A1A"/>
+                </a:solidFill>
+                <a:latin typeface="Calibri"/>
+              </a:rPr>
+              <a:t>программный</a:t>
+            </a:r>
+            <a:r>
+              <a:rPr sz="1500" b="0" dirty="0">
+                <a:solidFill>
+                  <a:srgbClr val="1A1A1A"/>
+                </a:solidFill>
+                <a:latin typeface="Calibri"/>
+              </a:rPr>
+              <a:t> </a:t>
+            </a:r>
+            <a:r>
+              <a:rPr sz="1500" b="0" dirty="0" err="1">
+                <a:solidFill>
+                  <a:srgbClr val="1A1A1A"/>
+                </a:solidFill>
+                <a:latin typeface="Calibri"/>
+              </a:rPr>
+              <a:t>шифр</a:t>
+            </a:r>
+            <a:endParaRPr sz="1500" b="0" dirty="0">
+              <a:solidFill>
+                <a:srgbClr val="1A1A1A"/>
+              </a:solidFill>
+              <a:latin typeface="Calibri"/>
+            </a:endParaRPr>
+          </a:p>
+          <a:p>
+            <a:pPr algn="l"/>
+            <a:r>
+              <a:rPr sz="1500" b="0" dirty="0">
+                <a:solidFill>
+                  <a:srgbClr val="1A1A1A"/>
+                </a:solidFill>
+                <a:latin typeface="Calibri"/>
+              </a:rPr>
+              <a:t>•  </a:t>
+            </a:r>
+            <a:r>
+              <a:rPr sz="1500" b="0" dirty="0" err="1">
+                <a:solidFill>
+                  <a:srgbClr val="1A1A1A"/>
+                </a:solidFill>
+                <a:latin typeface="Calibri"/>
+              </a:rPr>
+              <a:t>чтение</a:t>
+            </a:r>
+            <a:r>
+              <a:rPr sz="1500" b="0" dirty="0">
+                <a:solidFill>
+                  <a:srgbClr val="1A1A1A"/>
+                </a:solidFill>
+                <a:latin typeface="Calibri"/>
+              </a:rPr>
+              <a:t>/</a:t>
+            </a:r>
+            <a:r>
+              <a:rPr sz="1500" b="0" dirty="0" err="1">
+                <a:solidFill>
+                  <a:srgbClr val="1A1A1A"/>
+                </a:solidFill>
+                <a:latin typeface="Calibri"/>
+              </a:rPr>
+              <a:t>запись</a:t>
+            </a:r>
+            <a:r>
+              <a:rPr sz="1500" b="0" dirty="0">
+                <a:solidFill>
+                  <a:srgbClr val="1A1A1A"/>
+                </a:solidFill>
+                <a:latin typeface="Calibri"/>
+              </a:rPr>
+              <a:t> </a:t>
+            </a:r>
+            <a:r>
+              <a:rPr sz="1500" b="0" dirty="0" err="1">
+                <a:solidFill>
+                  <a:srgbClr val="1A1A1A"/>
+                </a:solidFill>
+                <a:latin typeface="Calibri"/>
+              </a:rPr>
+              <a:t>файлов</a:t>
+            </a:r>
+            <a:endParaRPr sz="1500" b="0" dirty="0">
+              <a:solidFill>
+                <a:srgbClr val="1A1A1A"/>
+              </a:solidFill>
+              <a:latin typeface="Calibri"/>
+            </a:endParaRPr>
+          </a:p>
+          <a:p>
+            <a:pPr algn="l"/>
+            <a:r>
+              <a:rPr sz="1500" b="0" dirty="0">
+                <a:solidFill>
+                  <a:srgbClr val="1A1A1A"/>
+                </a:solidFill>
+                <a:latin typeface="Calibri"/>
+              </a:rPr>
+              <a:t>•  </a:t>
+            </a:r>
+            <a:r>
+              <a:rPr sz="1500" b="0" dirty="0" err="1">
+                <a:solidFill>
+                  <a:srgbClr val="1A1A1A"/>
+                </a:solidFill>
+                <a:latin typeface="Calibri"/>
+              </a:rPr>
+              <a:t>хранение</a:t>
+            </a:r>
+            <a:r>
+              <a:rPr sz="1500" b="0" dirty="0">
+                <a:solidFill>
+                  <a:srgbClr val="1A1A1A"/>
+                </a:solidFill>
+                <a:latin typeface="Calibri"/>
+              </a:rPr>
+              <a:t> </a:t>
+            </a:r>
+            <a:r>
+              <a:rPr sz="1500" b="0" dirty="0" err="1">
+                <a:solidFill>
+                  <a:srgbClr val="1A1A1A"/>
+                </a:solidFill>
+                <a:latin typeface="Calibri"/>
+              </a:rPr>
+              <a:t>публичных</a:t>
+            </a:r>
+            <a:r>
+              <a:rPr sz="1500" b="0" dirty="0">
+                <a:solidFill>
+                  <a:srgbClr val="1A1A1A"/>
+                </a:solidFill>
+                <a:latin typeface="Calibri"/>
+              </a:rPr>
+              <a:t> </a:t>
+            </a:r>
+            <a:r>
+              <a:rPr sz="1500" b="0" dirty="0" err="1">
+                <a:solidFill>
+                  <a:srgbClr val="1A1A1A"/>
+                </a:solidFill>
+                <a:latin typeface="Calibri"/>
+              </a:rPr>
+              <a:t>ключей</a:t>
+            </a:r>
+            <a:endParaRPr sz="1500" b="0" dirty="0">
+              <a:solidFill>
+                <a:srgbClr val="1A1A1A"/>
+              </a:solidFill>
+              <a:latin typeface="Calibri"/>
+            </a:endParaRPr>
           </a:p>
         </p:txBody>
       </p:sp>
@@ -9573,7 +11328,7 @@
         <p:spPr>
           <a:xfrm>
             <a:off x="4860000" y="2951999"/>
-            <a:ext cx="2520000" cy="540000"/>
+            <a:ext cx="2520000" cy="430887"/>
           </a:xfrm>
           <a:prstGeom prst="rect">
             <a:avLst/>
@@ -9581,33 +11336,84 @@
           <a:noFill/>
         </p:spPr>
         <p:txBody>
-          <a:bodyPr wrap="square" lIns="0" rIns="0" tIns="0" bIns="0">
+          <a:bodyPr wrap="square" lIns="0" tIns="0" rIns="0" bIns="0">
             <a:spAutoFit/>
           </a:bodyPr>
           <a:lstStyle/>
           <a:p>
             <a:pPr algn="ctr"/>
             <a:r>
-              <a:rPr sz="1400" b="1">
+              <a:rPr sz="1400" b="1" dirty="0">
                 <a:solidFill>
                   <a:srgbClr val="1F3A68"/>
                 </a:solidFill>
                 <a:latin typeface="Calibri"/>
               </a:rPr>
-              <a:t>USB CDC ACM</a:t>
+              <a:t>USB CDC </a:t>
             </a:r>
           </a:p>
           <a:p>
             <a:pPr algn="ctr"/>
             <a:r>
-              <a:rPr sz="1400" b="1">
+              <a:rPr sz="1400" b="1" dirty="0">
                 <a:solidFill>
                   <a:srgbClr val="1F3A68"/>
                 </a:solidFill>
                 <a:latin typeface="Calibri"/>
               </a:rPr>
-              <a:t>«запрос – ответ», 8 команд</a:t>
-            </a:r>
+              <a:t>«</a:t>
+            </a:r>
+            <a:r>
+              <a:rPr sz="1400" b="1" dirty="0" err="1">
+                <a:solidFill>
+                  <a:srgbClr val="1F3A68"/>
+                </a:solidFill>
+                <a:latin typeface="Calibri"/>
+              </a:rPr>
+              <a:t>запрос</a:t>
+            </a:r>
+            <a:r>
+              <a:rPr sz="1400" b="1" dirty="0">
+                <a:solidFill>
+                  <a:srgbClr val="1F3A68"/>
+                </a:solidFill>
+                <a:latin typeface="Calibri"/>
+              </a:rPr>
+              <a:t> – </a:t>
+            </a:r>
+            <a:r>
+              <a:rPr sz="1400" b="1" dirty="0" err="1">
+                <a:solidFill>
+                  <a:srgbClr val="1F3A68"/>
+                </a:solidFill>
+                <a:latin typeface="Calibri"/>
+              </a:rPr>
+              <a:t>ответ</a:t>
+            </a:r>
+            <a:r>
+              <a:rPr sz="1400" b="1" dirty="0">
+                <a:solidFill>
+                  <a:srgbClr val="1F3A68"/>
+                </a:solidFill>
+                <a:latin typeface="Calibri"/>
+              </a:rPr>
+              <a:t>», 8 </a:t>
+            </a:r>
+            <a:r>
+              <a:rPr sz="1400" b="1" dirty="0" err="1">
+                <a:solidFill>
+                  <a:srgbClr val="1F3A68"/>
+                </a:solidFill>
+                <a:latin typeface="Calibri"/>
+              </a:rPr>
+              <a:t>команд</a:t>
+            </a:r>
+            <a:endParaRPr sz="1400" b="1" dirty="0">
+              <a:solidFill>
+                <a:srgbClr val="1F3A68"/>
+              </a:solidFill>
+              <a:latin typeface="Calibri"/>
+            </a:endParaRPr>
           </a:p>
         </p:txBody>
       </p:sp>
@@ -9651,6 +11457,7 @@
           <a:lstStyle/>
           <a:p>
             <a:pPr algn="ctr"/>
+            <a:endParaRPr/>
           </a:p>
         </p:txBody>
       </p:sp>
@@ -9696,6 +11503,7 @@
           <a:lstStyle/>
           <a:p>
             <a:pPr algn="ctr"/>
+            <a:endParaRPr/>
           </a:p>
         </p:txBody>
       </p:sp>
@@ -9716,7 +11524,7 @@
           <a:noFill/>
         </p:spPr>
         <p:txBody>
-          <a:bodyPr wrap="square" lIns="0" rIns="0" tIns="0" bIns="0">
+          <a:bodyPr wrap="square" lIns="0" tIns="0" rIns="0" bIns="0">
             <a:spAutoFit/>
           </a:bodyPr>
           <a:lstStyle/>
@@ -9743,7 +11551,7 @@
         <p:spPr>
           <a:xfrm>
             <a:off x="7740000" y="2340000"/>
-            <a:ext cx="3600000" cy="2520000"/>
+            <a:ext cx="3600000" cy="923330"/>
           </a:xfrm>
           <a:prstGeom prst="rect">
             <a:avLst/>
@@ -9751,62 +11559,134 @@
           <a:noFill/>
         </p:spPr>
         <p:txBody>
-          <a:bodyPr wrap="square" lIns="0" rIns="0" tIns="0" bIns="0">
+          <a:bodyPr wrap="square" lIns="0" tIns="0" rIns="0" bIns="0">
             <a:spAutoFit/>
           </a:bodyPr>
           <a:lstStyle/>
           <a:p>
             <a:pPr algn="l"/>
             <a:r>
-              <a:rPr sz="1500" b="0">
-                <a:solidFill>
-                  <a:srgbClr val="1A1A1A"/>
-                </a:solidFill>
-                <a:latin typeface="Calibri"/>
-              </a:rPr>
-              <a:t>•  bee2 (belt, belt-hash, bign)</a:t>
-            </a:r>
-          </a:p>
-          <a:p>
-            <a:pPr algn="l"/>
-            <a:r>
-              <a:rPr sz="1500" b="0">
-                <a:solidFill>
-                  <a:srgbClr val="1A1A1A"/>
-                </a:solidFill>
-                <a:latin typeface="Calibri"/>
-              </a:rPr>
-              <a:t>•  usb_protocol — диспетчер</a:t>
-            </a:r>
-          </a:p>
-          <a:p>
-            <a:pPr algn="l"/>
-            <a:r>
-              <a:rPr sz="1500" b="0">
-                <a:solidFill>
-                  <a:srgbClr val="1A1A1A"/>
-                </a:solidFill>
-                <a:latin typeface="Calibri"/>
-              </a:rPr>
-              <a:t>•  key_storage — Flash 0x0801FC00</a:t>
-            </a:r>
-          </a:p>
-          <a:p>
-            <a:pPr algn="l"/>
-            <a:r>
-              <a:rPr sz="1500" b="0">
-                <a:solidFill>
-                  <a:srgbClr val="1A1A1A"/>
-                </a:solidFill>
-                <a:latin typeface="Calibri"/>
-              </a:rPr>
-              <a:t>•  rng_stm32 — сбор энтропии</a:t>
-            </a:r>
-          </a:p>
-          <a:p>
-            <a:pPr algn="l"/>
-            <a:r>
-              <a:rPr sz="1500" b="0">
+              <a:rPr sz="1500" b="0" dirty="0">
+                <a:solidFill>
+                  <a:srgbClr val="1A1A1A"/>
+                </a:solidFill>
+                <a:latin typeface="Calibri"/>
+              </a:rPr>
+              <a:t>•  bee2 (belt, belt-hash, </a:t>
+            </a:r>
+            <a:r>
+              <a:rPr sz="1500" b="0" dirty="0" err="1">
+                <a:solidFill>
+                  <a:srgbClr val="1A1A1A"/>
+                </a:solidFill>
+                <a:latin typeface="Calibri"/>
+              </a:rPr>
+              <a:t>bign</a:t>
+            </a:r>
+            <a:r>
+              <a:rPr sz="1500" b="0" dirty="0">
+                <a:solidFill>
+                  <a:srgbClr val="1A1A1A"/>
+                </a:solidFill>
+                <a:latin typeface="Calibri"/>
+              </a:rPr>
+              <a:t>)</a:t>
+            </a:r>
+          </a:p>
+          <a:p>
+            <a:pPr algn="l"/>
+            <a:r>
+              <a:rPr sz="1500" b="0" dirty="0">
+                <a:solidFill>
+                  <a:srgbClr val="1A1A1A"/>
+                </a:solidFill>
+                <a:latin typeface="Calibri"/>
+              </a:rPr>
+              <a:t>•  </a:t>
+            </a:r>
+            <a:r>
+              <a:rPr sz="1500" b="0" dirty="0" err="1">
+                <a:solidFill>
+                  <a:srgbClr val="1A1A1A"/>
+                </a:solidFill>
+                <a:latin typeface="Calibri"/>
+              </a:rPr>
+              <a:t>usb_protocol</a:t>
+            </a:r>
+            <a:r>
+              <a:rPr sz="1500" b="0" dirty="0">
+                <a:solidFill>
+                  <a:srgbClr val="1A1A1A"/>
+                </a:solidFill>
+                <a:latin typeface="Calibri"/>
+              </a:rPr>
+              <a:t> — </a:t>
+            </a:r>
+            <a:r>
+              <a:rPr sz="1500" b="0" dirty="0" err="1">
+                <a:solidFill>
+                  <a:srgbClr val="1A1A1A"/>
+                </a:solidFill>
+                <a:latin typeface="Calibri"/>
+              </a:rPr>
+              <a:t>диспетчер</a:t>
+            </a:r>
+            <a:endParaRPr sz="1500" b="0" dirty="0">
+              <a:solidFill>
+                <a:srgbClr val="1A1A1A"/>
+              </a:solidFill>
+              <a:latin typeface="Calibri"/>
+            </a:endParaRPr>
+          </a:p>
+          <a:p>
+            <a:pPr algn="l"/>
+            <a:r>
+              <a:rPr sz="1500" b="0" dirty="0">
+                <a:solidFill>
+                  <a:srgbClr val="1A1A1A"/>
+                </a:solidFill>
+                <a:latin typeface="Calibri"/>
+              </a:rPr>
+              <a:t>•  rng_stm32 — </a:t>
+            </a:r>
+            <a:r>
+              <a:rPr sz="1500" b="0" dirty="0" err="1">
+                <a:solidFill>
+                  <a:srgbClr val="1A1A1A"/>
+                </a:solidFill>
+                <a:latin typeface="Calibri"/>
+              </a:rPr>
+              <a:t>сбор</a:t>
+            </a:r>
+            <a:r>
+              <a:rPr sz="1500" b="0" dirty="0">
+                <a:solidFill>
+                  <a:srgbClr val="1A1A1A"/>
+                </a:solidFill>
+                <a:latin typeface="Calibri"/>
+              </a:rPr>
+              <a:t> </a:t>
+            </a:r>
+            <a:r>
+              <a:rPr sz="1500" b="0" dirty="0" err="1">
+                <a:solidFill>
+                  <a:srgbClr val="1A1A1A"/>
+                </a:solidFill>
+                <a:latin typeface="Calibri"/>
+              </a:rPr>
+              <a:t>энтропии</a:t>
+            </a:r>
+            <a:endParaRPr sz="1500" b="0" dirty="0">
+              <a:solidFill>
+                <a:srgbClr val="1A1A1A"/>
+              </a:solidFill>
+              <a:latin typeface="Calibri"/>
+            </a:endParaRPr>
+          </a:p>
+          <a:p>
+            <a:pPr algn="l"/>
+            <a:r>
+              <a:rPr sz="1500" b="0" dirty="0">
                 <a:solidFill>
                   <a:srgbClr val="1A1A1A"/>
                 </a:solidFill>
@@ -9834,7 +11714,7 @@
           <a:noFill/>
         </p:spPr>
         <p:txBody>
-          <a:bodyPr wrap="square" lIns="0" rIns="0" tIns="0" bIns="0">
+          <a:bodyPr wrap="square" lIns="0" tIns="0" rIns="0" bIns="0">
             <a:spAutoFit/>
           </a:bodyPr>
           <a:lstStyle/>
@@ -9869,7 +11749,7 @@
           <a:noFill/>
         </p:spPr>
         <p:txBody>
-          <a:bodyPr wrap="square" lIns="0" rIns="0" tIns="0" bIns="0">
+          <a:bodyPr wrap="square" lIns="0" tIns="0" rIns="0" bIns="0">
             <a:spAutoFit/>
           </a:bodyPr>
           <a:lstStyle/>
@@ -9904,7 +11784,7 @@
           <a:noFill/>
         </p:spPr>
         <p:txBody>
-          <a:bodyPr wrap="square" lIns="0" rIns="0" tIns="0" bIns="0">
+          <a:bodyPr wrap="square" lIns="0" tIns="0" rIns="0" bIns="0">
             <a:spAutoFit/>
           </a:bodyPr>
           <a:lstStyle/>
@@ -9931,7 +11811,7 @@
 </file>
 
 <file path=ppt/slides/slide6.xml><?xml version="1.0" encoding="utf-8"?>
-<p:sld xmlns:a="http://schemas.openxmlformats.org/drawingml/2006/main" xmlns:p="http://schemas.openxmlformats.org/presentationml/2006/main" xmlns:r="http://schemas.openxmlformats.org/officeDocument/2006/relationships">
+<p:sld xmlns:a="http://schemas.openxmlformats.org/drawingml/2006/main" xmlns:r="http://schemas.openxmlformats.org/officeDocument/2006/relationships" xmlns:p="http://schemas.openxmlformats.org/presentationml/2006/main">
   <p:cSld>
     <p:spTree>
       <p:nvGrpSpPr>
@@ -9939,7 +11819,14 @@
         <p:cNvGrpSpPr/>
         <p:nvPr/>
       </p:nvGrpSpPr>
-      <p:grpSpPr/>
+      <p:grpSpPr>
+        <a:xfrm>
+          <a:off x="0" y="0"/>
+          <a:ext cx="0" cy="0"/>
+          <a:chOff x="0" y="0"/>
+          <a:chExt cx="0" cy="0"/>
+        </a:xfrm>
+      </p:grpSpPr>
       <p:sp>
         <p:nvSpPr>
           <p:cNvPr id="2" name="Rectangle 1"/>
@@ -9980,6 +11867,7 @@
           <a:lstStyle/>
           <a:p>
             <a:pPr algn="ctr"/>
+            <a:endParaRPr/>
           </a:p>
         </p:txBody>
       </p:sp>
@@ -10000,7 +11888,7 @@
           <a:noFill/>
         </p:spPr>
         <p:txBody>
-          <a:bodyPr wrap="square" lIns="0" rIns="0" tIns="0" bIns="0">
+          <a:bodyPr wrap="square" lIns="0" tIns="0" rIns="0" bIns="0">
             <a:spAutoFit/>
           </a:bodyPr>
           <a:lstStyle/>
@@ -10058,6 +11946,7 @@
           <a:lstStyle/>
           <a:p>
             <a:pPr algn="ctr"/>
+            <a:endParaRPr/>
           </a:p>
         </p:txBody>
       </p:sp>
@@ -10078,7 +11967,7 @@
           <a:noFill/>
         </p:spPr>
         <p:txBody>
-          <a:bodyPr wrap="square" lIns="0" rIns="0" tIns="0" bIns="0">
+          <a:bodyPr wrap="square" lIns="0" tIns="0" rIns="0" bIns="0">
             <a:spAutoFit/>
           </a:bodyPr>
           <a:lstStyle/>
@@ -10165,7 +12054,7 @@
         <p:spPr>
           <a:xfrm>
             <a:off x="6120000" y="1260000"/>
-            <a:ext cx="5400000" cy="360000"/>
+            <a:ext cx="5400000" cy="276999"/>
           </a:xfrm>
           <a:prstGeom prst="rect">
             <a:avLst/>
@@ -10173,21 +12062,81 @@
           <a:noFill/>
         </p:spPr>
         <p:txBody>
-          <a:bodyPr wrap="square" lIns="0" rIns="0" tIns="0" bIns="0">
+          <a:bodyPr wrap="square" lIns="0" tIns="0" rIns="0" bIns="0">
             <a:spAutoFit/>
           </a:bodyPr>
           <a:lstStyle/>
           <a:p>
             <a:pPr algn="l"/>
             <a:r>
-              <a:rPr sz="1800" b="1">
+              <a:rPr sz="1800" b="1" dirty="0" err="1">
                 <a:solidFill>
                   <a:srgbClr val="1F3A68"/>
                 </a:solidFill>
                 <a:latin typeface="Calibri"/>
               </a:rPr>
-              <a:t>Почему именно этот МК</a:t>
-            </a:r>
+              <a:t>Почему</a:t>
+            </a:r>
+            <a:r>
+              <a:rPr sz="1800" b="1" dirty="0">
+                <a:solidFill>
+                  <a:srgbClr val="1F3A68"/>
+                </a:solidFill>
+                <a:latin typeface="Calibri"/>
+              </a:rPr>
+              <a:t> </a:t>
+            </a:r>
+            <a:r>
+              <a:rPr sz="1800" b="1" dirty="0" err="1">
+                <a:solidFill>
+                  <a:srgbClr val="1F3A68"/>
+                </a:solidFill>
+                <a:latin typeface="Calibri"/>
+              </a:rPr>
+              <a:t>именно</a:t>
+            </a:r>
+            <a:r>
+              <a:rPr sz="1800" b="1" dirty="0">
+                <a:solidFill>
+                  <a:srgbClr val="1F3A68"/>
+                </a:solidFill>
+                <a:latin typeface="Calibri"/>
+              </a:rPr>
+              <a:t> </a:t>
+            </a:r>
+            <a:r>
+              <a:rPr sz="1800" b="1" dirty="0" err="1">
+                <a:solidFill>
+                  <a:srgbClr val="1F3A68"/>
+                </a:solidFill>
+                <a:latin typeface="Calibri"/>
+              </a:rPr>
+              <a:t>этот</a:t>
+            </a:r>
+            <a:r>
+              <a:rPr sz="1800" b="1" dirty="0">
+                <a:solidFill>
+                  <a:srgbClr val="1F3A68"/>
+                </a:solidFill>
+                <a:latin typeface="Calibri"/>
+              </a:rPr>
+              <a:t> МК</a:t>
+            </a:r>
+            <a:r>
+              <a:rPr lang="ru-RU" sz="1800" b="1" dirty="0">
+                <a:solidFill>
+                  <a:srgbClr val="1F3A68"/>
+                </a:solidFill>
+                <a:latin typeface="Calibri"/>
+              </a:rPr>
+              <a:t>?</a:t>
+            </a:r>
+            <a:endParaRPr sz="1800" b="1" dirty="0">
+              <a:solidFill>
+                <a:srgbClr val="1F3A68"/>
+              </a:solidFill>
+              <a:latin typeface="Calibri"/>
+            </a:endParaRPr>
           </a:p>
         </p:txBody>
       </p:sp>
@@ -10208,7 +12157,7 @@
           <a:noFill/>
         </p:spPr>
         <p:txBody>
-          <a:bodyPr wrap="square" lIns="0" rIns="0" tIns="0" bIns="0">
+          <a:bodyPr wrap="square" lIns="0" tIns="0" rIns="0" bIns="0">
             <a:spAutoFit/>
           </a:bodyPr>
           <a:lstStyle/>
@@ -10315,7 +12264,7 @@
           <a:noFill/>
         </p:spPr>
         <p:txBody>
-          <a:bodyPr wrap="square" lIns="0" rIns="0" tIns="0" bIns="0">
+          <a:bodyPr wrap="square" lIns="0" tIns="0" rIns="0" bIns="0">
             <a:spAutoFit/>
           </a:bodyPr>
           <a:lstStyle/>
@@ -10350,7 +12299,7 @@
           <a:noFill/>
         </p:spPr>
         <p:txBody>
-          <a:bodyPr wrap="square" lIns="0" rIns="0" tIns="0" bIns="0">
+          <a:bodyPr wrap="square" lIns="0" tIns="0" rIns="0" bIns="0">
             <a:spAutoFit/>
           </a:bodyPr>
           <a:lstStyle/>
@@ -10377,7 +12326,7 @@
 </file>
 
 <file path=ppt/slides/slide7.xml><?xml version="1.0" encoding="utf-8"?>
-<p:sld xmlns:a="http://schemas.openxmlformats.org/drawingml/2006/main" xmlns:p="http://schemas.openxmlformats.org/presentationml/2006/main" xmlns:r="http://schemas.openxmlformats.org/officeDocument/2006/relationships">
+<p:sld xmlns:a="http://schemas.openxmlformats.org/drawingml/2006/main" xmlns:r="http://schemas.openxmlformats.org/officeDocument/2006/relationships" xmlns:p="http://schemas.openxmlformats.org/presentationml/2006/main">
   <p:cSld>
     <p:spTree>
       <p:nvGrpSpPr>
@@ -10385,7 +12334,14 @@
         <p:cNvGrpSpPr/>
         <p:nvPr/>
       </p:nvGrpSpPr>
-      <p:grpSpPr/>
+      <p:grpSpPr>
+        <a:xfrm>
+          <a:off x="0" y="0"/>
+          <a:ext cx="0" cy="0"/>
+          <a:chOff x="0" y="0"/>
+          <a:chExt cx="0" cy="0"/>
+        </a:xfrm>
+      </p:grpSpPr>
       <p:sp>
         <p:nvSpPr>
           <p:cNvPr id="2" name="Rectangle 1"/>
@@ -10426,6 +12382,7 @@
           <a:lstStyle/>
           <a:p>
             <a:pPr algn="ctr"/>
+            <a:endParaRPr/>
           </a:p>
         </p:txBody>
       </p:sp>
@@ -10446,7 +12403,7 @@
           <a:noFill/>
         </p:spPr>
         <p:txBody>
-          <a:bodyPr wrap="square" lIns="0" rIns="0" tIns="0" bIns="0">
+          <a:bodyPr wrap="square" lIns="0" tIns="0" rIns="0" bIns="0">
             <a:spAutoFit/>
           </a:bodyPr>
           <a:lstStyle/>
@@ -10504,6 +12461,7 @@
           <a:lstStyle/>
           <a:p>
             <a:pPr algn="ctr"/>
+            <a:endParaRPr/>
           </a:p>
         </p:txBody>
       </p:sp>
@@ -10524,7 +12482,7 @@
           <a:noFill/>
         </p:spPr>
         <p:txBody>
-          <a:bodyPr wrap="square" lIns="0" rIns="0" tIns="0" bIns="0">
+          <a:bodyPr wrap="square" lIns="0" tIns="0" rIns="0" bIns="0">
             <a:spAutoFit/>
           </a:bodyPr>
           <a:lstStyle/>
@@ -10561,8 +12519,20 @@
                 <a:tableStyleId>{5C22544A-7EE6-4342-B048-85BDC9FD1C3A}</a:tableStyleId>
               </a:tblPr>
               <a:tblGrid>
-                <a:gridCol w="3240000"/>
-                <a:gridCol w="7740000"/>
+                <a:gridCol w="3240000">
+                  <a:extLst>
+                    <a:ext uri="{9D8B030D-6E8A-4147-A177-3AD203B41FA5}">
+                      <a16:colId xmlns:a16="http://schemas.microsoft.com/office/drawing/2014/main" val="20000"/>
+                    </a:ext>
+                  </a:extLst>
+                </a:gridCol>
+                <a:gridCol w="7740000">
+                  <a:extLst>
+                    <a:ext uri="{9D8B030D-6E8A-4147-A177-3AD203B41FA5}">
+                      <a16:colId xmlns:a16="http://schemas.microsoft.com/office/drawing/2014/main" val="20001"/>
+                    </a:ext>
+                  </a:extLst>
+                </a:gridCol>
               </a:tblGrid>
               <a:tr h="460000">
                 <a:tc>
@@ -10609,6 +12579,11 @@
                     </a:solidFill>
                   </a:tcPr>
                 </a:tc>
+                <a:extLst>
+                  <a:ext uri="{0D108BD9-81ED-4DB2-BD59-A6C34878D82A}">
+                    <a16:rowId xmlns:a16="http://schemas.microsoft.com/office/drawing/2014/main" val="10000"/>
+                  </a:ext>
+                </a:extLst>
               </a:tr>
               <a:tr h="460000">
                 <a:tc>
@@ -10655,6 +12630,11 @@
                     </a:solidFill>
                   </a:tcPr>
                 </a:tc>
+                <a:extLst>
+                  <a:ext uri="{0D108BD9-81ED-4DB2-BD59-A6C34878D82A}">
+                    <a16:rowId xmlns:a16="http://schemas.microsoft.com/office/drawing/2014/main" val="10001"/>
+                  </a:ext>
+                </a:extLst>
               </a:tr>
               <a:tr h="460000">
                 <a:tc>
@@ -10701,6 +12681,11 @@
                     </a:solidFill>
                   </a:tcPr>
                 </a:tc>
+                <a:extLst>
+                  <a:ext uri="{0D108BD9-81ED-4DB2-BD59-A6C34878D82A}">
+                    <a16:rowId xmlns:a16="http://schemas.microsoft.com/office/drawing/2014/main" val="10002"/>
+                  </a:ext>
+                </a:extLst>
               </a:tr>
               <a:tr h="460000">
                 <a:tc>
@@ -10747,6 +12732,11 @@
                     </a:solidFill>
                   </a:tcPr>
                 </a:tc>
+                <a:extLst>
+                  <a:ext uri="{0D108BD9-81ED-4DB2-BD59-A6C34878D82A}">
+                    <a16:rowId xmlns:a16="http://schemas.microsoft.com/office/drawing/2014/main" val="10003"/>
+                  </a:ext>
+                </a:extLst>
               </a:tr>
               <a:tr h="460000">
                 <a:tc>
@@ -10793,6 +12783,11 @@
                     </a:solidFill>
                   </a:tcPr>
                 </a:tc>
+                <a:extLst>
+                  <a:ext uri="{0D108BD9-81ED-4DB2-BD59-A6C34878D82A}">
+                    <a16:rowId xmlns:a16="http://schemas.microsoft.com/office/drawing/2014/main" val="10004"/>
+                  </a:ext>
+                </a:extLst>
               </a:tr>
               <a:tr h="460000">
                 <a:tc>
@@ -10839,6 +12834,11 @@
                     </a:solidFill>
                   </a:tcPr>
                 </a:tc>
+                <a:extLst>
+                  <a:ext uri="{0D108BD9-81ED-4DB2-BD59-A6C34878D82A}">
+                    <a16:rowId xmlns:a16="http://schemas.microsoft.com/office/drawing/2014/main" val="10005"/>
+                  </a:ext>
+                </a:extLst>
               </a:tr>
               <a:tr h="460000">
                 <a:tc>
@@ -10885,6 +12885,11 @@
                     </a:solidFill>
                   </a:tcPr>
                 </a:tc>
+                <a:extLst>
+                  <a:ext uri="{0D108BD9-81ED-4DB2-BD59-A6C34878D82A}">
+                    <a16:rowId xmlns:a16="http://schemas.microsoft.com/office/drawing/2014/main" val="10006"/>
+                  </a:ext>
+                </a:extLst>
               </a:tr>
               <a:tr h="460000">
                 <a:tc>
@@ -10931,6 +12936,11 @@
                     </a:solidFill>
                   </a:tcPr>
                 </a:tc>
+                <a:extLst>
+                  <a:ext uri="{0D108BD9-81ED-4DB2-BD59-A6C34878D82A}">
+                    <a16:rowId xmlns:a16="http://schemas.microsoft.com/office/drawing/2014/main" val="10007"/>
+                  </a:ext>
+                </a:extLst>
               </a:tr>
               <a:tr h="460000">
                 <a:tc>
@@ -10977,6 +12987,11 @@
                     </a:solidFill>
                   </a:tcPr>
                 </a:tc>
+                <a:extLst>
+                  <a:ext uri="{0D108BD9-81ED-4DB2-BD59-A6C34878D82A}">
+                    <a16:rowId xmlns:a16="http://schemas.microsoft.com/office/drawing/2014/main" val="10008"/>
+                  </a:ext>
+                </a:extLst>
               </a:tr>
             </a:tbl>
           </a:graphicData>
@@ -10999,7 +13014,7 @@
           <a:noFill/>
         </p:spPr>
         <p:txBody>
-          <a:bodyPr wrap="square" lIns="0" rIns="0" tIns="0" bIns="0">
+          <a:bodyPr wrap="square" lIns="0" tIns="0" rIns="0" bIns="0">
             <a:spAutoFit/>
           </a:bodyPr>
           <a:lstStyle/>
@@ -11034,7 +13049,7 @@
           <a:noFill/>
         </p:spPr>
         <p:txBody>
-          <a:bodyPr wrap="square" lIns="0" rIns="0" tIns="0" bIns="0">
+          <a:bodyPr wrap="square" lIns="0" tIns="0" rIns="0" bIns="0">
             <a:spAutoFit/>
           </a:bodyPr>
           <a:lstStyle/>
@@ -11061,7 +13076,7 @@
 </file>
 
 <file path=ppt/slides/slide8.xml><?xml version="1.0" encoding="utf-8"?>
-<p:sld xmlns:a="http://schemas.openxmlformats.org/drawingml/2006/main" xmlns:p="http://schemas.openxmlformats.org/presentationml/2006/main" xmlns:r="http://schemas.openxmlformats.org/officeDocument/2006/relationships">
+<p:sld xmlns:a="http://schemas.openxmlformats.org/drawingml/2006/main" xmlns:r="http://schemas.openxmlformats.org/officeDocument/2006/relationships" xmlns:p="http://schemas.openxmlformats.org/presentationml/2006/main">
   <p:cSld>
     <p:spTree>
       <p:nvGrpSpPr>
@@ -11069,7 +13084,14 @@
         <p:cNvGrpSpPr/>
         <p:nvPr/>
       </p:nvGrpSpPr>
-      <p:grpSpPr/>
+      <p:grpSpPr>
+        <a:xfrm>
+          <a:off x="0" y="0"/>
+          <a:ext cx="0" cy="0"/>
+          <a:chOff x="0" y="0"/>
+          <a:chExt cx="0" cy="0"/>
+        </a:xfrm>
+      </p:grpSpPr>
       <p:sp>
         <p:nvSpPr>
           <p:cNvPr id="2" name="Rectangle 1"/>
@@ -11110,6 +13132,7 @@
           <a:lstStyle/>
           <a:p>
             <a:pPr algn="ctr"/>
+            <a:endParaRPr/>
           </a:p>
         </p:txBody>
       </p:sp>
@@ -11130,7 +13153,7 @@
           <a:noFill/>
         </p:spPr>
         <p:txBody>
-          <a:bodyPr wrap="square" lIns="0" rIns="0" tIns="0" bIns="0">
+          <a:bodyPr wrap="square" lIns="0" tIns="0" rIns="0" bIns="0">
             <a:spAutoFit/>
           </a:bodyPr>
           <a:lstStyle/>
@@ -11188,6 +13211,7 @@
           <a:lstStyle/>
           <a:p>
             <a:pPr algn="ctr"/>
+            <a:endParaRPr/>
           </a:p>
         </p:txBody>
       </p:sp>
@@ -11208,7 +13232,7 @@
           <a:noFill/>
         </p:spPr>
         <p:txBody>
-          <a:bodyPr wrap="square" lIns="0" rIns="0" tIns="0" bIns="0">
+          <a:bodyPr wrap="square" lIns="0" tIns="0" rIns="0" bIns="0">
             <a:spAutoFit/>
           </a:bodyPr>
           <a:lstStyle/>
@@ -11235,7 +13259,7 @@
         <p:spPr>
           <a:xfrm>
             <a:off x="540000" y="1548000"/>
-            <a:ext cx="5400000" cy="3600000"/>
+            <a:ext cx="5400000" cy="1831271"/>
           </a:xfrm>
           <a:prstGeom prst="rect">
             <a:avLst/>
@@ -11243,86 +13267,245 @@
           <a:noFill/>
         </p:spPr>
         <p:txBody>
-          <a:bodyPr wrap="square" lIns="0" rIns="0" tIns="0" bIns="0">
+          <a:bodyPr wrap="square" lIns="0" tIns="0" rIns="0" bIns="0">
             <a:spAutoFit/>
           </a:bodyPr>
           <a:lstStyle/>
           <a:p>
             <a:pPr algn="l"/>
             <a:r>
-              <a:rPr sz="1700" b="0">
-                <a:solidFill>
-                  <a:srgbClr val="1A1A1A"/>
-                </a:solidFill>
-                <a:latin typeface="Calibri"/>
-              </a:rPr>
-              <a:t>1. STM32 HAL (CubeMX)</a:t>
-            </a:r>
-          </a:p>
-          <a:p>
-            <a:pPr algn="l"/>
-            <a:r>
-              <a:rPr sz="1700" b="0">
-                <a:solidFill>
-                  <a:srgbClr val="1A1A1A"/>
-                </a:solidFill>
-                <a:latin typeface="Calibri"/>
-              </a:rPr>
-              <a:t>2. USB Device + USB CDC ACM</a:t>
-            </a:r>
-          </a:p>
-          <a:p>
-            <a:pPr algn="l"/>
-            <a:r>
-              <a:rPr sz="1700" b="0">
-                <a:solidFill>
-                  <a:srgbClr val="1A1A1A"/>
-                </a:solidFill>
-                <a:latin typeface="Calibri"/>
-              </a:rPr>
-              <a:t>3. usb_protocol — кадрирование и</a:t>
-            </a:r>
-          </a:p>
-          <a:p>
-            <a:pPr algn="l"/>
-            <a:r>
-              <a:rPr sz="1700" b="0">
-                <a:solidFill>
-                  <a:srgbClr val="1A1A1A"/>
-                </a:solidFill>
-                <a:latin typeface="Calibri"/>
-              </a:rPr>
-              <a:t>   диспетчер 8 команд</a:t>
-            </a:r>
-          </a:p>
-          <a:p>
-            <a:pPr algn="l"/>
-            <a:r>
-              <a:rPr sz="1700" b="0">
-                <a:solidFill>
-                  <a:srgbClr val="1A1A1A"/>
-                </a:solidFill>
-                <a:latin typeface="Calibri"/>
-              </a:rPr>
-              <a:t>4. crypto_stb — обёртка над bee2</a:t>
-            </a:r>
-          </a:p>
-          <a:p>
-            <a:pPr algn="l"/>
-            <a:r>
-              <a:rPr sz="1700" b="0">
-                <a:solidFill>
-                  <a:srgbClr val="1A1A1A"/>
-                </a:solidFill>
-                <a:latin typeface="Calibri"/>
-              </a:rPr>
-              <a:t>5. key_storage — Flash + CRC-32</a:t>
-            </a:r>
-          </a:p>
-          <a:p>
-            <a:pPr algn="l"/>
-            <a:r>
-              <a:rPr sz="1700" b="0">
+              <a:rPr sz="1700" b="0" dirty="0">
+                <a:solidFill>
+                  <a:srgbClr val="1A1A1A"/>
+                </a:solidFill>
+                <a:latin typeface="Calibri"/>
+              </a:rPr>
+              <a:t>1. STM32 HAL (</a:t>
+            </a:r>
+            <a:r>
+              <a:rPr sz="1700" b="0" dirty="0" err="1">
+                <a:solidFill>
+                  <a:srgbClr val="1A1A1A"/>
+                </a:solidFill>
+                <a:latin typeface="Calibri"/>
+              </a:rPr>
+              <a:t>CubeMX</a:t>
+            </a:r>
+            <a:r>
+              <a:rPr sz="1700" b="0" dirty="0">
+                <a:solidFill>
+                  <a:srgbClr val="1A1A1A"/>
+                </a:solidFill>
+                <a:latin typeface="Calibri"/>
+              </a:rPr>
+              <a:t>)</a:t>
+            </a:r>
+          </a:p>
+          <a:p>
+            <a:pPr algn="l"/>
+            <a:r>
+              <a:rPr sz="1700" b="0" dirty="0">
+                <a:solidFill>
+                  <a:srgbClr val="1A1A1A"/>
+                </a:solidFill>
+                <a:latin typeface="Calibri"/>
+              </a:rPr>
+              <a:t>2. USB Device + USB CDC</a:t>
+            </a:r>
+          </a:p>
+          <a:p>
+            <a:pPr algn="l"/>
+            <a:r>
+              <a:rPr sz="1700" b="0" dirty="0">
+                <a:solidFill>
+                  <a:srgbClr val="1A1A1A"/>
+                </a:solidFill>
+                <a:latin typeface="Calibri"/>
+              </a:rPr>
+              <a:t>3. </a:t>
+            </a:r>
+            <a:r>
+              <a:rPr sz="1700" b="0" dirty="0" err="1">
+                <a:solidFill>
+                  <a:srgbClr val="1A1A1A"/>
+                </a:solidFill>
+                <a:latin typeface="Calibri"/>
+              </a:rPr>
+              <a:t>usb_protocol</a:t>
+            </a:r>
+            <a:r>
+              <a:rPr sz="1700" b="0" dirty="0">
+                <a:solidFill>
+                  <a:srgbClr val="1A1A1A"/>
+                </a:solidFill>
+                <a:latin typeface="Calibri"/>
+              </a:rPr>
+              <a:t> — </a:t>
+            </a:r>
+            <a:r>
+              <a:rPr sz="1700" b="0" dirty="0" err="1">
+                <a:solidFill>
+                  <a:srgbClr val="1A1A1A"/>
+                </a:solidFill>
+                <a:latin typeface="Calibri"/>
+              </a:rPr>
+              <a:t>кадрирование</a:t>
+            </a:r>
+            <a:r>
+              <a:rPr sz="1700" b="0" dirty="0">
+                <a:solidFill>
+                  <a:srgbClr val="1A1A1A"/>
+                </a:solidFill>
+                <a:latin typeface="Calibri"/>
+              </a:rPr>
+              <a:t> и</a:t>
+            </a:r>
+          </a:p>
+          <a:p>
+            <a:pPr algn="l"/>
+            <a:r>
+              <a:rPr sz="1700" b="0" dirty="0">
+                <a:solidFill>
+                  <a:srgbClr val="1A1A1A"/>
+                </a:solidFill>
+                <a:latin typeface="Calibri"/>
+              </a:rPr>
+              <a:t>   </a:t>
+            </a:r>
+            <a:r>
+              <a:rPr sz="1700" b="0" dirty="0" err="1">
+                <a:solidFill>
+                  <a:srgbClr val="1A1A1A"/>
+                </a:solidFill>
+                <a:latin typeface="Calibri"/>
+              </a:rPr>
+              <a:t>диспетчер</a:t>
+            </a:r>
+            <a:r>
+              <a:rPr sz="1700" b="0" dirty="0">
+                <a:solidFill>
+                  <a:srgbClr val="1A1A1A"/>
+                </a:solidFill>
+                <a:latin typeface="Calibri"/>
+              </a:rPr>
+              <a:t> 8 </a:t>
+            </a:r>
+            <a:r>
+              <a:rPr sz="1700" b="0" dirty="0" err="1">
+                <a:solidFill>
+                  <a:srgbClr val="1A1A1A"/>
+                </a:solidFill>
+                <a:latin typeface="Calibri"/>
+              </a:rPr>
+              <a:t>команд</a:t>
+            </a:r>
+            <a:endParaRPr sz="1700" b="0" dirty="0">
+              <a:solidFill>
+                <a:srgbClr val="1A1A1A"/>
+              </a:solidFill>
+              <a:latin typeface="Calibri"/>
+            </a:endParaRPr>
+          </a:p>
+          <a:p>
+            <a:pPr algn="l"/>
+            <a:r>
+              <a:rPr sz="1700" b="0" dirty="0">
+                <a:solidFill>
+                  <a:srgbClr val="1A1A1A"/>
+                </a:solidFill>
+                <a:latin typeface="Calibri"/>
+              </a:rPr>
+              <a:t>4. </a:t>
+            </a:r>
+            <a:r>
+              <a:rPr sz="1700" b="0" dirty="0" err="1">
+                <a:solidFill>
+                  <a:srgbClr val="1A1A1A"/>
+                </a:solidFill>
+                <a:latin typeface="Calibri"/>
+              </a:rPr>
+              <a:t>crypto_stb</a:t>
+            </a:r>
+            <a:r>
+              <a:rPr sz="1700" b="0" dirty="0">
+                <a:solidFill>
+                  <a:srgbClr val="1A1A1A"/>
+                </a:solidFill>
+                <a:latin typeface="Calibri"/>
+              </a:rPr>
+              <a:t> — </a:t>
+            </a:r>
+            <a:r>
+              <a:rPr sz="1700" b="0" dirty="0" err="1">
+                <a:solidFill>
+                  <a:srgbClr val="1A1A1A"/>
+                </a:solidFill>
+                <a:latin typeface="Calibri"/>
+              </a:rPr>
+              <a:t>обёртка</a:t>
+            </a:r>
+            <a:r>
+              <a:rPr sz="1700" b="0" dirty="0">
+                <a:solidFill>
+                  <a:srgbClr val="1A1A1A"/>
+                </a:solidFill>
+                <a:latin typeface="Calibri"/>
+              </a:rPr>
+              <a:t> </a:t>
+            </a:r>
+            <a:r>
+              <a:rPr sz="1700" b="0" dirty="0" err="1">
+                <a:solidFill>
+                  <a:srgbClr val="1A1A1A"/>
+                </a:solidFill>
+                <a:latin typeface="Calibri"/>
+              </a:rPr>
+              <a:t>над</a:t>
+            </a:r>
+            <a:r>
+              <a:rPr sz="1700" b="0" dirty="0">
+                <a:solidFill>
+                  <a:srgbClr val="1A1A1A"/>
+                </a:solidFill>
+                <a:latin typeface="Calibri"/>
+              </a:rPr>
+              <a:t> bee2</a:t>
+            </a:r>
+          </a:p>
+          <a:p>
+            <a:pPr algn="l"/>
+            <a:r>
+              <a:rPr sz="1700" b="0" dirty="0">
+                <a:solidFill>
+                  <a:srgbClr val="1A1A1A"/>
+                </a:solidFill>
+                <a:latin typeface="Calibri"/>
+              </a:rPr>
+              <a:t>5. </a:t>
+            </a:r>
+            <a:r>
+              <a:rPr sz="1700" b="0" dirty="0" err="1">
+                <a:solidFill>
+                  <a:srgbClr val="1A1A1A"/>
+                </a:solidFill>
+                <a:latin typeface="Calibri"/>
+              </a:rPr>
+              <a:t>key_storage</a:t>
+            </a:r>
+            <a:r>
+              <a:rPr sz="1700" b="0" dirty="0">
+                <a:solidFill>
+                  <a:srgbClr val="1A1A1A"/>
+                </a:solidFill>
+                <a:latin typeface="Calibri"/>
+              </a:rPr>
+              <a:t> — Flash + CRC-32</a:t>
+            </a:r>
+          </a:p>
+          <a:p>
+            <a:pPr algn="l"/>
+            <a:r>
+              <a:rPr sz="1700" b="0" dirty="0">
                 <a:solidFill>
                   <a:srgbClr val="1A1A1A"/>
                 </a:solidFill>
@@ -11350,7 +13533,7 @@
           <a:noFill/>
         </p:spPr>
         <p:txBody>
-          <a:bodyPr wrap="square" lIns="0" rIns="0" tIns="0" bIns="0">
+          <a:bodyPr wrap="square" lIns="0" tIns="0" rIns="0" bIns="0">
             <a:spAutoFit/>
           </a:bodyPr>
           <a:lstStyle/>
@@ -11385,26 +13568,62 @@
           <a:noFill/>
         </p:spPr>
         <p:txBody>
-          <a:bodyPr wrap="square" lIns="0" rIns="0" tIns="0" bIns="0">
+          <a:bodyPr wrap="square" lIns="0" tIns="0" rIns="0" bIns="0">
             <a:spAutoFit/>
           </a:bodyPr>
           <a:lstStyle/>
           <a:p>
             <a:pPr algn="l"/>
             <a:r>
-              <a:rPr sz="1700" b="0">
-                <a:solidFill>
-                  <a:srgbClr val="1A1A1A"/>
-                </a:solidFill>
-                <a:latin typeface="Calibri"/>
-              </a:rPr>
-              <a:t>•  Последняя страница Flash:</a:t>
-            </a:r>
-          </a:p>
-          <a:p>
-            <a:pPr algn="l"/>
-            <a:r>
-              <a:rPr sz="1700" b="0">
+              <a:rPr sz="1700" b="0" dirty="0">
+                <a:solidFill>
+                  <a:srgbClr val="1A1A1A"/>
+                </a:solidFill>
+                <a:latin typeface="Calibri"/>
+              </a:rPr>
+              <a:t>•  </a:t>
+            </a:r>
+            <a:r>
+              <a:rPr sz="1700" b="0" dirty="0" err="1">
+                <a:solidFill>
+                  <a:srgbClr val="1A1A1A"/>
+                </a:solidFill>
+                <a:latin typeface="Calibri"/>
+              </a:rPr>
+              <a:t>Последняя</a:t>
+            </a:r>
+            <a:r>
+              <a:rPr sz="1700" b="0" dirty="0">
+                <a:solidFill>
+                  <a:srgbClr val="1A1A1A"/>
+                </a:solidFill>
+                <a:latin typeface="Calibri"/>
+              </a:rPr>
+              <a:t> </a:t>
+            </a:r>
+            <a:r>
+              <a:rPr sz="1700" b="0" dirty="0" err="1">
+                <a:solidFill>
+                  <a:srgbClr val="1A1A1A"/>
+                </a:solidFill>
+                <a:latin typeface="Calibri"/>
+              </a:rPr>
+              <a:t>страница</a:t>
+            </a:r>
+            <a:r>
+              <a:rPr sz="1700" b="0" dirty="0">
+                <a:solidFill>
+                  <a:srgbClr val="1A1A1A"/>
+                </a:solidFill>
+                <a:latin typeface="Calibri"/>
+              </a:rPr>
+              <a:t> Flash:</a:t>
+            </a:r>
+          </a:p>
+          <a:p>
+            <a:pPr algn="l"/>
+            <a:r>
+              <a:rPr sz="1700" b="0" dirty="0">
                 <a:solidFill>
                   <a:srgbClr val="1A1A1A"/>
                 </a:solidFill>
@@ -11416,7 +13635,7 @@
           <a:p>
             <a:pPr algn="l"/>
             <a:r>
-              <a:rPr sz="1700" b="0">
+              <a:rPr sz="1700" b="0" dirty="0">
                 <a:solidFill>
                   <a:srgbClr val="1A1A1A"/>
                 </a:solidFill>
@@ -11428,50 +13647,260 @@
           <a:p>
             <a:pPr algn="l"/>
             <a:r>
-              <a:rPr sz="1700" b="0">
-                <a:solidFill>
-                  <a:srgbClr val="1A1A1A"/>
-                </a:solidFill>
-                <a:latin typeface="Calibri"/>
-              </a:rPr>
-              <a:t>•  Защита целостности по CRC</a:t>
-            </a:r>
-          </a:p>
-          <a:p>
-            <a:pPr algn="l"/>
-            <a:r>
-              <a:rPr sz="1700" b="0">
-                <a:solidFill>
-                  <a:srgbClr val="1A1A1A"/>
-                </a:solidFill>
-                <a:latin typeface="Calibri"/>
-              </a:rPr>
-              <a:t>•  При повреждении → ERR_NO_KEY</a:t>
-            </a:r>
-          </a:p>
-          <a:p>
-            <a:pPr algn="l"/>
-            <a:r>
-              <a:rPr sz="1700" b="0">
-                <a:solidFill>
-                  <a:srgbClr val="1A1A1A"/>
-                </a:solidFill>
-                <a:latin typeface="Calibri"/>
-              </a:rPr>
-              <a:t>•  Закрытый ключ d из чипа</a:t>
-            </a:r>
-          </a:p>
-          <a:p>
-            <a:pPr algn="l"/>
-            <a:r>
-              <a:rPr sz="1700" b="0">
-                <a:solidFill>
-                  <a:srgbClr val="1A1A1A"/>
-                </a:solidFill>
-                <a:latin typeface="Calibri"/>
-              </a:rPr>
-              <a:t>    не выводится наружу</a:t>
-            </a:r>
+              <a:rPr sz="1700" b="0" dirty="0">
+                <a:solidFill>
+                  <a:srgbClr val="1A1A1A"/>
+                </a:solidFill>
+                <a:latin typeface="Calibri"/>
+              </a:rPr>
+              <a:t>•  </a:t>
+            </a:r>
+            <a:r>
+              <a:rPr sz="1700" b="0" dirty="0" err="1">
+                <a:solidFill>
+                  <a:srgbClr val="1A1A1A"/>
+                </a:solidFill>
+                <a:latin typeface="Calibri"/>
+              </a:rPr>
+              <a:t>Защита</a:t>
+            </a:r>
+            <a:r>
+              <a:rPr sz="1700" b="0" dirty="0">
+                <a:solidFill>
+                  <a:srgbClr val="1A1A1A"/>
+                </a:solidFill>
+                <a:latin typeface="Calibri"/>
+              </a:rPr>
+              <a:t> </a:t>
+            </a:r>
+            <a:r>
+              <a:rPr sz="1700" b="0" dirty="0" err="1">
+                <a:solidFill>
+                  <a:srgbClr val="1A1A1A"/>
+                </a:solidFill>
+                <a:latin typeface="Calibri"/>
+              </a:rPr>
+              <a:t>целостности</a:t>
+            </a:r>
+            <a:r>
+              <a:rPr sz="1700" b="0" dirty="0">
+                <a:solidFill>
+                  <a:srgbClr val="1A1A1A"/>
+                </a:solidFill>
+                <a:latin typeface="Calibri"/>
+              </a:rPr>
+              <a:t> </a:t>
+            </a:r>
+            <a:r>
+              <a:rPr sz="1700" b="0" dirty="0" err="1">
+                <a:solidFill>
+                  <a:srgbClr val="1A1A1A"/>
+                </a:solidFill>
+                <a:latin typeface="Calibri"/>
+              </a:rPr>
+              <a:t>по</a:t>
+            </a:r>
+            <a:r>
+              <a:rPr sz="1700" b="0" dirty="0">
+                <a:solidFill>
+                  <a:srgbClr val="1A1A1A"/>
+                </a:solidFill>
+                <a:latin typeface="Calibri"/>
+              </a:rPr>
+              <a:t> CRC</a:t>
+            </a:r>
+          </a:p>
+          <a:p>
+            <a:pPr algn="l"/>
+            <a:r>
+              <a:rPr sz="1700" b="0" dirty="0">
+                <a:solidFill>
+                  <a:srgbClr val="1A1A1A"/>
+                </a:solidFill>
+                <a:latin typeface="Calibri"/>
+              </a:rPr>
+              <a:t>•  </a:t>
+            </a:r>
+            <a:r>
+              <a:rPr sz="1700" b="0" dirty="0" err="1">
+                <a:solidFill>
+                  <a:srgbClr val="1A1A1A"/>
+                </a:solidFill>
+                <a:latin typeface="Calibri"/>
+              </a:rPr>
+              <a:t>При</a:t>
+            </a:r>
+            <a:r>
+              <a:rPr sz="1700" b="0" dirty="0">
+                <a:solidFill>
+                  <a:srgbClr val="1A1A1A"/>
+                </a:solidFill>
+                <a:latin typeface="Calibri"/>
+              </a:rPr>
+              <a:t> </a:t>
+            </a:r>
+            <a:r>
+              <a:rPr sz="1700" b="0" dirty="0" err="1">
+                <a:solidFill>
+                  <a:srgbClr val="1A1A1A"/>
+                </a:solidFill>
+                <a:latin typeface="Calibri"/>
+              </a:rPr>
+              <a:t>повреждении</a:t>
+            </a:r>
+            <a:r>
+              <a:rPr sz="1700" b="0" dirty="0">
+                <a:solidFill>
+                  <a:srgbClr val="1A1A1A"/>
+                </a:solidFill>
+                <a:latin typeface="Calibri"/>
+              </a:rPr>
+              <a:t> → ERR_NO_KEY</a:t>
+            </a:r>
+          </a:p>
+          <a:p>
+            <a:pPr algn="l"/>
+            <a:r>
+              <a:rPr sz="1700" b="0" dirty="0">
+                <a:solidFill>
+                  <a:srgbClr val="1A1A1A"/>
+                </a:solidFill>
+                <a:latin typeface="Calibri"/>
+              </a:rPr>
+              <a:t>•  </a:t>
+            </a:r>
+            <a:r>
+              <a:rPr sz="1700" b="0" dirty="0" err="1">
+                <a:solidFill>
+                  <a:srgbClr val="1A1A1A"/>
+                </a:solidFill>
+                <a:latin typeface="Calibri"/>
+              </a:rPr>
+              <a:t>Закрытый</a:t>
+            </a:r>
+            <a:r>
+              <a:rPr sz="1700" b="0" dirty="0">
+                <a:solidFill>
+                  <a:srgbClr val="1A1A1A"/>
+                </a:solidFill>
+                <a:latin typeface="Calibri"/>
+              </a:rPr>
+              <a:t> </a:t>
+            </a:r>
+            <a:r>
+              <a:rPr sz="1700" b="0" dirty="0" err="1">
+                <a:solidFill>
+                  <a:srgbClr val="1A1A1A"/>
+                </a:solidFill>
+                <a:latin typeface="Calibri"/>
+              </a:rPr>
+              <a:t>ключ</a:t>
+            </a:r>
+            <a:r>
+              <a:rPr sz="1700" b="0" dirty="0">
+                <a:solidFill>
+                  <a:srgbClr val="1A1A1A"/>
+                </a:solidFill>
+                <a:latin typeface="Calibri"/>
+              </a:rPr>
+              <a:t> d </a:t>
+            </a:r>
+            <a:r>
+              <a:rPr sz="1700" b="0" dirty="0" err="1">
+                <a:solidFill>
+                  <a:srgbClr val="1A1A1A"/>
+                </a:solidFill>
+                <a:latin typeface="Calibri"/>
+              </a:rPr>
+              <a:t>из</a:t>
+            </a:r>
+            <a:r>
+              <a:rPr sz="1700" b="0" dirty="0">
+                <a:solidFill>
+                  <a:srgbClr val="1A1A1A"/>
+                </a:solidFill>
+                <a:latin typeface="Calibri"/>
+              </a:rPr>
+              <a:t> </a:t>
+            </a:r>
+            <a:r>
+              <a:rPr sz="1700" b="0" dirty="0" err="1">
+                <a:solidFill>
+                  <a:srgbClr val="1A1A1A"/>
+                </a:solidFill>
+                <a:latin typeface="Calibri"/>
+              </a:rPr>
+              <a:t>чипа</a:t>
+            </a:r>
+            <a:endParaRPr sz="1700" b="0" dirty="0">
+              <a:solidFill>
+                <a:srgbClr val="1A1A1A"/>
+              </a:solidFill>
+              <a:latin typeface="Calibri"/>
+            </a:endParaRPr>
+          </a:p>
+          <a:p>
+            <a:pPr algn="l"/>
+            <a:r>
+              <a:rPr sz="1700" b="0" dirty="0">
+                <a:solidFill>
+                  <a:srgbClr val="1A1A1A"/>
+                </a:solidFill>
+                <a:latin typeface="Calibri"/>
+              </a:rPr>
+              <a:t>    </a:t>
+            </a:r>
+            <a:r>
+              <a:rPr sz="1700" b="0" dirty="0" err="1">
+                <a:solidFill>
+                  <a:srgbClr val="1A1A1A"/>
+                </a:solidFill>
+                <a:latin typeface="Calibri"/>
+              </a:rPr>
+              <a:t>не</a:t>
+            </a:r>
+            <a:r>
+              <a:rPr sz="1700" b="0" dirty="0">
+                <a:solidFill>
+                  <a:srgbClr val="1A1A1A"/>
+                </a:solidFill>
+                <a:latin typeface="Calibri"/>
+              </a:rPr>
+              <a:t> </a:t>
+            </a:r>
+            <a:r>
+              <a:rPr sz="1700" b="0" dirty="0" err="1">
+                <a:solidFill>
+                  <a:srgbClr val="1A1A1A"/>
+                </a:solidFill>
+                <a:latin typeface="Calibri"/>
+              </a:rPr>
+              <a:t>выводится</a:t>
+            </a:r>
+            <a:r>
+              <a:rPr sz="1700" b="0" dirty="0">
+                <a:solidFill>
+                  <a:srgbClr val="1A1A1A"/>
+                </a:solidFill>
+                <a:latin typeface="Calibri"/>
+              </a:rPr>
+              <a:t> </a:t>
+            </a:r>
+            <a:r>
+              <a:rPr sz="1700" b="0" dirty="0" err="1">
+                <a:solidFill>
+                  <a:srgbClr val="1A1A1A"/>
+                </a:solidFill>
+                <a:latin typeface="Calibri"/>
+              </a:rPr>
+              <a:t>наружу</a:t>
+            </a:r>
+            <a:endParaRPr sz="1700" b="0" dirty="0">
+              <a:solidFill>
+                <a:srgbClr val="1A1A1A"/>
+              </a:solidFill>
+              <a:latin typeface="Calibri"/>
+            </a:endParaRPr>
           </a:p>
         </p:txBody>
       </p:sp>
@@ -11492,7 +13921,7 @@
           <a:noFill/>
         </p:spPr>
         <p:txBody>
-          <a:bodyPr wrap="square" lIns="0" rIns="0" tIns="0" bIns="0">
+          <a:bodyPr wrap="square" lIns="0" tIns="0" rIns="0" bIns="0">
             <a:spAutoFit/>
           </a:bodyPr>
           <a:lstStyle/>
@@ -11527,7 +13956,7 @@
           <a:noFill/>
         </p:spPr>
         <p:txBody>
-          <a:bodyPr wrap="square" lIns="0" rIns="0" tIns="0" bIns="0">
+          <a:bodyPr wrap="square" lIns="0" tIns="0" rIns="0" bIns="0">
             <a:spAutoFit/>
           </a:bodyPr>
           <a:lstStyle/>
@@ -11554,7 +13983,7 @@
 </file>
 
 <file path=ppt/slides/slide9.xml><?xml version="1.0" encoding="utf-8"?>
-<p:sld xmlns:a="http://schemas.openxmlformats.org/drawingml/2006/main" xmlns:p="http://schemas.openxmlformats.org/presentationml/2006/main" xmlns:r="http://schemas.openxmlformats.org/officeDocument/2006/relationships">
+<p:sld xmlns:a="http://schemas.openxmlformats.org/drawingml/2006/main" xmlns:r="http://schemas.openxmlformats.org/officeDocument/2006/relationships" xmlns:p="http://schemas.openxmlformats.org/presentationml/2006/main">
   <p:cSld>
     <p:spTree>
       <p:nvGrpSpPr>
@@ -11562,7 +13991,14 @@
         <p:cNvGrpSpPr/>
         <p:nvPr/>
       </p:nvGrpSpPr>
-      <p:grpSpPr/>
+      <p:grpSpPr>
+        <a:xfrm>
+          <a:off x="0" y="0"/>
+          <a:ext cx="0" cy="0"/>
+          <a:chOff x="0" y="0"/>
+          <a:chExt cx="0" cy="0"/>
+        </a:xfrm>
+      </p:grpSpPr>
       <p:sp>
         <p:nvSpPr>
           <p:cNvPr id="2" name="Rectangle 1"/>
@@ -11603,6 +14039,7 @@
           <a:lstStyle/>
           <a:p>
             <a:pPr algn="ctr"/>
+            <a:endParaRPr/>
           </a:p>
         </p:txBody>
       </p:sp>
@@ -11623,7 +14060,7 @@
           <a:noFill/>
         </p:spPr>
         <p:txBody>
-          <a:bodyPr wrap="square" lIns="0" rIns="0" tIns="0" bIns="0">
+          <a:bodyPr wrap="square" lIns="0" tIns="0" rIns="0" bIns="0">
             <a:spAutoFit/>
           </a:bodyPr>
           <a:lstStyle/>
@@ -11681,6 +14118,7 @@
           <a:lstStyle/>
           <a:p>
             <a:pPr algn="ctr"/>
+            <a:endParaRPr/>
           </a:p>
         </p:txBody>
       </p:sp>
@@ -11701,7 +14139,7 @@
           <a:noFill/>
         </p:spPr>
         <p:txBody>
-          <a:bodyPr wrap="square" lIns="0" rIns="0" tIns="0" bIns="0">
+          <a:bodyPr wrap="square" lIns="0" tIns="0" rIns="0" bIns="0">
             <a:spAutoFit/>
           </a:bodyPr>
           <a:lstStyle/>
@@ -11761,6 +14199,7 @@
           <a:lstStyle/>
           <a:p>
             <a:pPr algn="ctr"/>
+            <a:endParaRPr/>
           </a:p>
         </p:txBody>
       </p:sp>
@@ -11781,7 +14220,7 @@
           <a:noFill/>
         </p:spPr>
         <p:txBody>
-          <a:bodyPr wrap="square" lIns="0" rIns="0" tIns="0" bIns="0">
+          <a:bodyPr wrap="square" lIns="0" tIns="0" rIns="0" bIns="0">
             <a:spAutoFit/>
           </a:bodyPr>
           <a:lstStyle/>
@@ -11816,7 +14255,7 @@
           <a:noFill/>
         </p:spPr>
         <p:txBody>
-          <a:bodyPr wrap="square" lIns="0" rIns="0" tIns="0" bIns="0">
+          <a:bodyPr wrap="square" lIns="0" tIns="0" rIns="0" bIns="0">
             <a:spAutoFit/>
           </a:bodyPr>
           <a:lstStyle/>
@@ -11900,6 +14339,7 @@
           <a:lstStyle/>
           <a:p>
             <a:pPr algn="ctr"/>
+            <a:endParaRPr/>
           </a:p>
         </p:txBody>
       </p:sp>
@@ -11920,7 +14360,7 @@
           <a:noFill/>
         </p:spPr>
         <p:txBody>
-          <a:bodyPr wrap="square" lIns="0" rIns="0" tIns="0" bIns="0">
+          <a:bodyPr wrap="square" lIns="0" tIns="0" rIns="0" bIns="0">
             <a:spAutoFit/>
           </a:bodyPr>
           <a:lstStyle/>
@@ -11955,7 +14395,7 @@
           <a:noFill/>
         </p:spPr>
         <p:txBody>
-          <a:bodyPr wrap="square" lIns="0" rIns="0" tIns="0" bIns="0">
+          <a:bodyPr wrap="square" lIns="0" tIns="0" rIns="0" bIns="0">
             <a:spAutoFit/>
           </a:bodyPr>
           <a:lstStyle/>
@@ -12039,6 +14479,7 @@
           <a:lstStyle/>
           <a:p>
             <a:pPr algn="ctr"/>
+            <a:endParaRPr/>
           </a:p>
         </p:txBody>
       </p:sp>
@@ -12059,7 +14500,7 @@
           <a:noFill/>
         </p:spPr>
         <p:txBody>
-          <a:bodyPr wrap="square" lIns="0" rIns="0" tIns="0" bIns="0">
+          <a:bodyPr wrap="square" lIns="0" tIns="0" rIns="0" bIns="0">
             <a:spAutoFit/>
           </a:bodyPr>
           <a:lstStyle/>
@@ -12094,7 +14535,7 @@
           <a:noFill/>
         </p:spPr>
         <p:txBody>
-          <a:bodyPr wrap="square" lIns="0" rIns="0" tIns="0" bIns="0">
+          <a:bodyPr wrap="square" lIns="0" tIns="0" rIns="0" bIns="0">
             <a:spAutoFit/>
           </a:bodyPr>
           <a:lstStyle/>
@@ -12153,7 +14594,7 @@
           <a:noFill/>
         </p:spPr>
         <p:txBody>
-          <a:bodyPr wrap="square" lIns="0" rIns="0" tIns="0" bIns="0">
+          <a:bodyPr wrap="square" lIns="0" tIns="0" rIns="0" bIns="0">
             <a:spAutoFit/>
           </a:bodyPr>
           <a:lstStyle/>
@@ -12188,7 +14629,7 @@
           <a:noFill/>
         </p:spPr>
         <p:txBody>
-          <a:bodyPr wrap="square" lIns="0" rIns="0" tIns="0" bIns="0">
+          <a:bodyPr wrap="square" lIns="0" tIns="0" rIns="0" bIns="0">
             <a:spAutoFit/>
           </a:bodyPr>
           <a:lstStyle/>
@@ -12223,7 +14664,7 @@
           <a:noFill/>
         </p:spPr>
         <p:txBody>
-          <a:bodyPr wrap="square" lIns="0" rIns="0" tIns="0" bIns="0">
+          <a:bodyPr wrap="square" lIns="0" tIns="0" rIns="0" bIns="0">
             <a:spAutoFit/>
           </a:bodyPr>
           <a:lstStyle/>

--- a/docs/presentation.pptx
+++ b/docs/presentation.pptx
@@ -5455,7 +5455,7 @@
                           </a:solidFill>
                           <a:latin typeface="Calibri"/>
                         </a:rPr>
-                        <a:t>42 мс  /  ≈ 24 подписей/с</a:t>
+                        <a:t>42 мс  /  ≈ 1,05 МБ/с</a:t>
                       </a:r>
                     </a:p>
                   </a:txBody>
@@ -5528,7 +5528,7 @@
                           </a:solidFill>
                           <a:latin typeface="Calibri"/>
                         </a:rPr>
-                        <a:t>78 мс  /  ≈ 13 проверок/с</a:t>
+                        <a:t>78 мс  /  ≈ 1,01 МБ/с</a:t>
                       </a:r>
                     </a:p>
                   </a:txBody>
@@ -6257,7 +6257,7 @@
                           </a:solidFill>
                           <a:latin typeface="Calibri"/>
                         </a:rPr>
-                        <a:t>≈ 90 BYN</a:t>
+                        <a:t>коммерческая (по запросу у дилера)</a:t>
                       </a:r>
                     </a:p>
                   </a:txBody>
@@ -6352,7 +6352,7 @@
                           </a:solidFill>
                           <a:latin typeface="Calibri"/>
                         </a:rPr>
-                        <a:t>≈ 80 BYN</a:t>
+                        <a:t>коммерческая (по запросу у дилера)</a:t>
                       </a:r>
                     </a:p>
                   </a:txBody>
@@ -6447,7 +6447,7 @@
                           </a:solidFill>
                           <a:latin typeface="Calibri"/>
                         </a:rPr>
-                        <a:t>≈ 120 BYN</a:t>
+                        <a:t>коммерческая (по запросу у дилера)</a:t>
                       </a:r>
                     </a:p>
                   </a:txBody>
@@ -6542,7 +6542,7 @@
                           </a:solidFill>
                           <a:latin typeface="Calibri"/>
                         </a:rPr>
-                        <a:t>бесплатно</a:t>
+                        <a:t>бесплатно (Apache 2.0)</a:t>
                       </a:r>
                     </a:p>
                   </a:txBody>
@@ -6571,7 +6571,7 @@
                           </a:solidFill>
                           <a:latin typeface="Calibri"/>
                         </a:rPr>
-                        <a:t>ПАК «Подпись» (Авест)</a:t>
+                        <a:t>ПАК «Подпись» (НИИ ППМИ БГУ)</a:t>
                       </a:r>
                     </a:p>
                   </a:txBody>
@@ -6637,7 +6637,7 @@
                           </a:solidFill>
                           <a:latin typeface="Calibri"/>
                         </a:rPr>
-                        <a:t>≈ 350 BYN</a:t>
+                        <a:t>≈ 100 USD</a:t>
                       </a:r>
                     </a:p>
                   </a:txBody>
@@ -6732,7 +6732,7 @@
                           </a:solidFill>
                           <a:latin typeface="Calibri"/>
                         </a:rPr>
-                        <a:t>≈ 30 BYN</a:t>
+                        <a:t>≈ 30 BYN (комплектующие)</a:t>
                       </a:r>
                     </a:p>
                   </a:txBody>
